--- a/deliverables/Maroo_Privacy_Workshop_75min.pptx
+++ b/deliverables/Maroo_Privacy_Workshop_75min.pptx
@@ -617,7 +617,7 @@
       </p:grpSpPr>
       <p:sp>
         <p:nvSpPr>
-          <p:cNvPr id="332" name="Shape 332"/>
+          <p:cNvPr id="362" name="Shape 362"/>
           <p:cNvSpPr>
             <a:spLocks noGrp="1" noRot="1" noChangeAspect="1"/>
           </p:cNvSpPr>
@@ -644,7 +644,7 @@
       </p:sp>
       <p:sp>
         <p:nvSpPr>
-          <p:cNvPr id="333" name="Shape 333"/>
+          <p:cNvPr id="363" name="Shape 363"/>
           <p:cNvSpPr>
             <a:spLocks noGrp="1"/>
           </p:cNvSpPr>
@@ -694,7 +694,7 @@
       </p:grpSpPr>
       <p:sp>
         <p:nvSpPr>
-          <p:cNvPr id="339" name="Shape 339"/>
+          <p:cNvPr id="369" name="Shape 369"/>
           <p:cNvSpPr>
             <a:spLocks noGrp="1" noRot="1" noChangeAspect="1"/>
           </p:cNvSpPr>
@@ -721,7 +721,7 @@
       </p:sp>
       <p:sp>
         <p:nvSpPr>
-          <p:cNvPr id="340" name="Shape 340"/>
+          <p:cNvPr id="370" name="Shape 370"/>
           <p:cNvSpPr>
             <a:spLocks noGrp="1"/>
           </p:cNvSpPr>
@@ -771,7 +771,7 @@
       </p:grpSpPr>
       <p:sp>
         <p:nvSpPr>
-          <p:cNvPr id="357" name="Shape 357"/>
+          <p:cNvPr id="387" name="Shape 387"/>
           <p:cNvSpPr>
             <a:spLocks noGrp="1" noRot="1" noChangeAspect="1"/>
           </p:cNvSpPr>
@@ -798,7 +798,7 @@
       </p:sp>
       <p:sp>
         <p:nvSpPr>
-          <p:cNvPr id="358" name="Shape 358"/>
+          <p:cNvPr id="388" name="Shape 388"/>
           <p:cNvSpPr>
             <a:spLocks noGrp="1"/>
           </p:cNvSpPr>
@@ -848,7 +848,7 @@
       </p:grpSpPr>
       <p:sp>
         <p:nvSpPr>
-          <p:cNvPr id="365" name="Shape 365"/>
+          <p:cNvPr id="395" name="Shape 395"/>
           <p:cNvSpPr>
             <a:spLocks noGrp="1" noRot="1" noChangeAspect="1"/>
           </p:cNvSpPr>
@@ -875,7 +875,7 @@
       </p:sp>
       <p:sp>
         <p:nvSpPr>
-          <p:cNvPr id="366" name="Shape 366"/>
+          <p:cNvPr id="396" name="Shape 396"/>
           <p:cNvSpPr>
             <a:spLocks noGrp="1"/>
           </p:cNvSpPr>
@@ -925,7 +925,7 @@
       </p:grpSpPr>
       <p:sp>
         <p:nvSpPr>
-          <p:cNvPr id="372" name="Shape 372"/>
+          <p:cNvPr id="402" name="Shape 402"/>
           <p:cNvSpPr>
             <a:spLocks noGrp="1" noRot="1" noChangeAspect="1"/>
           </p:cNvSpPr>
@@ -952,7 +952,7 @@
       </p:sp>
       <p:sp>
         <p:nvSpPr>
-          <p:cNvPr id="373" name="Shape 373"/>
+          <p:cNvPr id="403" name="Shape 403"/>
           <p:cNvSpPr>
             <a:spLocks noGrp="1"/>
           </p:cNvSpPr>
@@ -1002,7 +1002,7 @@
       </p:grpSpPr>
       <p:sp>
         <p:nvSpPr>
-          <p:cNvPr id="408" name="Shape 408"/>
+          <p:cNvPr id="438" name="Shape 438"/>
           <p:cNvSpPr>
             <a:spLocks noGrp="1" noRot="1" noChangeAspect="1"/>
           </p:cNvSpPr>
@@ -1025,7 +1025,7 @@
       </p:sp>
       <p:sp>
         <p:nvSpPr>
-          <p:cNvPr id="409" name="Shape 409"/>
+          <p:cNvPr id="439" name="Shape 439"/>
           <p:cNvSpPr>
             <a:spLocks noGrp="1"/>
           </p:cNvSpPr>
@@ -1043,7 +1043,7 @@
           <a:lstStyle/>
           <a:p>
             <a:r>
-              <a:t>시간 27–31. Clairveil Local 구성도다. runner가 임시 localnet과 prover를 실행하고, 하나의 treasury note를 세 output으로 전이한 뒤 세 viewing key로 scan한다. Maroo OKRW, PCL, VK와 proof 포맷 호환은 증명하지 않는다.</a:t>
+              <a:t>시간 27–31. Clairveil Local 구성도다. runner가 off-chain Go prover와 임시 localnet을 실행한다. prover가 proof를 생성하고 local x/privacy verifier가 이를 검증한 뒤 세 viewing key로 scan한다. Maroo OKRW, PCL, VK와 proof 포맷 호환은 증명하지 않는다.</a:t>
             </a:r>
           </a:p>
         </p:txBody>
@@ -1075,7 +1075,7 @@
       </p:grpSpPr>
       <p:sp>
         <p:nvSpPr>
-          <p:cNvPr id="416" name="Shape 416"/>
+          <p:cNvPr id="446" name="Shape 446"/>
           <p:cNvSpPr>
             <a:spLocks noGrp="1" noRot="1" noChangeAspect="1"/>
           </p:cNvSpPr>
@@ -1102,7 +1102,7 @@
       </p:sp>
       <p:sp>
         <p:nvSpPr>
-          <p:cNvPr id="417" name="Shape 417"/>
+          <p:cNvPr id="447" name="Shape 447"/>
           <p:cNvSpPr>
             <a:spLocks noGrp="1"/>
           </p:cNvSpPr>
@@ -1152,7 +1152,7 @@
       </p:grpSpPr>
       <p:sp>
         <p:nvSpPr>
-          <p:cNvPr id="424" name="Shape 424"/>
+          <p:cNvPr id="454" name="Shape 454"/>
           <p:cNvSpPr>
             <a:spLocks noGrp="1" noRot="1" noChangeAspect="1"/>
           </p:cNvSpPr>
@@ -1179,7 +1179,7 @@
       </p:sp>
       <p:sp>
         <p:nvSpPr>
-          <p:cNvPr id="425" name="Shape 425"/>
+          <p:cNvPr id="455" name="Shape 455"/>
           <p:cNvSpPr>
             <a:spLocks noGrp="1"/>
           </p:cNvSpPr>
@@ -1229,7 +1229,7 @@
       </p:grpSpPr>
       <p:sp>
         <p:nvSpPr>
-          <p:cNvPr id="462" name="Shape 462"/>
+          <p:cNvPr id="492" name="Shape 492"/>
           <p:cNvSpPr>
             <a:spLocks noGrp="1" noRot="1" noChangeAspect="1"/>
           </p:cNvSpPr>
@@ -1252,7 +1252,7 @@
       </p:sp>
       <p:sp>
         <p:nvSpPr>
-          <p:cNvPr id="463" name="Shape 463"/>
+          <p:cNvPr id="493" name="Shape 493"/>
           <p:cNvSpPr>
             <a:spLocks noGrp="1"/>
           </p:cNvSpPr>
@@ -1302,7 +1302,7 @@
       </p:grpSpPr>
       <p:sp>
         <p:nvSpPr>
-          <p:cNvPr id="469" name="Shape 469"/>
+          <p:cNvPr id="499" name="Shape 499"/>
           <p:cNvSpPr>
             <a:spLocks noGrp="1" noRot="1" noChangeAspect="1"/>
           </p:cNvSpPr>
@@ -1329,7 +1329,7 @@
       </p:sp>
       <p:sp>
         <p:nvSpPr>
-          <p:cNvPr id="470" name="Shape 470"/>
+          <p:cNvPr id="500" name="Shape 500"/>
           <p:cNvSpPr>
             <a:spLocks noGrp="1"/>
           </p:cNvSpPr>
@@ -1456,7 +1456,7 @@
       </p:grpSpPr>
       <p:sp>
         <p:nvSpPr>
-          <p:cNvPr id="502" name="Shape 502"/>
+          <p:cNvPr id="532" name="Shape 532"/>
           <p:cNvSpPr>
             <a:spLocks noGrp="1" noRot="1" noChangeAspect="1"/>
           </p:cNvSpPr>
@@ -1479,7 +1479,7 @@
       </p:sp>
       <p:sp>
         <p:nvSpPr>
-          <p:cNvPr id="503" name="Shape 503"/>
+          <p:cNvPr id="533" name="Shape 533"/>
           <p:cNvSpPr>
             <a:spLocks noGrp="1"/>
           </p:cNvSpPr>
@@ -1529,7 +1529,7 @@
       </p:grpSpPr>
       <p:sp>
         <p:nvSpPr>
-          <p:cNvPr id="549" name="Shape 549"/>
+          <p:cNvPr id="579" name="Shape 579"/>
           <p:cNvSpPr>
             <a:spLocks noGrp="1" noRot="1" noChangeAspect="1"/>
           </p:cNvSpPr>
@@ -1552,7 +1552,7 @@
       </p:sp>
       <p:sp>
         <p:nvSpPr>
-          <p:cNvPr id="550" name="Shape 550"/>
+          <p:cNvPr id="580" name="Shape 580"/>
           <p:cNvSpPr>
             <a:spLocks noGrp="1"/>
           </p:cNvSpPr>
@@ -1602,7 +1602,7 @@
       </p:grpSpPr>
       <p:sp>
         <p:nvSpPr>
-          <p:cNvPr id="585" name="Shape 585"/>
+          <p:cNvPr id="615" name="Shape 615"/>
           <p:cNvSpPr>
             <a:spLocks noGrp="1" noRot="1" noChangeAspect="1"/>
           </p:cNvSpPr>
@@ -1625,7 +1625,7 @@
       </p:sp>
       <p:sp>
         <p:nvSpPr>
-          <p:cNvPr id="586" name="Shape 586"/>
+          <p:cNvPr id="616" name="Shape 616"/>
           <p:cNvSpPr>
             <a:spLocks noGrp="1"/>
           </p:cNvSpPr>
@@ -1675,7 +1675,7 @@
       </p:grpSpPr>
       <p:sp>
         <p:nvSpPr>
-          <p:cNvPr id="595" name="Shape 595"/>
+          <p:cNvPr id="625" name="Shape 625"/>
           <p:cNvSpPr>
             <a:spLocks noGrp="1" noRot="1" noChangeAspect="1"/>
           </p:cNvSpPr>
@@ -1702,7 +1702,7 @@
       </p:sp>
       <p:sp>
         <p:nvSpPr>
-          <p:cNvPr id="596" name="Shape 596"/>
+          <p:cNvPr id="626" name="Shape 626"/>
           <p:cNvSpPr>
             <a:spLocks noGrp="1"/>
           </p:cNvSpPr>
@@ -1752,7 +1752,7 @@
       </p:grpSpPr>
       <p:sp>
         <p:nvSpPr>
-          <p:cNvPr id="603" name="Shape 603"/>
+          <p:cNvPr id="633" name="Shape 633"/>
           <p:cNvSpPr>
             <a:spLocks noGrp="1" noRot="1" noChangeAspect="1"/>
           </p:cNvSpPr>
@@ -1779,7 +1779,7 @@
       </p:sp>
       <p:sp>
         <p:nvSpPr>
-          <p:cNvPr id="604" name="Shape 604"/>
+          <p:cNvPr id="634" name="Shape 634"/>
           <p:cNvSpPr>
             <a:spLocks noGrp="1"/>
           </p:cNvSpPr>
@@ -1829,7 +1829,7 @@
       </p:grpSpPr>
       <p:sp>
         <p:nvSpPr>
-          <p:cNvPr id="610" name="Shape 610"/>
+          <p:cNvPr id="640" name="Shape 640"/>
           <p:cNvSpPr>
             <a:spLocks noGrp="1" noRot="1" noChangeAspect="1"/>
           </p:cNvSpPr>
@@ -1856,7 +1856,7 @@
       </p:sp>
       <p:sp>
         <p:nvSpPr>
-          <p:cNvPr id="611" name="Shape 611"/>
+          <p:cNvPr id="641" name="Shape 641"/>
           <p:cNvSpPr>
             <a:spLocks noGrp="1"/>
           </p:cNvSpPr>
@@ -1906,7 +1906,7 @@
       </p:grpSpPr>
       <p:sp>
         <p:nvSpPr>
-          <p:cNvPr id="617" name="Shape 617"/>
+          <p:cNvPr id="647" name="Shape 647"/>
           <p:cNvSpPr>
             <a:spLocks noGrp="1" noRot="1" noChangeAspect="1"/>
           </p:cNvSpPr>
@@ -1933,7 +1933,7 @@
       </p:sp>
       <p:sp>
         <p:nvSpPr>
-          <p:cNvPr id="618" name="Shape 618"/>
+          <p:cNvPr id="648" name="Shape 648"/>
           <p:cNvSpPr>
             <a:spLocks noGrp="1"/>
           </p:cNvSpPr>
@@ -1951,7 +1951,7 @@
           <a:lstStyle/>
           <a:p>
             <a:r>
-              <a:t>시간 63–69. 오류 문자열보다 첫 실패 계층을 찾는다. 모든 revert를 PCL 거부라고 부르지 않는다. receipt 성공도 직원 수령과 업무 정확성을 자동 보장하지 않는다.</a:t>
+              <a:t>시간 63–69. 오류 문자열보다 첫 실패 계층을 찾는다. proof 생성과 proof 검증을 구분하고, 모든 revert를 PCL 거부라고 부르지 않는다. receipt 성공도 직원 수령과 업무 정확성을 자동 보장하지 않는다.</a:t>
             </a:r>
           </a:p>
         </p:txBody>
@@ -1983,7 +1983,7 @@
       </p:grpSpPr>
       <p:sp>
         <p:nvSpPr>
-          <p:cNvPr id="624" name="Shape 624"/>
+          <p:cNvPr id="654" name="Shape 654"/>
           <p:cNvSpPr>
             <a:spLocks noGrp="1" noRot="1" noChangeAspect="1"/>
           </p:cNvSpPr>
@@ -2010,7 +2010,7 @@
       </p:sp>
       <p:sp>
         <p:nvSpPr>
-          <p:cNvPr id="625" name="Shape 625"/>
+          <p:cNvPr id="655" name="Shape 655"/>
           <p:cNvSpPr>
             <a:spLocks noGrp="1"/>
           </p:cNvSpPr>
@@ -2060,7 +2060,7 @@
       </p:grpSpPr>
       <p:sp>
         <p:nvSpPr>
-          <p:cNvPr id="631" name="Shape 631"/>
+          <p:cNvPr id="661" name="Shape 661"/>
           <p:cNvSpPr>
             <a:spLocks noGrp="1" noRot="1" noChangeAspect="1"/>
           </p:cNvSpPr>
@@ -2087,7 +2087,7 @@
       </p:sp>
       <p:sp>
         <p:nvSpPr>
-          <p:cNvPr id="632" name="Shape 632"/>
+          <p:cNvPr id="662" name="Shape 662"/>
           <p:cNvSpPr>
             <a:spLocks noGrp="1"/>
           </p:cNvSpPr>
@@ -2137,7 +2137,7 @@
       </p:grpSpPr>
       <p:sp>
         <p:nvSpPr>
-          <p:cNvPr id="638" name="Shape 638"/>
+          <p:cNvPr id="668" name="Shape 668"/>
           <p:cNvSpPr>
             <a:spLocks noGrp="1" noRot="1" noChangeAspect="1"/>
           </p:cNvSpPr>
@@ -2164,7 +2164,7 @@
       </p:sp>
       <p:sp>
         <p:nvSpPr>
-          <p:cNvPr id="639" name="Shape 639"/>
+          <p:cNvPr id="669" name="Shape 669"/>
           <p:cNvSpPr>
             <a:spLocks noGrp="1"/>
           </p:cNvSpPr>
@@ -2182,7 +2182,7 @@
           <a:lstStyle/>
           <a:p>
             <a:r>
-              <a:t>시간 69–75. 1주에는 owner와 호환성 blocker를 확정한다. 4주에는 합성 직원으로 Maroo Testnet success run 또는 blocker report를 만든다. 8주에는 custody, policy change, monitoring과 운영 절차를 검토한다. 법률 적합성 보증과 대규모 성능 검증은 이번 워크숍 범위 밖이다.</a:t>
+              <a:t>시간 69–75. 기관은 prover를 반드시 직접 호스팅할 필요가 없지만, 자체 운영과 managed service 중 하나를 선택하고 witness 노출과 artifact 호환성을 통제해야 한다. 온체인 verifier와 VK lifecycle은 Maroo protocol 책임으로 분리한다. 4주에는 합성 직원으로 Maroo Testnet success run 또는 blocker report를 만든다.</a:t>
             </a:r>
           </a:p>
         </p:txBody>
@@ -2291,7 +2291,7 @@
       </p:grpSpPr>
       <p:sp>
         <p:nvSpPr>
-          <p:cNvPr id="646" name="Shape 646"/>
+          <p:cNvPr id="676" name="Shape 676"/>
           <p:cNvSpPr>
             <a:spLocks noGrp="1" noRot="1" noChangeAspect="1"/>
           </p:cNvSpPr>
@@ -2318,7 +2318,7 @@
       </p:sp>
       <p:sp>
         <p:nvSpPr>
-          <p:cNvPr id="647" name="Shape 647"/>
+          <p:cNvPr id="677" name="Shape 677"/>
           <p:cNvSpPr>
             <a:spLocks noGrp="1"/>
           </p:cNvSpPr>
@@ -2336,7 +2336,7 @@
           <a:lstStyle/>
           <a:p>
             <a:r>
-              <a:t>마무리 토론. 참가자가 PCL, Privacy, application/prover, scanner/auditor의 책임을 한 문장씩 설명하게 한다. workshop/exit-ticket.md 제출로 종료한다.</a:t>
+              <a:t>마무리 토론. 참가자가 off-chain prover, PCL wrapper, x/privacy verifier, scanner와 auditor의 책임을 구분해 설명하게 한다. workshop/exit-ticket.md 제출로 종료한다.</a:t>
             </a:r>
           </a:p>
         </p:txBody>
@@ -2599,7 +2599,7 @@
       </p:grpSpPr>
       <p:sp>
         <p:nvSpPr>
-          <p:cNvPr id="283" name="Shape 283"/>
+          <p:cNvPr id="292" name="Shape 292"/>
           <p:cNvSpPr>
             <a:spLocks noGrp="1" noRot="1" noChangeAspect="1"/>
           </p:cNvSpPr>
@@ -2622,7 +2622,7 @@
       </p:sp>
       <p:sp>
         <p:nvSpPr>
-          <p:cNvPr id="284" name="Shape 284"/>
+          <p:cNvPr id="293" name="Shape 293"/>
           <p:cNvSpPr>
             <a:spLocks noGrp="1"/>
           </p:cNvSpPr>
@@ -2640,7 +2640,7 @@
           <a:lstStyle/>
           <a:p>
             <a:r>
-              <a:t>시간 17–23. Maroo target architecture다. 온체인과 오프체인 경계를 먼저 설명한 뒤 각 화살표의 신뢰 가정을 확인한다. PCL 통과만으로 직원과 shielded output의 업무 매핑이 맞다고 볼 수 없다.</a:t>
+              <a:t>시간 17–23. Maroo target architecture다. proof는 off-chain에서 생성하고, Maroo validator의 x/privacy verifier가 온체인에서 검증한다. PCL은 dApp이 먼저 호출하는 별도 단계가 아니라 Privacy policy-aware wrapper의 pre/post lifecycle이다. 공식 근거: https://docs.maroo.io/concepts/privacy/privacy-precompile-overview 및 https://docs.maroo.io/concepts/privacy/verifiable-privacy</a:t>
             </a:r>
           </a:p>
         </p:txBody>
@@ -2672,7 +2672,7 @@
       </p:grpSpPr>
       <p:sp>
         <p:nvSpPr>
-          <p:cNvPr id="317" name="Shape 317"/>
+          <p:cNvPr id="347" name="Shape 347"/>
           <p:cNvSpPr>
             <a:spLocks noGrp="1" noRot="1" noChangeAspect="1"/>
           </p:cNvSpPr>
@@ -2695,7 +2695,7 @@
       </p:sp>
       <p:sp>
         <p:nvSpPr>
-          <p:cNvPr id="318" name="Shape 318"/>
+          <p:cNvPr id="348" name="Shape 348"/>
           <p:cNvSpPr>
             <a:spLocks noGrp="1"/>
           </p:cNvSpPr>
@@ -2713,7 +2713,7 @@
           <a:lstStyle/>
           <a:p>
             <a:r>
-              <a:t>시간 23–27. target happy path의 sequence다. 1부터 8까지 읽는다. 현재 Maroo 제출은 호환 prover와 VK provenance가 없어 5번 transfer 성공 이후까지 진행하지 못했고 Path B receipt로 실패 계층만 관찰했다.</a:t>
+              <a:t>시간 23–27. target happy path sequence다. proof 생성은 off-chain, 검증은 Maroo x/privacy에서 수행한다. 현재 제출은 Maroo-compatible off-chain prover artifact와 scanner가 없어 transfer 성공 이후까지 진행하지 못했고 Path B receipt로 온체인 verifier의 rejection만 관찰했다.</a:t>
             </a:r>
           </a:p>
         </p:txBody>
@@ -2745,7 +2745,7 @@
       </p:grpSpPr>
       <p:sp>
         <p:nvSpPr>
-          <p:cNvPr id="324" name="Shape 324"/>
+          <p:cNvPr id="354" name="Shape 354"/>
           <p:cNvSpPr>
             <a:spLocks noGrp="1" noRot="1" noChangeAspect="1"/>
           </p:cNvSpPr>
@@ -2772,7 +2772,7 @@
       </p:sp>
       <p:sp>
         <p:nvSpPr>
-          <p:cNvPr id="325" name="Shape 325"/>
+          <p:cNvPr id="355" name="Shape 355"/>
           <p:cNvSpPr>
             <a:spLocks noGrp="1"/>
           </p:cNvSpPr>
@@ -2790,7 +2790,7 @@
           <a:lstStyle/>
           <a:p>
             <a:r>
-              <a:t>시간 44–52에도 다시 사용하는 책임 표다. 키를 보유한 주체와 실패 시 첫 확인 지점을 연결한다. 운영 환경에서는 custody와 service owner를 별도로 지정한다.</a:t>
+              <a:t>시간 44–52에도 다시 사용하는 책임 표다. 기관이 prover를 반드시 직접 호스팅해야 한다는 뜻은 아니다. 자체 운영 또는 검증된 managed service를 선택할 수 있지만 witness 경계와 artifact 호환성에 대한 통제 책임은 기관에 남는다. 온체인 검증과 상태 전이는 Maroo x/privacy verifier가 담당한다.</a:t>
             </a:r>
           </a:p>
         </p:txBody>
@@ -7130,7 +7130,7 @@
       </p:sp>
       <p:sp>
         <p:nvSpPr>
-          <p:cNvPr id="185" name="proof · note · disclosure"/>
+          <p:cNvPr id="185" name="proof 검증 · note state"/>
           <p:cNvSpPr txBox="1"/>
           <p:nvPr/>
         </p:nvSpPr>
@@ -7167,7 +7167,7 @@
           </a:lstStyle>
           <a:p>
             <a:r>
-              <a:t>proof · note · disclosure</a:t>
+              <a:t>proof 검증 · note state</a:t>
             </a:r>
           </a:p>
         </p:txBody>
@@ -7200,7 +7200,7 @@
       </p:grpSpPr>
       <p:sp>
         <p:nvSpPr>
-          <p:cNvPr id="327" name="공통 환경"/>
+          <p:cNvPr id="357" name="공통 환경"/>
           <p:cNvSpPr txBox="1">
             <a:spLocks noGrp="1"/>
           </p:cNvSpPr>
@@ -7234,7 +7234,7 @@
       </p:sp>
       <p:sp>
         <p:nvSpPr>
-          <p:cNvPr id="329" name="슬라이드 번호"/>
+          <p:cNvPr id="359" name="슬라이드 번호"/>
           <p:cNvSpPr txBox="1">
             <a:spLocks noGrp="1"/>
           </p:cNvSpPr>
@@ -7266,7 +7266,7 @@
       </p:sp>
       <p:sp>
         <p:nvSpPr>
-          <p:cNvPr id="330" name="설치는 사전에 마치고, 수업에서는 버전과 Clairveil commit을 함께 확인한다."/>
+          <p:cNvPr id="360" name="설치는 사전에 마치고, 수업에서는 버전과 Clairveil commit을 함께 확인한다."/>
           <p:cNvSpPr txBox="1"/>
           <p:nvPr/>
         </p:nvSpPr>
@@ -7313,7 +7313,7 @@
       </p:sp>
       <p:sp>
         <p:nvSpPr>
-          <p:cNvPr id="331" name="bun --version…"/>
+          <p:cNvPr id="361" name="bun --version…"/>
           <p:cNvSpPr txBox="1"/>
           <p:nvPr/>
         </p:nvSpPr>
@@ -7497,7 +7497,7 @@
       </p:grpSpPr>
       <p:sp>
         <p:nvSpPr>
-          <p:cNvPr id="335" name="계정과 급여 계획"/>
+          <p:cNvPr id="365" name="계정과 급여 계획"/>
           <p:cNvSpPr txBox="1">
             <a:spLocks noGrp="1"/>
           </p:cNvSpPr>
@@ -7531,7 +7531,7 @@
       </p:sp>
       <p:sp>
         <p:nvSpPr>
-          <p:cNvPr id="337" name="슬라이드 번호"/>
+          <p:cNvPr id="367" name="슬라이드 번호"/>
           <p:cNvSpPr txBox="1">
             <a:spLocks noGrp="1"/>
           </p:cNvSpPr>
@@ -7563,7 +7563,7 @@
       </p:sp>
       <p:graphicFrame>
         <p:nvGraphicFramePr>
-          <p:cNvPr id="338" name="표 1"/>
+          <p:cNvPr id="368" name="표 1"/>
           <p:cNvGraphicFramePr/>
           <p:nvPr/>
         </p:nvGraphicFramePr>
@@ -8048,7 +8048,7 @@
       </p:grpSpPr>
       <p:sp>
         <p:nvSpPr>
-          <p:cNvPr id="342" name="급여 계획"/>
+          <p:cNvPr id="372" name="급여 계획"/>
           <p:cNvSpPr txBox="1">
             <a:spLocks noGrp="1"/>
           </p:cNvSpPr>
@@ -8082,7 +8082,7 @@
       </p:sp>
       <p:sp>
         <p:nvSpPr>
-          <p:cNvPr id="344" name="슬라이드 번호"/>
+          <p:cNvPr id="374" name="슬라이드 번호"/>
           <p:cNvSpPr txBox="1">
             <a:spLocks noGrp="1"/>
           </p:cNvSpPr>
@@ -8114,7 +8114,7 @@
       </p:sp>
       <p:sp>
         <p:nvSpPr>
-          <p:cNvPr id="345" name="300"/>
+          <p:cNvPr id="375" name="300"/>
           <p:cNvSpPr txBox="1"/>
           <p:nvPr/>
         </p:nvSpPr>
@@ -8161,7 +8161,7 @@
       </p:sp>
       <p:sp>
         <p:nvSpPr>
-          <p:cNvPr id="346" name="합성 급여 총액"/>
+          <p:cNvPr id="376" name="합성 급여 총액"/>
           <p:cNvSpPr txBox="1"/>
           <p:nvPr/>
         </p:nvSpPr>
@@ -8208,7 +8208,7 @@
       </p:sp>
       <p:sp>
         <p:nvSpPr>
-          <p:cNvPr id="347" name="EMP-A"/>
+          <p:cNvPr id="377" name="EMP-A"/>
           <p:cNvSpPr txBox="1"/>
           <p:nvPr/>
         </p:nvSpPr>
@@ -8252,7 +8252,7 @@
       </p:sp>
       <p:sp>
         <p:nvSpPr>
-          <p:cNvPr id="348" name="100"/>
+          <p:cNvPr id="378" name="100"/>
           <p:cNvSpPr txBox="1"/>
           <p:nvPr/>
         </p:nvSpPr>
@@ -8299,7 +8299,7 @@
       </p:sp>
       <p:sp>
         <p:nvSpPr>
-          <p:cNvPr id="349" name="서로 다른 shielded profile"/>
+          <p:cNvPr id="379" name="서로 다른 shielded profile"/>
           <p:cNvSpPr txBox="1"/>
           <p:nvPr/>
         </p:nvSpPr>
@@ -8346,7 +8346,7 @@
       </p:sp>
       <p:sp>
         <p:nvSpPr>
-          <p:cNvPr id="350" name="EMP-B"/>
+          <p:cNvPr id="380" name="EMP-B"/>
           <p:cNvSpPr txBox="1"/>
           <p:nvPr/>
         </p:nvSpPr>
@@ -8390,7 +8390,7 @@
       </p:sp>
       <p:sp>
         <p:nvSpPr>
-          <p:cNvPr id="351" name="120"/>
+          <p:cNvPr id="381" name="120"/>
           <p:cNvSpPr txBox="1"/>
           <p:nvPr/>
         </p:nvSpPr>
@@ -8437,7 +8437,7 @@
       </p:sp>
       <p:sp>
         <p:nvSpPr>
-          <p:cNvPr id="352" name="서로 다른 shielded profile"/>
+          <p:cNvPr id="382" name="서로 다른 shielded profile"/>
           <p:cNvSpPr txBox="1"/>
           <p:nvPr/>
         </p:nvSpPr>
@@ -8484,7 +8484,7 @@
       </p:sp>
       <p:sp>
         <p:nvSpPr>
-          <p:cNvPr id="353" name="EMP-C"/>
+          <p:cNvPr id="383" name="EMP-C"/>
           <p:cNvSpPr txBox="1"/>
           <p:nvPr/>
         </p:nvSpPr>
@@ -8528,7 +8528,7 @@
       </p:sp>
       <p:sp>
         <p:nvSpPr>
-          <p:cNvPr id="354" name="80"/>
+          <p:cNvPr id="384" name="80"/>
           <p:cNvSpPr txBox="1"/>
           <p:nvPr/>
         </p:nvSpPr>
@@ -8575,7 +8575,7 @@
       </p:sp>
       <p:sp>
         <p:nvSpPr>
-          <p:cNvPr id="355" name="서로 다른 shielded profile"/>
+          <p:cNvPr id="385" name="서로 다른 shielded profile"/>
           <p:cNvSpPr txBox="1"/>
           <p:nvPr/>
         </p:nvSpPr>
@@ -8622,7 +8622,7 @@
       </p:sp>
       <p:sp>
         <p:nvSpPr>
-          <p:cNvPr id="356" name="Clairveil Local에서는 uclair, Maroo 목표에서는 OKRW 상당"/>
+          <p:cNvPr id="386" name="Clairveil Local에서는 uclair, Maroo 목표에서는 OKRW 상당"/>
           <p:cNvSpPr txBox="1"/>
           <p:nvPr/>
         </p:nvSpPr>
@@ -8695,7 +8695,7 @@
       </p:grpSpPr>
       <p:sp>
         <p:nvSpPr>
-          <p:cNvPr id="360" name="Maroo read-only preflight"/>
+          <p:cNvPr id="390" name="Maroo read-only preflight"/>
           <p:cNvSpPr txBox="1">
             <a:spLocks noGrp="1"/>
           </p:cNvSpPr>
@@ -8729,7 +8729,7 @@
       </p:sp>
       <p:sp>
         <p:nvSpPr>
-          <p:cNvPr id="362" name="슬라이드 번호"/>
+          <p:cNvPr id="392" name="슬라이드 번호"/>
           <p:cNvSpPr txBox="1">
             <a:spLocks noGrp="1"/>
           </p:cNvSpPr>
@@ -8761,7 +8761,7 @@
       </p:sp>
       <p:sp>
         <p:nvSpPr>
-          <p:cNvPr id="363" name="회사 계정, 잔액, OKRW, PCL, Privacy 상태를 읽는다. 이 단계는 상태를 바꾸지 않는다."/>
+          <p:cNvPr id="393" name="회사 계정, 잔액, OKRW, PCL, Privacy 상태를 읽는다. 이 단계는 상태를 바꾸지 않는다."/>
           <p:cNvSpPr txBox="1"/>
           <p:nvPr/>
         </p:nvSpPr>
@@ -8808,7 +8808,7 @@
       </p:sp>
       <p:sp>
         <p:nvSpPr>
-          <p:cNvPr id="364" name="bun run demo/scripts/run.ts \…"/>
+          <p:cNvPr id="394" name="bun run demo/scripts/run.ts \…"/>
           <p:cNvSpPr txBox="1"/>
           <p:nvPr/>
         </p:nvSpPr>
@@ -8960,7 +8960,7 @@
       </p:grpSpPr>
       <p:sp>
         <p:nvSpPr>
-          <p:cNvPr id="368" name="Maroo readiness 판정"/>
+          <p:cNvPr id="398" name="Maroo readiness 판정"/>
           <p:cNvSpPr txBox="1">
             <a:spLocks noGrp="1"/>
           </p:cNvSpPr>
@@ -8994,7 +8994,7 @@
       </p:sp>
       <p:sp>
         <p:nvSpPr>
-          <p:cNvPr id="370" name="슬라이드 번호"/>
+          <p:cNvPr id="400" name="슬라이드 번호"/>
           <p:cNvSpPr txBox="1">
             <a:spLocks noGrp="1"/>
           </p:cNvSpPr>
@@ -9026,7 +9026,7 @@
       </p:sp>
       <p:graphicFrame>
         <p:nvGraphicFramePr>
-          <p:cNvPr id="371" name="표 1"/>
+          <p:cNvPr id="401" name="표 1"/>
           <p:cNvGraphicFramePr/>
           <p:nvPr/>
         </p:nvGraphicFramePr>
@@ -9439,7 +9439,7 @@
       </p:grpSpPr>
       <p:sp>
         <p:nvSpPr>
-          <p:cNvPr id="375" name="슬라이드 번호"/>
+          <p:cNvPr id="405" name="슬라이드 번호"/>
           <p:cNvSpPr txBox="1">
             <a:spLocks noGrp="1"/>
           </p:cNvSpPr>
@@ -9471,7 +9471,7 @@
       </p:sp>
       <p:sp>
         <p:nvSpPr>
-          <p:cNvPr id="376" name="Clairveil Local · 실제 proof를 확인하는 격리 환경"/>
+          <p:cNvPr id="406" name="Clairveil Local · 실제 proof를 확인하는 격리 환경"/>
           <p:cNvSpPr txBox="1"/>
           <p:nvPr/>
         </p:nvSpPr>
@@ -9515,7 +9515,7 @@
       </p:sp>
       <p:sp>
         <p:nvSpPr>
-          <p:cNvPr id="377" name="직사각형"/>
+          <p:cNvPr id="407" name="직사각형"/>
           <p:cNvSpPr/>
           <p:nvPr/>
         </p:nvSpPr>
@@ -9563,7 +9563,7 @@
       </p:sp>
       <p:sp>
         <p:nvSpPr>
-          <p:cNvPr id="378" name="LOCAL PROCESS BOUNDARY"/>
+          <p:cNvPr id="408" name="LOCAL PROCESS BOUNDARY"/>
           <p:cNvSpPr txBox="1"/>
           <p:nvPr/>
         </p:nvSpPr>
@@ -9610,7 +9610,7 @@
       </p:sp>
       <p:sp>
         <p:nvSpPr>
-          <p:cNvPr id="379" name="직사각형"/>
+          <p:cNvPr id="409" name="직사각형"/>
           <p:cNvSpPr/>
           <p:nvPr/>
         </p:nvSpPr>
@@ -9658,7 +9658,7 @@
       </p:sp>
       <p:sp>
         <p:nvSpPr>
-          <p:cNvPr id="380" name="Bun runner"/>
+          <p:cNvPr id="410" name="Bun runner"/>
           <p:cNvSpPr txBox="1"/>
           <p:nvPr/>
         </p:nvSpPr>
@@ -9705,7 +9705,7 @@
       </p:sp>
       <p:sp>
         <p:nvSpPr>
-          <p:cNvPr id="381" name="환경 준비·실행·정리"/>
+          <p:cNvPr id="411" name="환경 준비·실행·정리"/>
           <p:cNvSpPr txBox="1"/>
           <p:nvPr/>
         </p:nvSpPr>
@@ -9749,7 +9749,7 @@
       </p:sp>
       <p:sp>
         <p:nvSpPr>
-          <p:cNvPr id="382" name="evidence JSON"/>
+          <p:cNvPr id="412" name="evidence JSON"/>
           <p:cNvSpPr txBox="1"/>
           <p:nvPr/>
         </p:nvSpPr>
@@ -9793,7 +9793,7 @@
       </p:sp>
       <p:sp>
         <p:nvSpPr>
-          <p:cNvPr id="383" name="직사각형"/>
+          <p:cNvPr id="413" name="직사각형"/>
           <p:cNvSpPr/>
           <p:nvPr/>
         </p:nvSpPr>
@@ -9841,7 +9841,7 @@
       </p:sp>
       <p:sp>
         <p:nvSpPr>
-          <p:cNvPr id="384" name="Local chain"/>
+          <p:cNvPr id="414" name="Go prover"/>
           <p:cNvSpPr txBox="1"/>
           <p:nvPr/>
         </p:nvSpPr>
@@ -9881,14 +9881,14 @@
           </a:lstStyle>
           <a:p>
             <a:r>
-              <a:t>Local chain</a:t>
-            </a:r>
-          </a:p>
-        </p:txBody>
-      </p:sp>
-      <p:sp>
-        <p:nvSpPr>
-          <p:cNvPr id="385" name="Clairveil nodes"/>
+              <a:t>Go prover</a:t>
+            </a:r>
+          </a:p>
+        </p:txBody>
+      </p:sp>
+      <p:sp>
+        <p:nvSpPr>
+          <p:cNvPr id="415" name="off-chain · witness → proof"/>
           <p:cNvSpPr txBox="1"/>
           <p:nvPr/>
         </p:nvSpPr>
@@ -9925,14 +9925,14 @@
           </a:lstStyle>
           <a:p>
             <a:r>
-              <a:t>Clairveil nodes</a:t>
-            </a:r>
-          </a:p>
-        </p:txBody>
-      </p:sp>
-      <p:sp>
-        <p:nvSpPr>
-          <p:cNvPr id="386" name="x/privacy state"/>
+              <a:t>off-chain · witness → proof</a:t>
+            </a:r>
+          </a:p>
+        </p:txBody>
+      </p:sp>
+      <p:sp>
+        <p:nvSpPr>
+          <p:cNvPr id="416" name="3 encrypted outputs"/>
           <p:cNvSpPr txBox="1"/>
           <p:nvPr/>
         </p:nvSpPr>
@@ -9969,14 +9969,14 @@
           </a:lstStyle>
           <a:p>
             <a:r>
-              <a:t>x/privacy state</a:t>
-            </a:r>
-          </a:p>
-        </p:txBody>
-      </p:sp>
-      <p:sp>
-        <p:nvSpPr>
-          <p:cNvPr id="387" name="직사각형"/>
+              <a:t>3 encrypted outputs</a:t>
+            </a:r>
+          </a:p>
+        </p:txBody>
+      </p:sp>
+      <p:sp>
+        <p:nvSpPr>
+          <p:cNvPr id="417" name="직사각형"/>
           <p:cNvSpPr/>
           <p:nvPr/>
         </p:nvSpPr>
@@ -10024,7 +10024,7 @@
       </p:sp>
       <p:sp>
         <p:nvSpPr>
-          <p:cNvPr id="388" name="Go prover"/>
+          <p:cNvPr id="418" name="Prepared tx"/>
           <p:cNvSpPr txBox="1"/>
           <p:nvPr/>
         </p:nvSpPr>
@@ -10064,14 +10064,14 @@
           </a:lstStyle>
           <a:p>
             <a:r>
-              <a:t>Go prover</a:t>
-            </a:r>
-          </a:p>
-        </p:txBody>
-      </p:sp>
-      <p:sp>
-        <p:nvSpPr>
-          <p:cNvPr id="389" name="witness · proof"/>
+              <a:t>Prepared tx</a:t>
+            </a:r>
+          </a:p>
+        </p:txBody>
+      </p:sp>
+      <p:sp>
+        <p:nvSpPr>
+          <p:cNvPr id="419" name="deposit · batch"/>
           <p:cNvSpPr txBox="1"/>
           <p:nvPr/>
         </p:nvSpPr>
@@ -10108,14 +10108,14 @@
           </a:lstStyle>
           <a:p>
             <a:r>
-              <a:t>witness · proof</a:t>
-            </a:r>
-          </a:p>
-        </p:txBody>
-      </p:sp>
-      <p:sp>
-        <p:nvSpPr>
-          <p:cNvPr id="390" name="3 encrypted outputs"/>
+              <a:t>deposit · batch</a:t>
+            </a:r>
+          </a:p>
+        </p:txBody>
+      </p:sp>
+      <p:sp>
+        <p:nvSpPr>
+          <p:cNvPr id="420" name="input 1 · output 3"/>
           <p:cNvSpPr txBox="1"/>
           <p:nvPr/>
         </p:nvSpPr>
@@ -10152,14 +10152,14 @@
           </a:lstStyle>
           <a:p>
             <a:r>
-              <a:t>3 encrypted outputs</a:t>
-            </a:r>
-          </a:p>
-        </p:txBody>
-      </p:sp>
-      <p:sp>
-        <p:nvSpPr>
-          <p:cNvPr id="391" name="직사각형"/>
+              <a:t>input 1 · output 3</a:t>
+            </a:r>
+          </a:p>
+        </p:txBody>
+      </p:sp>
+      <p:sp>
+        <p:nvSpPr>
+          <p:cNvPr id="421" name="직사각형"/>
           <p:cNvSpPr/>
           <p:nvPr/>
         </p:nvSpPr>
@@ -10207,7 +10207,7 @@
       </p:sp>
       <p:sp>
         <p:nvSpPr>
-          <p:cNvPr id="392" name="Batch tx"/>
+          <p:cNvPr id="422" name="Local x/privacy"/>
           <p:cNvSpPr txBox="1"/>
           <p:nvPr/>
         </p:nvSpPr>
@@ -10247,14 +10247,14 @@
           </a:lstStyle>
           <a:p>
             <a:r>
-              <a:t>Batch tx</a:t>
-            </a:r>
-          </a:p>
-        </p:txBody>
-      </p:sp>
-      <p:sp>
-        <p:nvSpPr>
-          <p:cNvPr id="393" name="input 1 · output 3"/>
+              <a:t>Local x/privacy</a:t>
+            </a:r>
+          </a:p>
+        </p:txBody>
+      </p:sp>
+      <p:sp>
+        <p:nvSpPr>
+          <p:cNvPr id="423" name="proof verifier · state"/>
           <p:cNvSpPr txBox="1"/>
           <p:nvPr/>
         </p:nvSpPr>
@@ -10291,14 +10291,14 @@
           </a:lstStyle>
           <a:p>
             <a:r>
-              <a:t>input 1 · output 3</a:t>
-            </a:r>
-          </a:p>
-        </p:txBody>
-      </p:sp>
-      <p:sp>
-        <p:nvSpPr>
-          <p:cNvPr id="394" name="root · disclosure"/>
+              <a:t>proof verifier · state</a:t>
+            </a:r>
+          </a:p>
+        </p:txBody>
+      </p:sp>
+      <p:sp>
+        <p:nvSpPr>
+          <p:cNvPr id="424" name="root · nullifier"/>
           <p:cNvSpPr txBox="1"/>
           <p:nvPr/>
         </p:nvSpPr>
@@ -10335,14 +10335,14 @@
           </a:lstStyle>
           <a:p>
             <a:r>
-              <a:t>root · disclosure</a:t>
-            </a:r>
-          </a:p>
-        </p:txBody>
-      </p:sp>
-      <p:sp>
-        <p:nvSpPr>
-          <p:cNvPr id="395" name="직사각형"/>
+              <a:t>root · nullifier</a:t>
+            </a:r>
+          </a:p>
+        </p:txBody>
+      </p:sp>
+      <p:sp>
+        <p:nvSpPr>
+          <p:cNvPr id="425" name="직사각형"/>
           <p:cNvSpPr/>
           <p:nvPr/>
         </p:nvSpPr>
@@ -10390,7 +10390,7 @@
       </p:sp>
       <p:sp>
         <p:nvSpPr>
-          <p:cNvPr id="396" name="3 scanners"/>
+          <p:cNvPr id="426" name="3 scanners"/>
           <p:cNvSpPr txBox="1"/>
           <p:nvPr/>
         </p:nvSpPr>
@@ -10437,7 +10437,7 @@
       </p:sp>
       <p:sp>
         <p:nvSpPr>
-          <p:cNvPr id="397" name="A 100 · B 120"/>
+          <p:cNvPr id="427" name="A 100 · B 120"/>
           <p:cNvSpPr txBox="1"/>
           <p:nvPr/>
         </p:nvSpPr>
@@ -10481,7 +10481,7 @@
       </p:sp>
       <p:sp>
         <p:nvSpPr>
-          <p:cNvPr id="398" name="C 80 uclair"/>
+          <p:cNvPr id="428" name="C 80 uclair"/>
           <p:cNvSpPr txBox="1"/>
           <p:nvPr/>
         </p:nvSpPr>
@@ -10525,7 +10525,7 @@
       </p:sp>
       <p:sp>
         <p:nvSpPr>
-          <p:cNvPr id="399" name="→"/>
+          <p:cNvPr id="429" name="→"/>
           <p:cNvSpPr txBox="1"/>
           <p:nvPr/>
         </p:nvSpPr>
@@ -10572,7 +10572,7 @@
       </p:sp>
       <p:sp>
         <p:nvSpPr>
-          <p:cNvPr id="400" name="→"/>
+          <p:cNvPr id="430" name="→"/>
           <p:cNvSpPr txBox="1"/>
           <p:nvPr/>
         </p:nvSpPr>
@@ -10619,7 +10619,7 @@
       </p:sp>
       <p:sp>
         <p:nvSpPr>
-          <p:cNvPr id="401" name="→"/>
+          <p:cNvPr id="431" name="→"/>
           <p:cNvSpPr txBox="1"/>
           <p:nvPr/>
         </p:nvSpPr>
@@ -10666,7 +10666,7 @@
       </p:sp>
       <p:sp>
         <p:nvSpPr>
-          <p:cNvPr id="402" name="→"/>
+          <p:cNvPr id="432" name="→"/>
           <p:cNvSpPr txBox="1"/>
           <p:nvPr/>
         </p:nvSpPr>
@@ -10713,7 +10713,7 @@
       </p:sp>
       <p:sp>
         <p:nvSpPr>
-          <p:cNvPr id="403" name="직접 확인"/>
+          <p:cNvPr id="433" name="직접 확인"/>
           <p:cNvSpPr txBox="1"/>
           <p:nvPr/>
         </p:nvSpPr>
@@ -10760,7 +10760,7 @@
       </p:sp>
       <p:sp>
         <p:nvSpPr>
-          <p:cNvPr id="404" name="deposit · proof 1개 · output 3개 · 직원별 scan"/>
+          <p:cNvPr id="434" name="deposit · proof 1개 · output 3개 · 직원별 scan"/>
           <p:cNvSpPr txBox="1"/>
           <p:nvPr/>
         </p:nvSpPr>
@@ -10804,7 +10804,7 @@
       </p:sp>
       <p:sp>
         <p:nvSpPr>
-          <p:cNvPr id="405" name="증명하지 않음"/>
+          <p:cNvPr id="435" name="증명하지 않음"/>
           <p:cNvSpPr txBox="1"/>
           <p:nvPr/>
         </p:nvSpPr>
@@ -10851,7 +10851,7 @@
       </p:sp>
       <p:sp>
         <p:nvSpPr>
-          <p:cNvPr id="406" name="Maroo OKRW · PCL · VK · proof 포맷 호환"/>
+          <p:cNvPr id="436" name="Maroo OKRW · PCL · VK · proof 포맷 호환"/>
           <p:cNvSpPr txBox="1"/>
           <p:nvPr/>
         </p:nvSpPr>
@@ -10895,7 +10895,7 @@
       </p:sp>
       <p:sp>
         <p:nvSpPr>
-          <p:cNvPr id="407" name="[Local] 결과는 [Live Testnet] 성공 증거와 합치지 않는다"/>
+          <p:cNvPr id="437" name="[Local] 결과는 [Live Testnet] 성공 증거와 합치지 않는다"/>
           <p:cNvSpPr txBox="1"/>
           <p:nvPr/>
         </p:nvSpPr>
@@ -10968,7 +10968,7 @@
       </p:grpSpPr>
       <p:sp>
         <p:nvSpPr>
-          <p:cNvPr id="411" name="Clairveil Local 실행"/>
+          <p:cNvPr id="441" name="Clairveil Local 실행"/>
           <p:cNvSpPr txBox="1">
             <a:spLocks noGrp="1"/>
           </p:cNvSpPr>
@@ -11002,7 +11002,7 @@
       </p:sp>
       <p:sp>
         <p:nvSpPr>
-          <p:cNvPr id="413" name="슬라이드 번호"/>
+          <p:cNvPr id="443" name="슬라이드 번호"/>
           <p:cNvSpPr txBox="1">
             <a:spLocks noGrp="1"/>
           </p:cNvSpPr>
@@ -11034,7 +11034,7 @@
       </p:sp>
       <p:sp>
         <p:nvSpPr>
-          <p:cNvPr id="414" name="runner가 임시 localnet을 만들고 정상 급여와 두 통제 사례를 실행한 뒤 정리한다."/>
+          <p:cNvPr id="444" name="runner가 임시 localnet을 만들고 정상 급여와 두 통제 사례를 실행한 뒤 정리한다."/>
           <p:cNvSpPr txBox="1"/>
           <p:nvPr/>
         </p:nvSpPr>
@@ -11081,7 +11081,7 @@
       </p:sp>
       <p:sp>
         <p:nvSpPr>
-          <p:cNvPr id="415" name="bun run demo/scripts/run.ts \…"/>
+          <p:cNvPr id="445" name="bun run demo/scripts/run.ts \…"/>
           <p:cNvSpPr txBox="1"/>
           <p:nvPr/>
         </p:nvSpPr>
@@ -11217,7 +11217,7 @@
       </p:grpSpPr>
       <p:sp>
         <p:nvSpPr>
-          <p:cNvPr id="419" name="정상 급여 결과"/>
+          <p:cNvPr id="449" name="정상 급여 결과"/>
           <p:cNvSpPr txBox="1">
             <a:spLocks noGrp="1"/>
           </p:cNvSpPr>
@@ -11251,7 +11251,7 @@
       </p:sp>
       <p:sp>
         <p:nvSpPr>
-          <p:cNvPr id="421" name="슬라이드 번호"/>
+          <p:cNvPr id="451" name="슬라이드 번호"/>
           <p:cNvSpPr txBox="1">
             <a:spLocks noGrp="1"/>
           </p:cNvSpPr>
@@ -11283,7 +11283,7 @@
       </p:sp>
       <p:sp>
         <p:nvSpPr>
-          <p:cNvPr id="422" name="code 0 · proof 1개 · output 3개"/>
+          <p:cNvPr id="452" name="code 0 · proof 1개 · output 3개"/>
           <p:cNvSpPr txBox="1"/>
           <p:nvPr/>
         </p:nvSpPr>
@@ -11330,7 +11330,7 @@
       </p:sp>
       <p:sp>
         <p:nvSpPr>
-          <p:cNvPr id="423" name="Deposit 300uclair…"/>
+          <p:cNvPr id="453" name="Deposit 300uclair…"/>
           <p:cNvSpPr txBox="1"/>
           <p:nvPr/>
         </p:nvSpPr>
@@ -11447,7 +11447,7 @@
       </p:grpSpPr>
       <p:sp>
         <p:nvSpPr>
-          <p:cNvPr id="427" name="슬라이드 번호"/>
+          <p:cNvPr id="457" name="슬라이드 번호"/>
           <p:cNvSpPr txBox="1">
             <a:spLocks noGrp="1"/>
           </p:cNvSpPr>
@@ -11479,7 +11479,7 @@
       </p:sp>
       <p:sp>
         <p:nvSpPr>
-          <p:cNvPr id="428" name="주요 상태 전이 · 무엇이 공개되고 무엇이 숨겨지는가"/>
+          <p:cNvPr id="458" name="주요 상태 전이 · 무엇이 공개되고 무엇이 숨겨지는가"/>
           <p:cNvSpPr txBox="1"/>
           <p:nvPr/>
         </p:nvSpPr>
@@ -11523,7 +11523,7 @@
       </p:sp>
       <p:sp>
         <p:nvSpPr>
-          <p:cNvPr id="429" name="직사각형"/>
+          <p:cNvPr id="459" name="직사각형"/>
           <p:cNvSpPr/>
           <p:nvPr/>
         </p:nvSpPr>
@@ -11571,7 +11571,7 @@
       </p:sp>
       <p:sp>
         <p:nvSpPr>
-          <p:cNvPr id="430" name="① Public OKRW"/>
+          <p:cNvPr id="460" name="① Public OKRW"/>
           <p:cNvSpPr txBox="1"/>
           <p:nvPr/>
         </p:nvSpPr>
@@ -11618,7 +11618,7 @@
       </p:sp>
       <p:sp>
         <p:nvSpPr>
-          <p:cNvPr id="431" name="company balance"/>
+          <p:cNvPr id="461" name="company balance"/>
           <p:cNvSpPr txBox="1"/>
           <p:nvPr/>
         </p:nvSpPr>
@@ -11662,7 +11662,7 @@
       </p:sp>
       <p:sp>
         <p:nvSpPr>
-          <p:cNvPr id="432" name="msg.value = 300"/>
+          <p:cNvPr id="462" name="msg.value = 300"/>
           <p:cNvSpPr txBox="1"/>
           <p:nvPr/>
         </p:nvSpPr>
@@ -11706,7 +11706,7 @@
       </p:sp>
       <p:sp>
         <p:nvSpPr>
-          <p:cNvPr id="433" name="deposit →"/>
+          <p:cNvPr id="463" name="deposit →"/>
           <p:cNvSpPr txBox="1"/>
           <p:nvPr/>
         </p:nvSpPr>
@@ -11753,7 +11753,7 @@
       </p:sp>
       <p:sp>
         <p:nvSpPr>
-          <p:cNvPr id="434" name="직사각형"/>
+          <p:cNvPr id="464" name="직사각형"/>
           <p:cNvSpPr/>
           <p:nvPr/>
         </p:nvSpPr>
@@ -11801,7 +11801,7 @@
       </p:sp>
       <p:sp>
         <p:nvSpPr>
-          <p:cNvPr id="435" name="② Treasury note"/>
+          <p:cNvPr id="465" name="② Treasury note"/>
           <p:cNvSpPr txBox="1"/>
           <p:nvPr/>
         </p:nvSpPr>
@@ -11848,7 +11848,7 @@
       </p:sp>
       <p:sp>
         <p:nvSpPr>
-          <p:cNvPr id="436" name="commitment · root₀"/>
+          <p:cNvPr id="466" name="commitment · root₀"/>
           <p:cNvSpPr txBox="1"/>
           <p:nvPr/>
         </p:nvSpPr>
@@ -11892,7 +11892,7 @@
       </p:sp>
       <p:sp>
         <p:nvSpPr>
-          <p:cNvPr id="437" name="평문 금액은 비공개"/>
+          <p:cNvPr id="467" name="평문 금액은 비공개"/>
           <p:cNvSpPr txBox="1"/>
           <p:nvPr/>
         </p:nvSpPr>
@@ -11936,7 +11936,7 @@
       </p:sp>
       <p:sp>
         <p:nvSpPr>
-          <p:cNvPr id="438" name="proof →"/>
+          <p:cNvPr id="468" name="검증 →"/>
           <p:cNvSpPr txBox="1"/>
           <p:nvPr/>
         </p:nvSpPr>
@@ -11976,14 +11976,14 @@
           </a:lstStyle>
           <a:p>
             <a:r>
-              <a:t>proof →</a:t>
-            </a:r>
-          </a:p>
-        </p:txBody>
-      </p:sp>
-      <p:sp>
-        <p:nvSpPr>
-          <p:cNvPr id="439" name="직사각형"/>
+              <a:t>검증 →</a:t>
+            </a:r>
+          </a:p>
+        </p:txBody>
+      </p:sp>
+      <p:sp>
+        <p:nvSpPr>
+          <p:cNvPr id="469" name="직사각형"/>
           <p:cNvSpPr/>
           <p:nvPr/>
         </p:nvSpPr>
@@ -12031,7 +12031,7 @@
       </p:sp>
       <p:sp>
         <p:nvSpPr>
-          <p:cNvPr id="440" name="③ Input spent"/>
+          <p:cNvPr id="470" name="③ Input spent"/>
           <p:cNvSpPr txBox="1"/>
           <p:nvPr/>
         </p:nvSpPr>
@@ -12078,7 +12078,7 @@
       </p:sp>
       <p:sp>
         <p:nvSpPr>
-          <p:cNvPr id="441" name="nullifier 공개"/>
+          <p:cNvPr id="471" name="nullifier 공개"/>
           <p:cNvSpPr txBox="1"/>
           <p:nvPr/>
         </p:nvSpPr>
@@ -12122,7 +12122,7 @@
       </p:sp>
       <p:sp>
         <p:nvSpPr>
-          <p:cNvPr id="442" name="root₀ → root₁"/>
+          <p:cNvPr id="472" name="root₀ → root₁"/>
           <p:cNvSpPr txBox="1"/>
           <p:nvPr/>
         </p:nvSpPr>
@@ -12166,7 +12166,7 @@
       </p:sp>
       <p:sp>
         <p:nvSpPr>
-          <p:cNvPr id="443" name="→"/>
+          <p:cNvPr id="473" name="→"/>
           <p:cNvSpPr txBox="1"/>
           <p:nvPr/>
         </p:nvSpPr>
@@ -12213,7 +12213,7 @@
       </p:sp>
       <p:sp>
         <p:nvSpPr>
-          <p:cNvPr id="444" name="직사각형"/>
+          <p:cNvPr id="474" name="직사각형"/>
           <p:cNvSpPr/>
           <p:nvPr/>
         </p:nvSpPr>
@@ -12261,7 +12261,7 @@
       </p:sp>
       <p:sp>
         <p:nvSpPr>
-          <p:cNvPr id="445" name="④ Output × 3"/>
+          <p:cNvPr id="475" name="④ Output × 3"/>
           <p:cNvSpPr txBox="1"/>
           <p:nvPr/>
         </p:nvSpPr>
@@ -12308,7 +12308,7 @@
       </p:sp>
       <p:sp>
         <p:nvSpPr>
-          <p:cNvPr id="446" name="commitments 공개"/>
+          <p:cNvPr id="476" name="commitments 공개"/>
           <p:cNvSpPr txBox="1"/>
           <p:nvPr/>
         </p:nvSpPr>
@@ -12352,7 +12352,7 @@
       </p:sp>
       <p:sp>
         <p:nvSpPr>
-          <p:cNvPr id="447" name="직원·금액 평문 비공개"/>
+          <p:cNvPr id="477" name="직원·금액 평문 비공개"/>
           <p:cNvSpPr txBox="1"/>
           <p:nvPr/>
         </p:nvSpPr>
@@ -12396,7 +12396,7 @@
       </p:sp>
       <p:sp>
         <p:nvSpPr>
-          <p:cNvPr id="448" name="↓ EMP-A viewing key"/>
+          <p:cNvPr id="478" name="↓ EMP-A viewing key"/>
           <p:cNvSpPr txBox="1"/>
           <p:nvPr/>
         </p:nvSpPr>
@@ -12443,7 +12443,7 @@
       </p:sp>
       <p:sp>
         <p:nvSpPr>
-          <p:cNvPr id="449" name="↓ EMP-B viewing key"/>
+          <p:cNvPr id="479" name="↓ EMP-B viewing key"/>
           <p:cNvSpPr txBox="1"/>
           <p:nvPr/>
         </p:nvSpPr>
@@ -12490,7 +12490,7 @@
       </p:sp>
       <p:sp>
         <p:nvSpPr>
-          <p:cNvPr id="450" name="↓ EMP-C viewing key"/>
+          <p:cNvPr id="480" name="↓ EMP-C viewing key"/>
           <p:cNvSpPr txBox="1"/>
           <p:nvPr/>
         </p:nvSpPr>
@@ -12537,7 +12537,7 @@
       </p:sp>
       <p:sp>
         <p:nvSpPr>
-          <p:cNvPr id="451" name="직사각형"/>
+          <p:cNvPr id="481" name="직사각형"/>
           <p:cNvSpPr/>
           <p:nvPr/>
         </p:nvSpPr>
@@ -12585,7 +12585,7 @@
       </p:sp>
       <p:sp>
         <p:nvSpPr>
-          <p:cNvPr id="452" name="⑤ Delivery evidence"/>
+          <p:cNvPr id="482" name="⑤ Delivery evidence"/>
           <p:cNvSpPr txBox="1"/>
           <p:nvPr/>
         </p:nvSpPr>
@@ -12632,7 +12632,7 @@
       </p:sp>
       <p:sp>
         <p:nvSpPr>
-          <p:cNvPr id="453" name="직원별 note · batch tx binding"/>
+          <p:cNvPr id="483" name="직원별 note · batch tx binding"/>
           <p:cNvSpPr txBox="1"/>
           <p:nvPr/>
         </p:nvSpPr>
@@ -12676,7 +12676,7 @@
       </p:sp>
       <p:sp>
         <p:nvSpPr>
-          <p:cNvPr id="454" name="auditor의 plan/disclosure 대사"/>
+          <p:cNvPr id="484" name="auditor의 plan/disclosure 대사"/>
           <p:cNvSpPr txBox="1"/>
           <p:nvPr/>
         </p:nvSpPr>
@@ -12720,7 +12720,7 @@
       </p:sp>
       <p:sp>
         <p:nvSpPr>
-          <p:cNvPr id="455" name="PUBLIC"/>
+          <p:cNvPr id="485" name="PUBLIC"/>
           <p:cNvSpPr txBox="1"/>
           <p:nvPr/>
         </p:nvSpPr>
@@ -12767,7 +12767,7 @@
       </p:sp>
       <p:sp>
         <p:nvSpPr>
-          <p:cNvPr id="456" name="tx hash · root · nullifier"/>
+          <p:cNvPr id="486" name="tx hash · root · nullifier"/>
           <p:cNvSpPr txBox="1"/>
           <p:nvPr/>
         </p:nvSpPr>
@@ -12811,7 +12811,7 @@
       </p:sp>
       <p:sp>
         <p:nvSpPr>
-          <p:cNvPr id="457" name="commitments · input/output count"/>
+          <p:cNvPr id="487" name="commitments · input/output count"/>
           <p:cNvSpPr txBox="1"/>
           <p:nvPr/>
         </p:nvSpPr>
@@ -12855,7 +12855,7 @@
       </p:sp>
       <p:sp>
         <p:nvSpPr>
-          <p:cNvPr id="458" name="PRIVATE"/>
+          <p:cNvPr id="488" name="PRIVATE"/>
           <p:cNvSpPr txBox="1"/>
           <p:nvPr/>
         </p:nvSpPr>
@@ -12902,7 +12902,7 @@
       </p:sp>
       <p:sp>
         <p:nvSpPr>
-          <p:cNvPr id="459" name="직원 mapping · note amount"/>
+          <p:cNvPr id="489" name="직원 mapping · note amount"/>
           <p:cNvSpPr txBox="1"/>
           <p:nvPr/>
         </p:nvSpPr>
@@ -12946,7 +12946,7 @@
       </p:sp>
       <p:sp>
         <p:nvSpPr>
-          <p:cNvPr id="460" name="viewing / disclosure key"/>
+          <p:cNvPr id="490" name="viewing / disclosure key"/>
           <p:cNvSpPr txBox="1"/>
           <p:nvPr/>
         </p:nvSpPr>
@@ -12990,7 +12990,7 @@
       </p:sp>
       <p:sp>
         <p:nvSpPr>
-          <p:cNvPr id="461" name="receipt 성공은 ④까지의 증거 · 급여 완료는 ⑤까지 필요"/>
+          <p:cNvPr id="491" name="receipt 성공은 ④까지의 증거 · 급여 완료는 ⑤까지 필요"/>
           <p:cNvSpPr txBox="1"/>
           <p:nvPr/>
         </p:nvSpPr>
@@ -13063,7 +13063,7 @@
       </p:grpSpPr>
       <p:sp>
         <p:nvSpPr>
-          <p:cNvPr id="465" name="데이터 가시성 매트릭스"/>
+          <p:cNvPr id="495" name="데이터 가시성 매트릭스"/>
           <p:cNvSpPr txBox="1">
             <a:spLocks noGrp="1"/>
           </p:cNvSpPr>
@@ -13097,7 +13097,7 @@
       </p:sp>
       <p:sp>
         <p:nvSpPr>
-          <p:cNvPr id="467" name="슬라이드 번호"/>
+          <p:cNvPr id="497" name="슬라이드 번호"/>
           <p:cNvSpPr txBox="1">
             <a:spLocks noGrp="1"/>
           </p:cNvSpPr>
@@ -13129,7 +13129,7 @@
       </p:sp>
       <p:graphicFrame>
         <p:nvGraphicFramePr>
-          <p:cNvPr id="468" name="표 1"/>
+          <p:cNvPr id="498" name="표 1"/>
           <p:cNvGraphicFramePr/>
           <p:nvPr/>
         </p:nvGraphicFramePr>
@@ -14042,7 +14042,7 @@
       </p:grpSpPr>
       <p:sp>
         <p:nvSpPr>
-          <p:cNvPr id="472" name="슬라이드 번호"/>
+          <p:cNvPr id="502" name="슬라이드 번호"/>
           <p:cNvSpPr txBox="1">
             <a:spLocks noGrp="1"/>
           </p:cNvSpPr>
@@ -14065,6 +14065,7 @@
           <a:lstStyle/>
           <a:p>
             <a:fld id="{86CB4B4D-7CA3-9044-876B-883B54F8677D}" type="slidenum">
+              <a:rPr/>
               <a:t>20</a:t>
             </a:fld>
             <a:endParaRPr/>
@@ -14073,7 +14074,7 @@
       </p:sp>
       <p:sp>
         <p:nvSpPr>
-          <p:cNvPr id="473" name="실패 모드 1 · 300으로 301을 지급하려면"/>
+          <p:cNvPr id="503" name="실패 모드 1 · 300으로 301을 지급하려면"/>
           <p:cNvSpPr txBox="1"/>
           <p:nvPr/>
         </p:nvSpPr>
@@ -14117,7 +14118,7 @@
       </p:sp>
       <p:sp>
         <p:nvSpPr>
-          <p:cNvPr id="474" name="직사각형"/>
+          <p:cNvPr id="504" name="직사각형"/>
           <p:cNvSpPr/>
           <p:nvPr/>
         </p:nvSpPr>
@@ -14165,7 +14166,7 @@
       </p:sp>
       <p:sp>
         <p:nvSpPr>
-          <p:cNvPr id="475" name="직사각형"/>
+          <p:cNvPr id="505" name="직사각형"/>
           <p:cNvSpPr/>
           <p:nvPr/>
         </p:nvSpPr>
@@ -14213,7 +14214,7 @@
       </p:sp>
       <p:sp>
         <p:nvSpPr>
-          <p:cNvPr id="476" name="OFF-CHAIN · BROADCAST 전"/>
+          <p:cNvPr id="506" name="OFF-CHAIN · BROADCAST 전"/>
           <p:cNvSpPr txBox="1"/>
           <p:nvPr/>
         </p:nvSpPr>
@@ -14260,7 +14261,7 @@
       </p:sp>
       <p:sp>
         <p:nvSpPr>
-          <p:cNvPr id="477" name="NOT REACHED"/>
+          <p:cNvPr id="507" name="NOT REACHED"/>
           <p:cNvSpPr txBox="1"/>
           <p:nvPr/>
         </p:nvSpPr>
@@ -14307,7 +14308,7 @@
       </p:sp>
       <p:sp>
         <p:nvSpPr>
-          <p:cNvPr id="478" name="직사각형"/>
+          <p:cNvPr id="508" name="직사각형"/>
           <p:cNvSpPr/>
           <p:nvPr/>
         </p:nvSpPr>
@@ -14355,7 +14356,7 @@
       </p:sp>
       <p:sp>
         <p:nvSpPr>
-          <p:cNvPr id="479" name="Treasury note"/>
+          <p:cNvPr id="509" name="Treasury note"/>
           <p:cNvSpPr txBox="1"/>
           <p:nvPr/>
         </p:nvSpPr>
@@ -14402,7 +14403,7 @@
       </p:sp>
       <p:sp>
         <p:nvSpPr>
-          <p:cNvPr id="480" name="available = 300"/>
+          <p:cNvPr id="510" name="available = 300"/>
           <p:cNvSpPr txBox="1"/>
           <p:nvPr/>
         </p:nvSpPr>
@@ -14446,7 +14447,7 @@
       </p:sp>
       <p:sp>
         <p:nvSpPr>
-          <p:cNvPr id="481" name="root₀"/>
+          <p:cNvPr id="511" name="root₀"/>
           <p:cNvSpPr txBox="1"/>
           <p:nvPr/>
         </p:nvSpPr>
@@ -14490,7 +14491,7 @@
       </p:sp>
       <p:sp>
         <p:nvSpPr>
-          <p:cNvPr id="482" name="→"/>
+          <p:cNvPr id="512" name="→"/>
           <p:cNvSpPr txBox="1"/>
           <p:nvPr/>
         </p:nvSpPr>
@@ -14537,7 +14538,7 @@
       </p:sp>
       <p:sp>
         <p:nvSpPr>
-          <p:cNvPr id="483" name="직사각형"/>
+          <p:cNvPr id="513" name="직사각형"/>
           <p:cNvSpPr/>
           <p:nvPr/>
         </p:nvSpPr>
@@ -14585,7 +14586,7 @@
       </p:sp>
       <p:sp>
         <p:nvSpPr>
-          <p:cNvPr id="484" name="Payroll plan"/>
+          <p:cNvPr id="514" name="Payroll plan"/>
           <p:cNvSpPr txBox="1"/>
           <p:nvPr/>
         </p:nvSpPr>
@@ -14632,7 +14633,7 @@
       </p:sp>
       <p:sp>
         <p:nvSpPr>
-          <p:cNvPr id="485" name="A 101 + B 120"/>
+          <p:cNvPr id="515" name="A 101 + B 120"/>
           <p:cNvSpPr txBox="1"/>
           <p:nvPr/>
         </p:nvSpPr>
@@ -14676,7 +14677,7 @@
       </p:sp>
       <p:sp>
         <p:nvSpPr>
-          <p:cNvPr id="486" name="+ C 80 = 301"/>
+          <p:cNvPr id="516" name="+ C 80 = 301"/>
           <p:cNvSpPr txBox="1"/>
           <p:nvPr/>
         </p:nvSpPr>
@@ -14720,7 +14721,7 @@
       </p:sp>
       <p:sp>
         <p:nvSpPr>
-          <p:cNvPr id="487" name="→"/>
+          <p:cNvPr id="517" name="→"/>
           <p:cNvSpPr txBox="1"/>
           <p:nvPr/>
         </p:nvSpPr>
@@ -14767,7 +14768,7 @@
       </p:sp>
       <p:sp>
         <p:nvSpPr>
-          <p:cNvPr id="488" name="직사각형"/>
+          <p:cNvPr id="518" name="직사각형"/>
           <p:cNvSpPr/>
           <p:nvPr/>
         </p:nvSpPr>
@@ -14815,7 +14816,7 @@
       </p:sp>
       <p:sp>
         <p:nvSpPr>
-          <p:cNvPr id="489" name="Input selection"/>
+          <p:cNvPr id="519" name="Input selection"/>
           <p:cNvSpPr txBox="1"/>
           <p:nvPr/>
         </p:nvSpPr>
@@ -14862,7 +14863,7 @@
       </p:sp>
       <p:sp>
         <p:nvSpPr>
-          <p:cNvPr id="490" name="301 &gt; 300"/>
+          <p:cNvPr id="520" name="301 &gt; 300"/>
           <p:cNvSpPr txBox="1"/>
           <p:nvPr/>
         </p:nvSpPr>
@@ -14906,7 +14907,7 @@
       </p:sp>
       <p:sp>
         <p:nvSpPr>
-          <p:cNvPr id="491" name="REJECT"/>
+          <p:cNvPr id="521" name="REJECT"/>
           <p:cNvSpPr txBox="1"/>
           <p:nvPr/>
         </p:nvSpPr>
@@ -14950,7 +14951,7 @@
       </p:sp>
       <p:sp>
         <p:nvSpPr>
-          <p:cNvPr id="492" name="×"/>
+          <p:cNvPr id="522" name="×"/>
           <p:cNvSpPr txBox="1"/>
           <p:nvPr/>
         </p:nvSpPr>
@@ -14997,7 +14998,7 @@
       </p:sp>
       <p:sp>
         <p:nvSpPr>
-          <p:cNvPr id="493" name="직사각형"/>
+          <p:cNvPr id="523" name="직사각형"/>
           <p:cNvSpPr/>
           <p:nvPr/>
         </p:nvSpPr>
@@ -15045,7 +15046,7 @@
       </p:sp>
       <p:sp>
         <p:nvSpPr>
-          <p:cNvPr id="494" name="Prover"/>
+          <p:cNvPr id="524" name="Off-chain prover"/>
           <p:cNvSpPr txBox="1"/>
           <p:nvPr/>
         </p:nvSpPr>
@@ -15085,14 +15086,14 @@
           </a:lstStyle>
           <a:p>
             <a:r>
-              <a:t>Prover</a:t>
-            </a:r>
-          </a:p>
-        </p:txBody>
-      </p:sp>
-      <p:sp>
-        <p:nvSpPr>
-          <p:cNvPr id="495" name="호출되지 않음"/>
+              <a:t>Off-chain prover</a:t>
+            </a:r>
+          </a:p>
+        </p:txBody>
+      </p:sp>
+      <p:sp>
+        <p:nvSpPr>
+          <p:cNvPr id="525" name="호출되지 않음"/>
           <p:cNvSpPr txBox="1"/>
           <p:nvPr/>
         </p:nvSpPr>
@@ -15136,7 +15137,7 @@
       </p:sp>
       <p:sp>
         <p:nvSpPr>
-          <p:cNvPr id="496" name="직사각형"/>
+          <p:cNvPr id="526" name="직사각형"/>
           <p:cNvSpPr/>
           <p:nvPr/>
         </p:nvSpPr>
@@ -15184,7 +15185,7 @@
       </p:sp>
       <p:sp>
         <p:nvSpPr>
-          <p:cNvPr id="497" name="x/privacy"/>
+          <p:cNvPr id="527" name="On-chain verifier"/>
           <p:cNvSpPr txBox="1"/>
           <p:nvPr/>
         </p:nvSpPr>
@@ -15224,14 +15225,14 @@
           </a:lstStyle>
           <a:p>
             <a:r>
-              <a:t>x/privacy</a:t>
-            </a:r>
-          </a:p>
-        </p:txBody>
-      </p:sp>
-      <p:sp>
-        <p:nvSpPr>
-          <p:cNvPr id="498" name="transaction 없음"/>
+              <a:t>On-chain verifier</a:t>
+            </a:r>
+          </a:p>
+        </p:txBody>
+      </p:sp>
+      <p:sp>
+        <p:nvSpPr>
+          <p:cNvPr id="528" name="transaction 미도달"/>
           <p:cNvSpPr txBox="1"/>
           <p:nvPr/>
         </p:nvSpPr>
@@ -15268,14 +15269,14 @@
           </a:lstStyle>
           <a:p>
             <a:r>
-              <a:t>transaction 없음</a:t>
-            </a:r>
-          </a:p>
-        </p:txBody>
-      </p:sp>
-      <p:sp>
-        <p:nvSpPr>
-          <p:cNvPr id="499" name="관찰 증거"/>
+              <a:t>transaction 미도달</a:t>
+            </a:r>
+          </a:p>
+        </p:txBody>
+      </p:sp>
+      <p:sp>
+        <p:nvSpPr>
+          <p:cNvPr id="529" name="관찰 증거"/>
           <p:cNvSpPr txBox="1"/>
           <p:nvPr/>
         </p:nvSpPr>
@@ -15322,7 +15323,7 @@
       </p:sp>
       <p:sp>
         <p:nvSpPr>
-          <p:cNvPr id="500" name="proof 0 · broadcastAttempted=false · treasuryStateUnchanged=true"/>
+          <p:cNvPr id="530" name="proof 0 · broadcastAttempted=false · treasuryStateUnchanged=true"/>
           <p:cNvSpPr txBox="1"/>
           <p:nvPr/>
         </p:nvSpPr>
@@ -15366,14 +15367,14 @@
       </p:sp>
       <p:sp>
         <p:nvSpPr>
-          <p:cNvPr id="501" name="Maroo 설계: proof 전 plan 합계 대사 + x/privacy의 가치 보존 검증"/>
+          <p:cNvPr id="531" name="Maroo 설계: proof 전 plan 합계 대사 + x/privacy verifier의 가치 보존 검증"/>
           <p:cNvSpPr txBox="1"/>
           <p:nvPr/>
         </p:nvSpPr>
         <p:spPr>
           <a:xfrm>
-            <a:off x="4572000" y="11620500"/>
-            <a:ext cx="15240000" cy="508000"/>
+            <a:off x="4000500" y="11620500"/>
+            <a:ext cx="16383000" cy="495300"/>
           </a:xfrm>
           <a:prstGeom prst="rect">
             <a:avLst/>
@@ -15393,7 +15394,7 @@
           </a:bodyPr>
           <a:lstStyle>
             <a:lvl1pPr>
-              <a:defRPr sz="2700">
+              <a:defRPr sz="2600">
                 <a:solidFill>
                   <a:srgbClr val="FFBF2C"/>
                 </a:solidFill>
@@ -15406,7 +15407,7 @@
           </a:lstStyle>
           <a:p>
             <a:r>
-              <a:t>Maroo 설계: proof 전 plan 합계 대사 + x/privacy의 가치 보존 검증</a:t>
+              <a:t>Maroo 설계: proof 전 plan 합계 대사 + x/privacy verifier의 가치 보존 검증</a:t>
             </a:r>
           </a:p>
         </p:txBody>
@@ -15439,7 +15440,7 @@
       </p:grpSpPr>
       <p:sp>
         <p:nvSpPr>
-          <p:cNvPr id="505" name="슬라이드 번호"/>
+          <p:cNvPr id="535" name="슬라이드 번호"/>
           <p:cNvSpPr txBox="1">
             <a:spLocks noGrp="1"/>
           </p:cNvSpPr>
@@ -15470,7 +15471,7 @@
       </p:sp>
       <p:sp>
         <p:nvSpPr>
-          <p:cNvPr id="506" name="실패 모드 2 · chain 성공, 급여 업무 실패"/>
+          <p:cNvPr id="536" name="실패 모드 2 · chain 성공, 급여 업무 실패"/>
           <p:cNvSpPr txBox="1"/>
           <p:nvPr/>
         </p:nvSpPr>
@@ -15514,7 +15515,7 @@
       </p:sp>
       <p:sp>
         <p:nvSpPr>
-          <p:cNvPr id="507" name="BUSINESS INTENT"/>
+          <p:cNvPr id="537" name="BUSINESS INTENT"/>
           <p:cNvSpPr txBox="1"/>
           <p:nvPr/>
         </p:nvSpPr>
@@ -15561,7 +15562,7 @@
       </p:sp>
       <p:sp>
         <p:nvSpPr>
-          <p:cNvPr id="508" name="CHAIN VALIDATION"/>
+          <p:cNvPr id="538" name="CHAIN VALIDATION"/>
           <p:cNvSpPr txBox="1"/>
           <p:nvPr/>
         </p:nvSpPr>
@@ -15608,7 +15609,7 @@
       </p:sp>
       <p:sp>
         <p:nvSpPr>
-          <p:cNvPr id="509" name="DELIVERY CHECK"/>
+          <p:cNvPr id="539" name="DELIVERY CHECK"/>
           <p:cNvSpPr txBox="1"/>
           <p:nvPr/>
         </p:nvSpPr>
@@ -15655,7 +15656,7 @@
       </p:sp>
       <p:sp>
         <p:nvSpPr>
-          <p:cNvPr id="510" name="직사각형"/>
+          <p:cNvPr id="540" name="직사각형"/>
           <p:cNvSpPr/>
           <p:nvPr/>
         </p:nvSpPr>
@@ -15703,7 +15704,7 @@
       </p:sp>
       <p:sp>
         <p:nvSpPr>
-          <p:cNvPr id="511" name="Approved plan"/>
+          <p:cNvPr id="541" name="Approved plan"/>
           <p:cNvSpPr txBox="1"/>
           <p:nvPr/>
         </p:nvSpPr>
@@ -15750,7 +15751,7 @@
       </p:sp>
       <p:sp>
         <p:nvSpPr>
-          <p:cNvPr id="512" name="EMP-B"/>
+          <p:cNvPr id="542" name="EMP-B"/>
           <p:cNvSpPr txBox="1"/>
           <p:nvPr/>
         </p:nvSpPr>
@@ -15794,7 +15795,7 @@
       </p:sp>
       <p:sp>
         <p:nvSpPr>
-          <p:cNvPr id="513" name="120uclair"/>
+          <p:cNvPr id="543" name="120uclair"/>
           <p:cNvSpPr txBox="1"/>
           <p:nvPr/>
         </p:nvSpPr>
@@ -15838,7 +15839,7 @@
       </p:sp>
       <p:sp>
         <p:nvSpPr>
-          <p:cNvPr id="514" name="→"/>
+          <p:cNvPr id="544" name="→"/>
           <p:cNvSpPr txBox="1"/>
           <p:nvPr/>
         </p:nvSpPr>
@@ -15885,7 +15886,7 @@
       </p:sp>
       <p:sp>
         <p:nvSpPr>
-          <p:cNvPr id="515" name="직사각형"/>
+          <p:cNvPr id="545" name="직사각형"/>
           <p:cNvSpPr/>
           <p:nvPr/>
         </p:nvSpPr>
@@ -15933,7 +15934,7 @@
       </p:sp>
       <p:sp>
         <p:nvSpPr>
-          <p:cNvPr id="516" name="Actual output"/>
+          <p:cNvPr id="546" name="Actual output"/>
           <p:cNvSpPr txBox="1"/>
           <p:nvPr/>
         </p:nvSpPr>
@@ -15980,7 +15981,7 @@
       </p:sp>
       <p:sp>
         <p:nvSpPr>
-          <p:cNvPr id="517" name="EMP-C"/>
+          <p:cNvPr id="547" name="EMP-C"/>
           <p:cNvSpPr txBox="1"/>
           <p:nvPr/>
         </p:nvSpPr>
@@ -16024,7 +16025,7 @@
       </p:sp>
       <p:sp>
         <p:nvSpPr>
-          <p:cNvPr id="518" name="valid shielded profile"/>
+          <p:cNvPr id="548" name="valid shielded profile"/>
           <p:cNvSpPr txBox="1"/>
           <p:nvPr/>
         </p:nvSpPr>
@@ -16068,7 +16069,7 @@
       </p:sp>
       <p:sp>
         <p:nvSpPr>
-          <p:cNvPr id="519" name="→"/>
+          <p:cNvPr id="549" name="→"/>
           <p:cNvSpPr txBox="1"/>
           <p:nvPr/>
         </p:nvSpPr>
@@ -16115,7 +16116,7 @@
       </p:sp>
       <p:sp>
         <p:nvSpPr>
-          <p:cNvPr id="520" name="직사각형"/>
+          <p:cNvPr id="550" name="직사각형"/>
           <p:cNvSpPr/>
           <p:nvPr/>
         </p:nvSpPr>
@@ -16163,7 +16164,7 @@
       </p:sp>
       <p:sp>
         <p:nvSpPr>
-          <p:cNvPr id="521" name="Proof"/>
+          <p:cNvPr id="551" name="PCL wrapper"/>
           <p:cNvSpPr txBox="1"/>
           <p:nvPr/>
         </p:nvSpPr>
@@ -16203,14 +16204,14 @@
           </a:lstStyle>
           <a:p>
             <a:r>
-              <a:t>Proof</a:t>
-            </a:r>
-          </a:p>
-        </p:txBody>
-      </p:sp>
-      <p:sp>
-        <p:nvSpPr>
-          <p:cNvPr id="522" name="root·nullifier"/>
+              <a:t>PCL wrapper</a:t>
+            </a:r>
+          </a:p>
+        </p:txBody>
+      </p:sp>
+      <p:sp>
+        <p:nvSpPr>
+          <p:cNvPr id="552" name="configured policy"/>
           <p:cNvSpPr txBox="1"/>
           <p:nvPr/>
         </p:nvSpPr>
@@ -16247,14 +16248,14 @@
           </a:lstStyle>
           <a:p>
             <a:r>
-              <a:t>root·nullifier</a:t>
-            </a:r>
-          </a:p>
-        </p:txBody>
-      </p:sp>
-      <p:sp>
-        <p:nvSpPr>
-          <p:cNvPr id="523" name="value conserved"/>
+              <a:t>configured policy</a:t>
+            </a:r>
+          </a:p>
+        </p:txBody>
+      </p:sp>
+      <p:sp>
+        <p:nvSpPr>
+          <p:cNvPr id="553" name="ALLOW"/>
           <p:cNvSpPr txBox="1"/>
           <p:nvPr/>
         </p:nvSpPr>
@@ -16291,14 +16292,14 @@
           </a:lstStyle>
           <a:p>
             <a:r>
-              <a:t>value conserved</a:t>
-            </a:r>
-          </a:p>
-        </p:txBody>
-      </p:sp>
-      <p:sp>
-        <p:nvSpPr>
-          <p:cNvPr id="524" name="→"/>
+              <a:t>ALLOW</a:t>
+            </a:r>
+          </a:p>
+        </p:txBody>
+      </p:sp>
+      <p:sp>
+        <p:nvSpPr>
+          <p:cNvPr id="554" name="→"/>
           <p:cNvSpPr txBox="1"/>
           <p:nvPr/>
         </p:nvSpPr>
@@ -16345,7 +16346,7 @@
       </p:sp>
       <p:sp>
         <p:nvSpPr>
-          <p:cNvPr id="525" name="직사각형"/>
+          <p:cNvPr id="555" name="직사각형"/>
           <p:cNvSpPr/>
           <p:nvPr/>
         </p:nvSpPr>
@@ -16393,7 +16394,7 @@
       </p:sp>
       <p:sp>
         <p:nvSpPr>
-          <p:cNvPr id="526" name="PCL"/>
+          <p:cNvPr id="556" name="Verifier"/>
           <p:cNvSpPr txBox="1"/>
           <p:nvPr/>
         </p:nvSpPr>
@@ -16433,14 +16434,14 @@
           </a:lstStyle>
           <a:p>
             <a:r>
-              <a:t>PCL</a:t>
-            </a:r>
-          </a:p>
-        </p:txBody>
-      </p:sp>
-      <p:sp>
-        <p:nvSpPr>
-          <p:cNvPr id="527" name="configured policy"/>
+              <a:t>Verifier</a:t>
+            </a:r>
+          </a:p>
+        </p:txBody>
+      </p:sp>
+      <p:sp>
+        <p:nvSpPr>
+          <p:cNvPr id="557" name="x/privacy · proof valid"/>
           <p:cNvSpPr txBox="1"/>
           <p:nvPr/>
         </p:nvSpPr>
@@ -16477,14 +16478,14 @@
           </a:lstStyle>
           <a:p>
             <a:r>
-              <a:t>configured policy</a:t>
-            </a:r>
-          </a:p>
-        </p:txBody>
-      </p:sp>
-      <p:sp>
-        <p:nvSpPr>
-          <p:cNvPr id="528" name="ALLOW"/>
+              <a:t>x/privacy · proof valid</a:t>
+            </a:r>
+          </a:p>
+        </p:txBody>
+      </p:sp>
+      <p:sp>
+        <p:nvSpPr>
+          <p:cNvPr id="558" name="value conserved"/>
           <p:cNvSpPr txBox="1"/>
           <p:nvPr/>
         </p:nvSpPr>
@@ -16521,14 +16522,14 @@
           </a:lstStyle>
           <a:p>
             <a:r>
-              <a:t>ALLOW</a:t>
-            </a:r>
-          </a:p>
-        </p:txBody>
-      </p:sp>
-      <p:sp>
-        <p:nvSpPr>
-          <p:cNvPr id="529" name="→"/>
+              <a:t>value conserved</a:t>
+            </a:r>
+          </a:p>
+        </p:txBody>
+      </p:sp>
+      <p:sp>
+        <p:nvSpPr>
+          <p:cNvPr id="559" name="→"/>
           <p:cNvSpPr txBox="1"/>
           <p:nvPr/>
         </p:nvSpPr>
@@ -16575,7 +16576,7 @@
       </p:sp>
       <p:sp>
         <p:nvSpPr>
-          <p:cNvPr id="530" name="직사각형"/>
+          <p:cNvPr id="560" name="직사각형"/>
           <p:cNvSpPr/>
           <p:nvPr/>
         </p:nvSpPr>
@@ -16623,7 +16624,7 @@
       </p:sp>
       <p:sp>
         <p:nvSpPr>
-          <p:cNvPr id="531" name="Receipt"/>
+          <p:cNvPr id="561" name="Receipt"/>
           <p:cNvSpPr txBox="1"/>
           <p:nvPr/>
         </p:nvSpPr>
@@ -16670,7 +16671,7 @@
       </p:sp>
       <p:sp>
         <p:nvSpPr>
-          <p:cNvPr id="532" name="code 0"/>
+          <p:cNvPr id="562" name="code 0"/>
           <p:cNvSpPr txBox="1"/>
           <p:nvPr/>
         </p:nvSpPr>
@@ -16714,7 +16715,7 @@
       </p:sp>
       <p:sp>
         <p:nvSpPr>
-          <p:cNvPr id="533" name="SUCCESS"/>
+          <p:cNvPr id="563" name="SUCCESS"/>
           <p:cNvSpPr txBox="1"/>
           <p:nvPr/>
         </p:nvSpPr>
@@ -16758,7 +16759,7 @@
       </p:sp>
       <p:sp>
         <p:nvSpPr>
-          <p:cNvPr id="534" name="직사각형"/>
+          <p:cNvPr id="564" name="직사각형"/>
           <p:cNvSpPr/>
           <p:nvPr/>
         </p:nvSpPr>
@@ -16806,7 +16807,7 @@
       </p:sp>
       <p:sp>
         <p:nvSpPr>
-          <p:cNvPr id="535" name="EMP-B scan"/>
+          <p:cNvPr id="565" name="EMP-B scan"/>
           <p:cNvSpPr txBox="1"/>
           <p:nvPr/>
         </p:nvSpPr>
@@ -16853,7 +16854,7 @@
       </p:sp>
       <p:sp>
         <p:nvSpPr>
-          <p:cNvPr id="536" name="new note = 0"/>
+          <p:cNvPr id="566" name="new note = 0"/>
           <p:cNvSpPr txBox="1"/>
           <p:nvPr/>
         </p:nvSpPr>
@@ -16897,7 +16898,7 @@
       </p:sp>
       <p:sp>
         <p:nvSpPr>
-          <p:cNvPr id="537" name="의도한 직원 미수령"/>
+          <p:cNvPr id="567" name="의도한 직원 미수령"/>
           <p:cNvSpPr txBox="1"/>
           <p:nvPr/>
         </p:nvSpPr>
@@ -16941,7 +16942,7 @@
       </p:sp>
       <p:sp>
         <p:nvSpPr>
-          <p:cNvPr id="538" name="직사각형"/>
+          <p:cNvPr id="568" name="직사각형"/>
           <p:cNvSpPr/>
           <p:nvPr/>
         </p:nvSpPr>
@@ -16989,7 +16990,7 @@
       </p:sp>
       <p:sp>
         <p:nvSpPr>
-          <p:cNvPr id="539" name="EMP-C scan"/>
+          <p:cNvPr id="569" name="EMP-C scan"/>
           <p:cNvSpPr txBox="1"/>
           <p:nvPr/>
         </p:nvSpPr>
@@ -17036,7 +17037,7 @@
       </p:sp>
       <p:sp>
         <p:nvSpPr>
-          <p:cNvPr id="540" name="new note = 1"/>
+          <p:cNvPr id="570" name="new note = 1"/>
           <p:cNvSpPr txBox="1"/>
           <p:nvPr/>
         </p:nvSpPr>
@@ -17080,7 +17081,7 @@
       </p:sp>
       <p:sp>
         <p:nvSpPr>
-          <p:cNvPr id="541" name="다른 직원 수령"/>
+          <p:cNvPr id="571" name="다른 직원 수령"/>
           <p:cNvSpPr txBox="1"/>
           <p:nvPr/>
         </p:nvSpPr>
@@ -17124,7 +17125,7 @@
       </p:sp>
       <p:sp>
         <p:nvSpPr>
-          <p:cNvPr id="542" name="직사각형"/>
+          <p:cNvPr id="572" name="직사각형"/>
           <p:cNvSpPr/>
           <p:nvPr/>
         </p:nvSpPr>
@@ -17172,7 +17173,7 @@
       </p:sp>
       <p:sp>
         <p:nvSpPr>
-          <p:cNvPr id="543" name="Auditor verdict"/>
+          <p:cNvPr id="573" name="Auditor verdict"/>
           <p:cNvSpPr txBox="1"/>
           <p:nvPr/>
         </p:nvSpPr>
@@ -17219,7 +17220,7 @@
       </p:sp>
       <p:sp>
         <p:nvSpPr>
-          <p:cNvPr id="544" name="plan ≠ scan"/>
+          <p:cNvPr id="574" name="plan ≠ scan"/>
           <p:cNvSpPr txBox="1"/>
           <p:nvPr/>
         </p:nvSpPr>
@@ -17263,7 +17264,7 @@
       </p:sp>
       <p:sp>
         <p:nvSpPr>
-          <p:cNvPr id="545" name="BUSINESS FAILURE"/>
+          <p:cNvPr id="575" name="BUSINESS FAILURE"/>
           <p:cNvSpPr txBox="1"/>
           <p:nvPr/>
         </p:nvSpPr>
@@ -17307,7 +17308,7 @@
       </p:sp>
       <p:sp>
         <p:nvSpPr>
-          <p:cNvPr id="546" name="→"/>
+          <p:cNvPr id="576" name="→"/>
           <p:cNvSpPr txBox="1"/>
           <p:nvPr/>
         </p:nvSpPr>
@@ -17354,7 +17355,7 @@
       </p:sp>
       <p:sp>
         <p:nvSpPr>
-          <p:cNvPr id="547" name="→"/>
+          <p:cNvPr id="577" name="→"/>
           <p:cNvSpPr txBox="1"/>
           <p:nvPr/>
         </p:nvSpPr>
@@ -17401,14 +17402,14 @@
       </p:sp>
       <p:sp>
         <p:nvSpPr>
-          <p:cNvPr id="548" name="핵심 · Privacy와 PCL의 성공만으로 직원 업무 의도는 증명되지 않는다"/>
+          <p:cNvPr id="578" name="핵심 · PCL과 Privacy verifier의 성공만으로 직원 업무 의도는 증명되지 않는다"/>
           <p:cNvSpPr txBox="1"/>
           <p:nvPr/>
         </p:nvSpPr>
         <p:spPr>
           <a:xfrm>
-            <a:off x="4635500" y="11620500"/>
-            <a:ext cx="15113001" cy="508000"/>
+            <a:off x="3810000" y="11620500"/>
+            <a:ext cx="16764000" cy="495300"/>
           </a:xfrm>
           <a:prstGeom prst="rect">
             <a:avLst/>
@@ -17428,7 +17429,7 @@
           </a:bodyPr>
           <a:lstStyle>
             <a:lvl1pPr>
-              <a:defRPr sz="2700">
+              <a:defRPr sz="2600">
                 <a:solidFill>
                   <a:srgbClr val="FFBF2C"/>
                 </a:solidFill>
@@ -17441,7 +17442,7 @@
           </a:lstStyle>
           <a:p>
             <a:r>
-              <a:t>핵심 · Privacy와 PCL의 성공만으로 직원 업무 의도는 증명되지 않는다</a:t>
+              <a:t>핵심 · PCL과 Privacy verifier의 성공만으로 직원 업무 의도는 증명되지 않는다</a:t>
             </a:r>
           </a:p>
         </p:txBody>
@@ -17474,7 +17475,7 @@
       </p:grpSpPr>
       <p:sp>
         <p:nvSpPr>
-          <p:cNvPr id="552" name="슬라이드 번호"/>
+          <p:cNvPr id="582" name="슬라이드 번호"/>
           <p:cNvSpPr txBox="1">
             <a:spLocks noGrp="1"/>
           </p:cNvSpPr>
@@ -17506,7 +17507,7 @@
       </p:sp>
       <p:sp>
         <p:nvSpPr>
-          <p:cNvPr id="553" name="Maroo 오지급 방지 · 세 경계에 통제를 배치한다"/>
+          <p:cNvPr id="583" name="Maroo 오지급 방지 · 세 경계에 통제를 배치한다"/>
           <p:cNvSpPr txBox="1"/>
           <p:nvPr/>
         </p:nvSpPr>
@@ -17550,7 +17551,7 @@
       </p:sp>
       <p:sp>
         <p:nvSpPr>
-          <p:cNvPr id="554" name="직사각형"/>
+          <p:cNvPr id="584" name="직사각형"/>
           <p:cNvSpPr/>
           <p:nvPr/>
         </p:nvSpPr>
@@ -17598,7 +17599,7 @@
       </p:sp>
       <p:sp>
         <p:nvSpPr>
-          <p:cNvPr id="555" name="직사각형"/>
+          <p:cNvPr id="585" name="직사각형"/>
           <p:cNvSpPr/>
           <p:nvPr/>
         </p:nvSpPr>
@@ -17646,7 +17647,7 @@
       </p:sp>
       <p:sp>
         <p:nvSpPr>
-          <p:cNvPr id="556" name="직사각형"/>
+          <p:cNvPr id="586" name="직사각형"/>
           <p:cNvSpPr/>
           <p:nvPr/>
         </p:nvSpPr>
@@ -17694,7 +17695,7 @@
       </p:sp>
       <p:sp>
         <p:nvSpPr>
-          <p:cNvPr id="557" name="PRE-BROADCAST"/>
+          <p:cNvPr id="587" name="PRE-BROADCAST"/>
           <p:cNvSpPr txBox="1"/>
           <p:nvPr/>
         </p:nvSpPr>
@@ -17741,7 +17742,7 @@
       </p:sp>
       <p:sp>
         <p:nvSpPr>
-          <p:cNvPr id="558" name="ON-CHAIN"/>
+          <p:cNvPr id="588" name="ON-CHAIN"/>
           <p:cNvSpPr txBox="1"/>
           <p:nvPr/>
         </p:nvSpPr>
@@ -17788,7 +17789,7 @@
       </p:sp>
       <p:sp>
         <p:nvSpPr>
-          <p:cNvPr id="559" name="POST-RECEIPT"/>
+          <p:cNvPr id="589" name="POST-RECEIPT"/>
           <p:cNvSpPr txBox="1"/>
           <p:nvPr/>
         </p:nvSpPr>
@@ -17835,7 +17836,7 @@
       </p:sp>
       <p:sp>
         <p:nvSpPr>
-          <p:cNvPr id="560" name="직사각형"/>
+          <p:cNvPr id="590" name="직사각형"/>
           <p:cNvSpPr/>
           <p:nvPr/>
         </p:nvSpPr>
@@ -17883,7 +17884,7 @@
       </p:sp>
       <p:sp>
         <p:nvSpPr>
-          <p:cNvPr id="561" name="① Signer policy"/>
+          <p:cNvPr id="591" name="① Policy preflight"/>
           <p:cNvSpPr txBox="1"/>
           <p:nvPr/>
         </p:nvSpPr>
@@ -17923,21 +17924,21 @@
           </a:lstStyle>
           <a:p>
             <a:r>
-              <a:t>① Signer policy</a:t>
-            </a:r>
-          </a:p>
-        </p:txBody>
-      </p:sp>
-      <p:sp>
-        <p:nvSpPr>
-          <p:cNvPr id="562" name="PCL · EAS"/>
+              <a:t>① Policy preflight</a:t>
+            </a:r>
+          </a:p>
+        </p:txBody>
+      </p:sp>
+      <p:sp>
+        <p:nvSpPr>
+          <p:cNvPr id="592" name="PCL · EAS 상태 read"/>
           <p:cNvSpPr txBox="1"/>
           <p:nvPr/>
         </p:nvSpPr>
         <p:spPr>
           <a:xfrm>
-            <a:off x="1701799" y="4826000"/>
-            <a:ext cx="3200401" cy="368300"/>
+            <a:off x="1701800" y="4826000"/>
+            <a:ext cx="3200400" cy="368300"/>
           </a:xfrm>
           <a:prstGeom prst="rect">
             <a:avLst/>
@@ -17967,14 +17968,14 @@
           </a:lstStyle>
           <a:p>
             <a:r>
-              <a:t>PCL · EAS</a:t>
-            </a:r>
-          </a:p>
-        </p:txBody>
-      </p:sp>
-      <p:sp>
-        <p:nvSpPr>
-          <p:cNvPr id="563" name="회사 호출자 적격성"/>
+              <a:t>PCL · EAS 상태 read</a:t>
+            </a:r>
+          </a:p>
+        </p:txBody>
+      </p:sp>
+      <p:sp>
+        <p:nvSpPr>
+          <p:cNvPr id="593" name="회사 호출자 사전 확인"/>
           <p:cNvSpPr txBox="1"/>
           <p:nvPr/>
         </p:nvSpPr>
@@ -18011,14 +18012,14 @@
           </a:lstStyle>
           <a:p>
             <a:r>
-              <a:t>회사 호출자 적격성</a:t>
-            </a:r>
-          </a:p>
-        </p:txBody>
-      </p:sp>
-      <p:sp>
-        <p:nvSpPr>
-          <p:cNvPr id="564" name="직사각형"/>
+              <a:t>회사 호출자 사전 확인</a:t>
+            </a:r>
+          </a:p>
+        </p:txBody>
+      </p:sp>
+      <p:sp>
+        <p:nvSpPr>
+          <p:cNvPr id="594" name="직사각형"/>
           <p:cNvSpPr/>
           <p:nvPr/>
         </p:nvSpPr>
@@ -18066,7 +18067,7 @@
       </p:sp>
       <p:sp>
         <p:nvSpPr>
-          <p:cNvPr id="565" name="② Recipient registry"/>
+          <p:cNvPr id="595" name="② Recipient registry"/>
           <p:cNvSpPr txBox="1"/>
           <p:nvPr/>
         </p:nvSpPr>
@@ -18113,7 +18114,7 @@
       </p:sp>
       <p:sp>
         <p:nvSpPr>
-          <p:cNvPr id="566" name="employee ↔ shielded"/>
+          <p:cNvPr id="596" name="employee ↔ shielded"/>
           <p:cNvSpPr txBox="1"/>
           <p:nvPr/>
         </p:nvSpPr>
@@ -18157,7 +18158,7 @@
       </p:sp>
       <p:sp>
         <p:nvSpPr>
-          <p:cNvPr id="567" name="승인 주소 매핑"/>
+          <p:cNvPr id="597" name="승인 주소 매핑"/>
           <p:cNvSpPr txBox="1"/>
           <p:nvPr/>
         </p:nvSpPr>
@@ -18201,7 +18202,7 @@
       </p:sp>
       <p:sp>
         <p:nvSpPr>
-          <p:cNvPr id="568" name="직사각형"/>
+          <p:cNvPr id="598" name="직사각형"/>
           <p:cNvSpPr/>
           <p:nvPr/>
         </p:nvSpPr>
@@ -18249,7 +18250,7 @@
       </p:sp>
       <p:sp>
         <p:nvSpPr>
-          <p:cNvPr id="569" name="③ Plan binding"/>
+          <p:cNvPr id="599" name="③ Plan binding"/>
           <p:cNvSpPr txBox="1"/>
           <p:nvPr/>
         </p:nvSpPr>
@@ -18296,7 +18297,7 @@
       </p:sp>
       <p:sp>
         <p:nvSpPr>
-          <p:cNvPr id="570" name="payroll digest ↔ outputs"/>
+          <p:cNvPr id="600" name="payroll digest ↔ outputs"/>
           <p:cNvSpPr txBox="1"/>
           <p:nvPr/>
         </p:nvSpPr>
@@ -18340,7 +18341,7 @@
       </p:sp>
       <p:sp>
         <p:nvSpPr>
-          <p:cNvPr id="571" name="mismatch면 fail closed"/>
+          <p:cNvPr id="601" name="mismatch면 fail closed"/>
           <p:cNvSpPr txBox="1"/>
           <p:nvPr/>
         </p:nvSpPr>
@@ -18384,7 +18385,7 @@
       </p:sp>
       <p:sp>
         <p:nvSpPr>
-          <p:cNvPr id="572" name="직사각형"/>
+          <p:cNvPr id="602" name="직사각형"/>
           <p:cNvSpPr/>
           <p:nvPr/>
         </p:nvSpPr>
@@ -18432,7 +18433,7 @@
       </p:sp>
       <p:sp>
         <p:nvSpPr>
-          <p:cNvPr id="573" name="④ PCL + x/privacy"/>
+          <p:cNvPr id="603" name="④ Wrapper + verifier"/>
           <p:cNvSpPr txBox="1"/>
           <p:nvPr/>
         </p:nvSpPr>
@@ -18472,14 +18473,14 @@
           </a:lstStyle>
           <a:p>
             <a:r>
-              <a:t>④ PCL + x/privacy</a:t>
-            </a:r>
-          </a:p>
-        </p:txBody>
-      </p:sp>
-      <p:sp>
-        <p:nvSpPr>
-          <p:cNvPr id="574" name="configured policy"/>
+              <a:t>④ Wrapper + verifier</a:t>
+            </a:r>
+          </a:p>
+        </p:txBody>
+      </p:sp>
+      <p:sp>
+        <p:nvSpPr>
+          <p:cNvPr id="604" name="PCL pre/post policy"/>
           <p:cNvSpPr txBox="1"/>
           <p:nvPr/>
         </p:nvSpPr>
@@ -18516,14 +18517,14 @@
           </a:lstStyle>
           <a:p>
             <a:r>
-              <a:t>configured policy</a:t>
-            </a:r>
-          </a:p>
-        </p:txBody>
-      </p:sp>
-      <p:sp>
-        <p:nvSpPr>
-          <p:cNvPr id="575" name="proof · root · nullifier"/>
+              <a:t>PCL pre/post policy</a:t>
+            </a:r>
+          </a:p>
+        </p:txBody>
+      </p:sp>
+      <p:sp>
+        <p:nvSpPr>
+          <p:cNvPr id="605" name="VK · root · nullifier"/>
           <p:cNvSpPr txBox="1"/>
           <p:nvPr/>
         </p:nvSpPr>
@@ -18560,14 +18561,14 @@
           </a:lstStyle>
           <a:p>
             <a:r>
-              <a:t>proof · root · nullifier</a:t>
-            </a:r>
-          </a:p>
-        </p:txBody>
-      </p:sp>
-      <p:sp>
-        <p:nvSpPr>
-          <p:cNvPr id="576" name="value conservation"/>
+              <a:t>VK · root · nullifier</a:t>
+            </a:r>
+          </a:p>
+        </p:txBody>
+      </p:sp>
+      <p:sp>
+        <p:nvSpPr>
+          <p:cNvPr id="606" name="proof와 가치 보존"/>
           <p:cNvSpPr txBox="1"/>
           <p:nvPr/>
         </p:nvSpPr>
@@ -18604,14 +18605,14 @@
           </a:lstStyle>
           <a:p>
             <a:r>
-              <a:t>value conservation</a:t>
-            </a:r>
-          </a:p>
-        </p:txBody>
-      </p:sp>
-      <p:sp>
-        <p:nvSpPr>
-          <p:cNvPr id="577" name="직사각형"/>
+              <a:t>proof와 가치 보존</a:t>
+            </a:r>
+          </a:p>
+        </p:txBody>
+      </p:sp>
+      <p:sp>
+        <p:nvSpPr>
+          <p:cNvPr id="607" name="직사각형"/>
           <p:cNvSpPr/>
           <p:nvPr/>
         </p:nvSpPr>
@@ -18659,7 +18660,7 @@
       </p:sp>
       <p:sp>
         <p:nvSpPr>
-          <p:cNvPr id="578" name="⑤ Reconciliation"/>
+          <p:cNvPr id="608" name="⑤ Reconciliation"/>
           <p:cNvSpPr txBox="1"/>
           <p:nvPr/>
         </p:nvSpPr>
@@ -18706,7 +18707,7 @@
       </p:sp>
       <p:sp>
         <p:nvSpPr>
-          <p:cNvPr id="579" name="receipt ↔ employee scan"/>
+          <p:cNvPr id="609" name="receipt ↔ employee scan"/>
           <p:cNvSpPr txBox="1"/>
           <p:nvPr/>
         </p:nvSpPr>
@@ -18750,7 +18751,7 @@
       </p:sp>
       <p:sp>
         <p:nvSpPr>
-          <p:cNvPr id="580" name="plan · disclosure 대사"/>
+          <p:cNvPr id="610" name="plan · disclosure 대사"/>
           <p:cNvSpPr txBox="1"/>
           <p:nvPr/>
         </p:nvSpPr>
@@ -18794,7 +18795,7 @@
       </p:sp>
       <p:sp>
         <p:nvSpPr>
-          <p:cNvPr id="581" name="→"/>
+          <p:cNvPr id="611" name="→"/>
           <p:cNvSpPr txBox="1"/>
           <p:nvPr/>
         </p:nvSpPr>
@@ -18841,7 +18842,7 @@
       </p:sp>
       <p:sp>
         <p:nvSpPr>
-          <p:cNvPr id="582" name="→"/>
+          <p:cNvPr id="612" name="→"/>
           <p:cNvSpPr txBox="1"/>
           <p:nvPr/>
         </p:nvSpPr>
@@ -18888,7 +18889,7 @@
       </p:sp>
       <p:sp>
         <p:nvSpPr>
-          <p:cNvPr id="583" name="→"/>
+          <p:cNvPr id="613" name="→"/>
           <p:cNvSpPr txBox="1"/>
           <p:nvPr/>
         </p:nvSpPr>
@@ -18935,14 +18936,14 @@
       </p:sp>
       <p:sp>
         <p:nvSpPr>
-          <p:cNvPr id="584" name="Privacy proof는 업무 의도를 대신 검증하지 않는다"/>
+          <p:cNvPr id="614" name="온체인 proof 검증은 승인된 직원에게 지급했다는 업무 판정을 대신하지 않는다"/>
           <p:cNvSpPr txBox="1"/>
           <p:nvPr/>
         </p:nvSpPr>
         <p:spPr>
           <a:xfrm>
-            <a:off x="7747000" y="11620500"/>
-            <a:ext cx="13970000" cy="520700"/>
+            <a:off x="5460999" y="11620500"/>
+            <a:ext cx="16764001" cy="495300"/>
           </a:xfrm>
           <a:prstGeom prst="rect">
             <a:avLst/>
@@ -18962,7 +18963,7 @@
           </a:bodyPr>
           <a:lstStyle>
             <a:lvl1pPr>
-              <a:defRPr sz="2800">
+              <a:defRPr sz="2600">
                 <a:solidFill>
                   <a:srgbClr val="FFBF2C"/>
                 </a:solidFill>
@@ -18975,7 +18976,7 @@
           </a:lstStyle>
           <a:p>
             <a:r>
-              <a:t>Privacy proof는 업무 의도를 대신 검증하지 않는다</a:t>
+              <a:t>온체인 proof 검증은 승인된 직원에게 지급했다는 업무 판정을 대신하지 않는다</a:t>
             </a:r>
           </a:p>
         </p:txBody>
@@ -19008,7 +19009,7 @@
       </p:grpSpPr>
       <p:sp>
         <p:nvSpPr>
-          <p:cNvPr id="588" name="Maroo 실행 경로"/>
+          <p:cNvPr id="618" name="Maroo 실행 경로"/>
           <p:cNvSpPr txBox="1">
             <a:spLocks noGrp="1"/>
           </p:cNvSpPr>
@@ -19042,7 +19043,7 @@
       </p:sp>
       <p:sp>
         <p:nvSpPr>
-          <p:cNvPr id="590" name="슬라이드 번호"/>
+          <p:cNvPr id="620" name="슬라이드 번호"/>
           <p:cNvSpPr txBox="1">
             <a:spLocks noGrp="1"/>
           </p:cNvSpPr>
@@ -19074,7 +19075,7 @@
       </p:sp>
       <p:sp>
         <p:nvSpPr>
-          <p:cNvPr id="591" name="Path A · 호환 bundle 보유"/>
+          <p:cNvPr id="621" name="Path A · 호환 bundle 보유"/>
           <p:cNvSpPr txBox="1"/>
           <p:nvPr/>
         </p:nvSpPr>
@@ -19121,7 +19122,7 @@
       </p:sp>
       <p:sp>
         <p:nvSpPr>
-          <p:cNvPr id="592" name="유효 deposit proof…"/>
+          <p:cNvPr id="622" name="유효 deposit proof…"/>
           <p:cNvSpPr txBox="1"/>
           <p:nvPr/>
         </p:nvSpPr>
@@ -19236,7 +19237,7 @@
       </p:sp>
       <p:sp>
         <p:nvSpPr>
-          <p:cNvPr id="593" name="Path B · 현재 제출 경로"/>
+          <p:cNvPr id="623" name="Path B · 현재 제출 경로"/>
           <p:cNvSpPr txBox="1"/>
           <p:nvPr/>
         </p:nvSpPr>
@@ -19283,7 +19284,7 @@
       </p:sp>
       <p:sp>
         <p:nvSpPr>
-          <p:cNvPr id="594" name="ABI-valid invalid-proof probe…"/>
+          <p:cNvPr id="624" name="ABI-valid invalid-proof probe…"/>
           <p:cNvSpPr txBox="1"/>
           <p:nvPr/>
         </p:nvSpPr>
@@ -19424,7 +19425,7 @@
       </p:grpSpPr>
       <p:sp>
         <p:nvSpPr>
-          <p:cNvPr id="598" name="Path B 실행"/>
+          <p:cNvPr id="628" name="Path B 실행"/>
           <p:cNvSpPr txBox="1">
             <a:spLocks noGrp="1"/>
           </p:cNvSpPr>
@@ -19458,7 +19459,7 @@
       </p:sp>
       <p:sp>
         <p:nvSpPr>
-          <p:cNvPr id="600" name="슬라이드 번호"/>
+          <p:cNvPr id="630" name="슬라이드 번호"/>
           <p:cNvSpPr txBox="1">
             <a:spLocks noGrp="1"/>
           </p:cNvSpPr>
@@ -19490,7 +19491,7 @@
       </p:sp>
       <p:sp>
         <p:nvSpPr>
-          <p:cNvPr id="601" name="상태 변경을 허용하는 명시적 확인 문자열을 넣는다. 회사 signer만 사용한다."/>
+          <p:cNvPr id="631" name="상태 변경을 허용하는 명시적 확인 문자열을 넣는다. 회사 signer만 사용한다."/>
           <p:cNvSpPr txBox="1"/>
           <p:nvPr/>
         </p:nvSpPr>
@@ -19537,7 +19538,7 @@
       </p:sp>
       <p:sp>
         <p:nvSpPr>
-          <p:cNvPr id="602" name="bun run demo/scripts/run.ts \…"/>
+          <p:cNvPr id="632" name="bun run demo/scripts/run.ts \…"/>
           <p:cNvSpPr txBox="1"/>
           <p:nvPr/>
         </p:nvSpPr>
@@ -19705,7 +19706,7 @@
       </p:grpSpPr>
       <p:sp>
         <p:nvSpPr>
-          <p:cNvPr id="606" name="실제 Maroo receipt"/>
+          <p:cNvPr id="636" name="실제 Maroo receipt"/>
           <p:cNvSpPr txBox="1">
             <a:spLocks noGrp="1"/>
           </p:cNvSpPr>
@@ -19739,7 +19740,7 @@
       </p:sp>
       <p:sp>
         <p:nvSpPr>
-          <p:cNvPr id="608" name="슬라이드 번호"/>
+          <p:cNvPr id="638" name="슬라이드 번호"/>
           <p:cNvSpPr txBox="1">
             <a:spLocks noGrp="1"/>
           </p:cNvSpPr>
@@ -19771,7 +19772,7 @@
       </p:sp>
       <p:graphicFrame>
         <p:nvGraphicFramePr>
-          <p:cNvPr id="609" name="표 1"/>
+          <p:cNvPr id="639" name="표 1"/>
           <p:cNvGraphicFramePr/>
           <p:nvPr/>
         </p:nvGraphicFramePr>
@@ -20053,7 +20054,7 @@
                         </a:defRPr>
                       </a:pPr>
                       <a:r>
-                        <a:rPr sz="3200" b="1">
+                        <a:rPr sz="3200" b="1" dirty="0">
                           <a:solidFill>
                             <a:srgbClr val="FFFFFF"/>
                           </a:solidFill>
@@ -20125,13 +20126,26 @@
                         </a:defRPr>
                       </a:pPr>
                       <a:r>
-                        <a:rPr sz="3200">
+                        <a:rPr sz="3200" dirty="0">
                           <a:solidFill>
                             <a:srgbClr val="FFFFFF"/>
                           </a:solidFill>
                         </a:rPr>
-                        <a:t>gas 1,000,000, decoded reason 없음</a:t>
+                        <a:t>gas 1,000,000, decoded reason </a:t>
                       </a:r>
+                      <a:r>
+                        <a:rPr sz="3200" dirty="0" err="1">
+                          <a:solidFill>
+                            <a:srgbClr val="FFFFFF"/>
+                          </a:solidFill>
+                        </a:rPr>
+                        <a:t>없음</a:t>
+                      </a:r>
+                      <a:endParaRPr sz="3200" dirty="0">
+                        <a:solidFill>
+                          <a:srgbClr val="FFFFFF"/>
+                        </a:solidFill>
+                      </a:endParaRPr>
                     </a:p>
                   </a:txBody>
                   <a:tcPr marL="50800" marR="50800" marT="50800" marB="50800" anchor="ctr" horzOverflow="overflow"/>
@@ -20174,7 +20188,7 @@
       </p:grpSpPr>
       <p:sp>
         <p:nvSpPr>
-          <p:cNvPr id="613" name="실패 모드 지도 · 첫 실패 계층을 찾는다"/>
+          <p:cNvPr id="643" name="실패 모드 지도 · 첫 실패 계층을 찾는다"/>
           <p:cNvSpPr txBox="1">
             <a:spLocks noGrp="1"/>
           </p:cNvSpPr>
@@ -20208,7 +20222,7 @@
       </p:sp>
       <p:sp>
         <p:nvSpPr>
-          <p:cNvPr id="615" name="슬라이드 번호"/>
+          <p:cNvPr id="645" name="슬라이드 번호"/>
           <p:cNvSpPr txBox="1">
             <a:spLocks noGrp="1"/>
           </p:cNvSpPr>
@@ -20240,7 +20254,7 @@
       </p:sp>
       <p:graphicFrame>
         <p:nvGraphicFramePr>
-          <p:cNvPr id="616" name="표 1"/>
+          <p:cNvPr id="646" name="표 1"/>
           <p:cNvGraphicFramePr/>
           <p:nvPr/>
         </p:nvGraphicFramePr>
@@ -20493,7 +20507,7 @@
                             <a:srgbClr val="FFFFFF"/>
                           </a:solidFill>
                         </a:rPr>
-                        <a:t>Policy</a:t>
+                        <a:t>On-chain policy</a:t>
                       </a:r>
                     </a:p>
                   </a:txBody>
@@ -20575,7 +20589,7 @@
                             <a:srgbClr val="FFFFFF"/>
                           </a:solidFill>
                         </a:rPr>
-                        <a:t>Prover ↔ Privacy</a:t>
+                        <a:t>Off-chain prover → verifier</a:t>
                       </a:r>
                     </a:p>
                   </a:txBody>
@@ -20599,7 +20613,7 @@
                             <a:srgbClr val="FFFFFF"/>
                           </a:solidFill>
                         </a:rPr>
-                        <a:t>VK, root, spend 상태</a:t>
+                        <a:t>artifact/VK, root, spend 상태</a:t>
                       </a:r>
                     </a:p>
                   </a:txBody>
@@ -20657,7 +20671,7 @@
                             <a:srgbClr val="FFFFFF"/>
                           </a:solidFill>
                         </a:rPr>
-                        <a:t>Privacy ↔ Scanner</a:t>
+                        <a:t>On-chain state → scanner</a:t>
                       </a:r>
                     </a:p>
                   </a:txBody>
@@ -20710,60 +20724,12 @@
                         </a:defRPr>
                       </a:pPr>
                       <a:r>
-                        <a:rPr sz="3200" b="1" dirty="0">
+                        <a:rPr sz="3200" b="1">
                           <a:solidFill>
                             <a:srgbClr val="FFFFFF"/>
                           </a:solidFill>
                         </a:rPr>
-                        <a:t>receipt </a:t>
-                      </a:r>
-                      <a:r>
-                        <a:rPr sz="3200" b="1" dirty="0" err="1">
-                          <a:solidFill>
-                            <a:srgbClr val="FFFFFF"/>
-                          </a:solidFill>
-                        </a:rPr>
-                        <a:t>성공</a:t>
-                      </a:r>
-                      <a:r>
-                        <a:rPr sz="3200" b="1" dirty="0">
-                          <a:solidFill>
-                            <a:srgbClr val="FFFFFF"/>
-                          </a:solidFill>
-                        </a:rPr>
-                        <a:t>, </a:t>
-                      </a:r>
-                      <a:r>
-                        <a:rPr sz="3200" b="1" dirty="0" err="1">
-                          <a:solidFill>
-                            <a:srgbClr val="FFFFFF"/>
-                          </a:solidFill>
-                        </a:rPr>
-                        <a:t>다른</a:t>
-                      </a:r>
-                      <a:r>
-                        <a:rPr sz="3200" b="1" dirty="0">
-                          <a:solidFill>
-                            <a:srgbClr val="FFFFFF"/>
-                          </a:solidFill>
-                        </a:rPr>
-                        <a:t> </a:t>
-                      </a:r>
-                      <a:r>
-                        <a:rPr sz="3200" b="1" dirty="0" err="1">
-                          <a:solidFill>
-                            <a:srgbClr val="FFFFFF"/>
-                          </a:solidFill>
-                        </a:rPr>
-                        <a:t>직원</a:t>
-                      </a:r>
-                      <a:r>
-                        <a:rPr sz="3200" b="1" dirty="0">
-                          <a:solidFill>
-                            <a:srgbClr val="FFFFFF"/>
-                          </a:solidFill>
-                        </a:rPr>
-                        <a:t> scan</a:t>
+                        <a:t>receipt 성공, 다른 직원 scan</a:t>
                       </a:r>
                     </a:p>
                   </a:txBody>
@@ -20787,7 +20753,7 @@
                             <a:srgbClr val="FFFFFF"/>
                           </a:solidFill>
                         </a:rPr>
-                        <a:t>App ↔ Auditor</a:t>
+                        <a:t>App/registry ↔ audit</a:t>
                       </a:r>
                     </a:p>
                   </a:txBody>
@@ -20806,20 +20772,12 @@
                         </a:defRPr>
                       </a:pPr>
                       <a:r>
-                        <a:rPr sz="3200" dirty="0" err="1">
+                        <a:rPr sz="3200">
                           <a:solidFill>
                             <a:srgbClr val="FFFFFF"/>
                           </a:solidFill>
                         </a:rPr>
-                        <a:t>registry와</a:t>
-                      </a:r>
-                      <a:r>
-                        <a:rPr sz="3200" dirty="0">
-                          <a:solidFill>
-                            <a:srgbClr val="FFFFFF"/>
-                          </a:solidFill>
-                        </a:rPr>
-                        <a:t> plan binding</a:t>
+                        <a:t>registry와 plan binding</a:t>
                       </a:r>
                     </a:p>
                   </a:txBody>
@@ -20863,7 +20821,7 @@
       </p:grpSpPr>
       <p:sp>
         <p:nvSpPr>
-          <p:cNvPr id="620" name="완료 증거"/>
+          <p:cNvPr id="650" name="완료 증거"/>
           <p:cNvSpPr txBox="1">
             <a:spLocks noGrp="1"/>
           </p:cNvSpPr>
@@ -20897,7 +20855,7 @@
       </p:sp>
       <p:sp>
         <p:nvSpPr>
-          <p:cNvPr id="622" name="deposit receipt와 treasury note…"/>
+          <p:cNvPr id="652" name="deposit receipt와 treasury note…"/>
           <p:cNvSpPr txBox="1">
             <a:spLocks noGrp="1"/>
           </p:cNvSpPr>
@@ -20982,7 +20940,7 @@
       </p:sp>
       <p:sp>
         <p:nvSpPr>
-          <p:cNvPr id="623" name="슬라이드 번호"/>
+          <p:cNvPr id="653" name="슬라이드 번호"/>
           <p:cNvSpPr txBox="1">
             <a:spLocks noGrp="1"/>
           </p:cNvSpPr>
@@ -21040,7 +20998,7 @@
       </p:grpSpPr>
       <p:sp>
         <p:nvSpPr>
-          <p:cNvPr id="627" name="워크숍 종료 판정"/>
+          <p:cNvPr id="657" name="워크숍 종료 판정"/>
           <p:cNvSpPr txBox="1">
             <a:spLocks noGrp="1"/>
           </p:cNvSpPr>
@@ -21074,7 +21032,7 @@
       </p:sp>
       <p:sp>
         <p:nvSpPr>
-          <p:cNvPr id="629" name="슬라이드 번호"/>
+          <p:cNvPr id="659" name="슬라이드 번호"/>
           <p:cNvSpPr txBox="1">
             <a:spLocks noGrp="1"/>
           </p:cNvSpPr>
@@ -21106,7 +21064,7 @@
       </p:sp>
       <p:graphicFrame>
         <p:nvGraphicFramePr>
-          <p:cNvPr id="630" name="표 1"/>
+          <p:cNvPr id="660" name="표 1"/>
           <p:cNvGraphicFramePr/>
           <p:nvPr/>
         </p:nvGraphicFramePr>
@@ -21301,7 +21259,7 @@
                             <a:srgbClr val="FFFFFF"/>
                           </a:solidFill>
                         </a:rPr>
-                        <a:t>준비, RPC, PCL, Privacy, Delivery, 업무</a:t>
+                        <a:t>준비, RPC, PCL, Privacy verifier, 직원 확인, 업무</a:t>
                       </a:r>
                     </a:p>
                   </a:txBody>
@@ -21388,13 +21346,66 @@
                         </a:defRPr>
                       </a:pPr>
                       <a:r>
-                        <a:rPr sz="3200" b="1">
+                        <a:rPr sz="3200" b="1" dirty="0" err="1">
                           <a:solidFill>
                             <a:srgbClr val="FFFFFF"/>
                           </a:solidFill>
                         </a:rPr>
-                        <a:t>프로덕션 전에 무엇이 필요한가</a:t>
+                        <a:t>프로덕션</a:t>
                       </a:r>
+                      <a:r>
+                        <a:rPr sz="3200" b="1" dirty="0">
+                          <a:solidFill>
+                            <a:srgbClr val="FFFFFF"/>
+                          </a:solidFill>
+                        </a:rPr>
+                        <a:t> </a:t>
+                      </a:r>
+                      <a:r>
+                        <a:rPr sz="3200" b="1" dirty="0" err="1">
+                          <a:solidFill>
+                            <a:srgbClr val="FFFFFF"/>
+                          </a:solidFill>
+                        </a:rPr>
+                        <a:t>전에</a:t>
+                      </a:r>
+                      <a:r>
+                        <a:rPr sz="3200" b="1" dirty="0">
+                          <a:solidFill>
+                            <a:srgbClr val="FFFFFF"/>
+                          </a:solidFill>
+                        </a:rPr>
+                        <a:t> </a:t>
+                      </a:r>
+                      <a:r>
+                        <a:rPr sz="3200" b="1" dirty="0" err="1">
+                          <a:solidFill>
+                            <a:srgbClr val="FFFFFF"/>
+                          </a:solidFill>
+                        </a:rPr>
+                        <a:t>무엇이</a:t>
+                      </a:r>
+                      <a:r>
+                        <a:rPr sz="3200" b="1" dirty="0">
+                          <a:solidFill>
+                            <a:srgbClr val="FFFFFF"/>
+                          </a:solidFill>
+                        </a:rPr>
+                        <a:t> </a:t>
+                      </a:r>
+                      <a:r>
+                        <a:rPr sz="3200" b="1" dirty="0" err="1">
+                          <a:solidFill>
+                            <a:srgbClr val="FFFFFF"/>
+                          </a:solidFill>
+                        </a:rPr>
+                        <a:t>필요한가</a:t>
+                      </a:r>
+                      <a:endParaRPr sz="3200" b="1" dirty="0">
+                        <a:solidFill>
+                          <a:srgbClr val="FFFFFF"/>
+                        </a:solidFill>
+                      </a:endParaRPr>
                     </a:p>
                   </a:txBody>
                   <a:tcPr marL="50800" marR="50800" marT="50800" marB="50800" anchor="ctr" horzOverflow="overflow"/>
@@ -21412,12 +21423,44 @@
                         </a:defRPr>
                       </a:pPr>
                       <a:r>
-                        <a:rPr sz="3200">
+                        <a:rPr sz="3200" dirty="0">
                           <a:solidFill>
                             <a:srgbClr val="FFFFFF"/>
                           </a:solidFill>
                         </a:rPr>
-                        <a:t>prover, custody, policy, scanner owner</a:t>
+                        <a:t>proof </a:t>
+                      </a:r>
+                      <a:r>
+                        <a:rPr sz="3200" dirty="0" err="1">
+                          <a:solidFill>
+                            <a:srgbClr val="FFFFFF"/>
+                          </a:solidFill>
+                        </a:rPr>
+                        <a:t>생성</a:t>
+                      </a:r>
+                      <a:r>
+                        <a:rPr sz="3200" dirty="0">
+                          <a:solidFill>
+                            <a:srgbClr val="FFFFFF"/>
+                          </a:solidFill>
+                        </a:rPr>
+                        <a:t> </a:t>
+                      </a:r>
+                      <a:r>
+                        <a:rPr sz="3200" dirty="0" err="1">
+                          <a:solidFill>
+                            <a:srgbClr val="FFFFFF"/>
+                          </a:solidFill>
+                        </a:rPr>
+                        <a:t>모델</a:t>
+                      </a:r>
+                      <a:r>
+                        <a:rPr sz="3200" dirty="0">
+                          <a:solidFill>
+                            <a:srgbClr val="FFFFFF"/>
+                          </a:solidFill>
+                        </a:rPr>
+                        <a:t>, custody, policy, scanner owner</a:t>
                       </a:r>
                     </a:p>
                   </a:txBody>
@@ -21461,7 +21504,7 @@
       </p:grpSpPr>
       <p:sp>
         <p:nvSpPr>
-          <p:cNvPr id="634" name="프로덕션 전 결정해야 할 것"/>
+          <p:cNvPr id="664" name="프로덕션 전 결정해야 할 것"/>
           <p:cNvSpPr txBox="1">
             <a:spLocks noGrp="1"/>
           </p:cNvSpPr>
@@ -21495,7 +21538,7 @@
       </p:sp>
       <p:sp>
         <p:nvSpPr>
-          <p:cNvPr id="636" name="슬라이드 번호"/>
+          <p:cNvPr id="666" name="슬라이드 번호"/>
           <p:cNvSpPr txBox="1">
             <a:spLocks noGrp="1"/>
           </p:cNvSpPr>
@@ -21527,13 +21570,13 @@
       </p:sp>
       <p:graphicFrame>
         <p:nvGraphicFramePr>
-          <p:cNvPr id="637" name="표 1"/>
+          <p:cNvPr id="667" name="표 1"/>
           <p:cNvGraphicFramePr/>
           <p:nvPr/>
         </p:nvGraphicFramePr>
         <p:xfrm>
           <a:off x="1270000" y="2413000"/>
-          <a:ext cx="21844000" cy="8011160"/>
+          <a:ext cx="21844000" cy="9001760"/>
         </p:xfrm>
         <a:graphic>
           <a:graphicData uri="http://schemas.openxmlformats.org/drawingml/2006/table">
@@ -21708,7 +21751,7 @@
                             <a:srgbClr val="FFFFFF"/>
                           </a:solidFill>
                         </a:rPr>
-                        <a:t>Prover / VK</a:t>
+                        <a:t>Off-chain proving</a:t>
                       </a:r>
                     </a:p>
                   </a:txBody>
@@ -21756,7 +21799,7 @@
                             <a:srgbClr val="FFFFFF"/>
                           </a:solidFill>
                         </a:rPr>
-                        <a:t>호환 버전·provenance·배포</a:t>
+                        <a:t>자체/managed 선택·witness 경계·artifact 호환</a:t>
                       </a:r>
                     </a:p>
                   </a:txBody>
@@ -21780,7 +21823,7 @@
                             <a:srgbClr val="FFFFFF"/>
                           </a:solidFill>
                         </a:rPr>
-                        <a:t>ZK platform</a:t>
+                        <a:t>기관 ZK·Security</a:t>
                       </a:r>
                     </a:p>
                   </a:txBody>
@@ -21814,7 +21857,7 @@
                             <a:srgbClr val="FFFFFF"/>
                           </a:solidFill>
                         </a:rPr>
-                        <a:t>Custody</a:t>
+                        <a:t>On-chain verifier</a:t>
                       </a:r>
                     </a:p>
                   </a:txBody>
@@ -21838,7 +21881,7 @@
                             <a:srgbClr val="FFFFFF"/>
                           </a:solidFill>
                         </a:rPr>
-                        <a:t>단일 testnet key</a:t>
+                        <a:t>Maroo rejection 관찰</a:t>
                       </a:r>
                     </a:p>
                   </a:txBody>
@@ -21862,7 +21905,7 @@
                             <a:srgbClr val="FFFFFF"/>
                           </a:solidFill>
                         </a:rPr>
-                        <a:t>HSM·승인·회전·복구</a:t>
+                        <a:t>회로·VK 버전·업그레이드 확인</a:t>
                       </a:r>
                     </a:p>
                   </a:txBody>
@@ -21886,7 +21929,7 @@
                             <a:srgbClr val="FFFFFF"/>
                           </a:solidFill>
                         </a:rPr>
-                        <a:t>Treasury</a:t>
+                        <a:t>Maroo protocol</a:t>
                       </a:r>
                     </a:p>
                   </a:txBody>
@@ -21920,7 +21963,7 @@
                             <a:srgbClr val="FFFFFF"/>
                           </a:solidFill>
                         </a:rPr>
-                        <a:t>PCL / EAS</a:t>
+                        <a:t>Custody</a:t>
                       </a:r>
                     </a:p>
                   </a:txBody>
@@ -21944,7 +21987,7 @@
                             <a:srgbClr val="FFFFFF"/>
                           </a:solidFill>
                         </a:rPr>
-                        <a:t>상태 read·책임 매핑</a:t>
+                        <a:t>단일 testnet key</a:t>
                       </a:r>
                     </a:p>
                   </a:txBody>
@@ -21968,7 +22011,7 @@
                             <a:srgbClr val="FFFFFF"/>
                           </a:solidFill>
                         </a:rPr>
-                        <a:t>정책 변경·예외·denylist</a:t>
+                        <a:t>HSM·승인·회전·복구</a:t>
                       </a:r>
                     </a:p>
                   </a:txBody>
@@ -21992,7 +22035,7 @@
                             <a:srgbClr val="FFFFFF"/>
                           </a:solidFill>
                         </a:rPr>
-                        <a:t>Compliance</a:t>
+                        <a:t>Treasury</a:t>
                       </a:r>
                     </a:p>
                   </a:txBody>
@@ -22026,7 +22069,7 @@
                             <a:srgbClr val="FFFFFF"/>
                           </a:solidFill>
                         </a:rPr>
-                        <a:t>Employee registry</a:t>
+                        <a:t>PCL / EAS</a:t>
                       </a:r>
                     </a:p>
                   </a:txBody>
@@ -22050,7 +22093,7 @@
                             <a:srgbClr val="FFFFFF"/>
                           </a:solidFill>
                         </a:rPr>
-                        <a:t>합성 profile 3개</a:t>
+                        <a:t>상태 read·책임 매핑</a:t>
                       </a:r>
                     </a:p>
                   </a:txBody>
@@ -22074,7 +22117,7 @@
                             <a:srgbClr val="FFFFFF"/>
                           </a:solidFill>
                         </a:rPr>
-                        <a:t>입사·변경·퇴사 lifecycle</a:t>
+                        <a:t>정책 변경·예외·denylist</a:t>
                       </a:r>
                     </a:p>
                   </a:txBody>
@@ -22098,7 +22141,7 @@
                             <a:srgbClr val="FFFFFF"/>
                           </a:solidFill>
                         </a:rPr>
-                        <a:t>Payroll</a:t>
+                        <a:t>Compliance</a:t>
                       </a:r>
                     </a:p>
                   </a:txBody>
@@ -22132,7 +22175,7 @@
                             <a:srgbClr val="FFFFFF"/>
                           </a:solidFill>
                         </a:rPr>
-                        <a:t>Scanner</a:t>
+                        <a:t>Employee registry</a:t>
                       </a:r>
                     </a:p>
                   </a:txBody>
@@ -22156,7 +22199,7 @@
                             <a:srgbClr val="FFFFFF"/>
                           </a:solidFill>
                         </a:rPr>
-                        <a:t>Local 직원별 scan</a:t>
+                        <a:t>합성 profile 3개</a:t>
                       </a:r>
                     </a:p>
                   </a:txBody>
@@ -22180,7 +22223,7 @@
                             <a:srgbClr val="FFFFFF"/>
                           </a:solidFill>
                         </a:rPr>
-                        <a:t>cursor·재시도·SLA·소유권</a:t>
+                        <a:t>입사·변경·퇴사 lifecycle</a:t>
                       </a:r>
                     </a:p>
                   </a:txBody>
@@ -22204,7 +22247,7 @@
                             <a:srgbClr val="FFFFFF"/>
                           </a:solidFill>
                         </a:rPr>
-                        <a:t>Wallet team</a:t>
+                        <a:t>Payroll</a:t>
                       </a:r>
                     </a:p>
                   </a:txBody>
@@ -22238,7 +22281,7 @@
                             <a:srgbClr val="FFFFFF"/>
                           </a:solidFill>
                         </a:rPr>
-                        <a:t>Audit / disclosure</a:t>
+                        <a:t>Scanner</a:t>
                       </a:r>
                     </a:p>
                   </a:txBody>
@@ -22262,7 +22305,7 @@
                             <a:srgbClr val="FFFFFF"/>
                           </a:solidFill>
                         </a:rPr>
-                        <a:t>digest와 scan 대사</a:t>
+                        <a:t>Local 직원별 scan</a:t>
                       </a:r>
                     </a:p>
                   </a:txBody>
@@ -22286,7 +22329,7 @@
                             <a:srgbClr val="FFFFFF"/>
                           </a:solidFill>
                         </a:rPr>
-                        <a:t>접근권한·보존·감사 절차</a:t>
+                        <a:t>cursor·재시도·SLA·소유권</a:t>
                       </a:r>
                     </a:p>
                   </a:txBody>
@@ -22310,7 +22353,7 @@
                             <a:srgbClr val="FFFFFF"/>
                           </a:solidFill>
                         </a:rPr>
-                        <a:t>Audit</a:t>
+                        <a:t>Wallet team</a:t>
                       </a:r>
                     </a:p>
                   </a:txBody>
@@ -22344,6 +22387,112 @@
                             <a:srgbClr val="FFFFFF"/>
                           </a:solidFill>
                         </a:rPr>
+                        <a:t>Audit / disclosure</a:t>
+                      </a:r>
+                    </a:p>
+                  </a:txBody>
+                  <a:tcPr marL="50800" marR="50800" marT="50800" marB="50800" anchor="ctr" horzOverflow="overflow"/>
+                </a:tc>
+                <a:tc>
+                  <a:txBody>
+                    <a:bodyPr/>
+                    <a:lstStyle/>
+                    <a:p>
+                      <a:pPr defTabSz="914400">
+                        <a:defRPr>
+                          <a:solidFill>
+                            <a:srgbClr val="000000"/>
+                          </a:solidFill>
+                        </a:defRPr>
+                      </a:pPr>
+                      <a:r>
+                        <a:rPr sz="3200">
+                          <a:solidFill>
+                            <a:srgbClr val="FFFFFF"/>
+                          </a:solidFill>
+                        </a:rPr>
+                        <a:t>digest와 scan 대사</a:t>
+                      </a:r>
+                    </a:p>
+                  </a:txBody>
+                  <a:tcPr marL="50800" marR="50800" marT="50800" marB="50800" anchor="ctr" horzOverflow="overflow"/>
+                </a:tc>
+                <a:tc>
+                  <a:txBody>
+                    <a:bodyPr/>
+                    <a:lstStyle/>
+                    <a:p>
+                      <a:pPr defTabSz="914400">
+                        <a:defRPr>
+                          <a:solidFill>
+                            <a:srgbClr val="000000"/>
+                          </a:solidFill>
+                        </a:defRPr>
+                      </a:pPr>
+                      <a:r>
+                        <a:rPr sz="3200">
+                          <a:solidFill>
+                            <a:srgbClr val="FFFFFF"/>
+                          </a:solidFill>
+                        </a:rPr>
+                        <a:t>접근권한·보존·감사 절차</a:t>
+                      </a:r>
+                    </a:p>
+                  </a:txBody>
+                  <a:tcPr marL="50800" marR="50800" marT="50800" marB="50800" anchor="ctr" horzOverflow="overflow"/>
+                </a:tc>
+                <a:tc>
+                  <a:txBody>
+                    <a:bodyPr/>
+                    <a:lstStyle/>
+                    <a:p>
+                      <a:pPr defTabSz="914400">
+                        <a:defRPr>
+                          <a:solidFill>
+                            <a:srgbClr val="000000"/>
+                          </a:solidFill>
+                        </a:defRPr>
+                      </a:pPr>
+                      <a:r>
+                        <a:rPr sz="3200">
+                          <a:solidFill>
+                            <a:srgbClr val="FFFFFF"/>
+                          </a:solidFill>
+                        </a:rPr>
+                        <a:t>Audit</a:t>
+                      </a:r>
+                    </a:p>
+                  </a:txBody>
+                  <a:tcPr marL="50800" marR="50800" marT="50800" marB="50800" anchor="ctr" horzOverflow="overflow"/>
+                </a:tc>
+                <a:extLst>
+                  <a:ext uri="{0D108BD9-81ED-4DB2-BD59-A6C34878D82A}">
+                    <a16:rowId xmlns:a16="http://schemas.microsoft.com/office/drawing/2014/main" val="10007"/>
+                  </a:ext>
+                </a:extLst>
+              </a:tr>
+              <a:tr h="990600">
+                <a:tc>
+                  <a:txBody>
+                    <a:bodyPr/>
+                    <a:lstStyle/>
+                    <a:p>
+                      <a:pPr defTabSz="914400">
+                        <a:tabLst>
+                          <a:tab pos="1663700" algn="l"/>
+                        </a:tabLst>
+                        <a:defRPr b="0">
+                          <a:solidFill>
+                            <a:srgbClr val="000000"/>
+                          </a:solidFill>
+                        </a:defRPr>
+                      </a:pPr>
+                      <a:r>
+                        <a:rPr sz="3200" b="1">
+                          <a:solidFill>
+                            <a:srgbClr val="FFFFFF"/>
+                          </a:solidFill>
+                        </a:rPr>
                         <a:t>Operations</a:t>
                       </a:r>
                     </a:p>
@@ -22424,7 +22573,7 @@
                 </a:tc>
                 <a:extLst>
                   <a:ext uri="{0D108BD9-81ED-4DB2-BD59-A6C34878D82A}">
-                    <a16:rowId xmlns:a16="http://schemas.microsoft.com/office/drawing/2014/main" val="10007"/>
+                    <a16:rowId xmlns:a16="http://schemas.microsoft.com/office/drawing/2014/main" val="10008"/>
                   </a:ext>
                 </a:extLst>
               </a:tr>
@@ -22520,42 +22669,8 @@
               </a:defRPr>
             </a:pPr>
             <a:r>
-              <a:rPr dirty="0" err="1"/>
-              <a:t>대상</a:t>
-            </a:r>
-            <a:r>
-              <a:rPr dirty="0"/>
-              <a:t>: </a:t>
-            </a:r>
-            <a:r>
-              <a:rPr dirty="0" err="1"/>
-              <a:t>금융기관의</a:t>
-            </a:r>
-            <a:r>
-              <a:rPr dirty="0"/>
-              <a:t> </a:t>
-            </a:r>
-            <a:r>
-              <a:rPr dirty="0" err="1"/>
-              <a:t>시니어</a:t>
-            </a:r>
-            <a:r>
-              <a:rPr dirty="0"/>
-              <a:t> </a:t>
-            </a:r>
-            <a:r>
-              <a:rPr dirty="0" err="1"/>
-              <a:t>백엔드·블록체인</a:t>
-            </a:r>
-            <a:r>
-              <a:rPr dirty="0"/>
-              <a:t> </a:t>
-            </a:r>
-            <a:r>
-              <a:rPr dirty="0" err="1"/>
-              <a:t>엔지니어</a:t>
-            </a:r>
-            <a:endParaRPr dirty="0"/>
+              <a:t>대상: 금융기관의 시니어 백엔드·블록체인 엔지니어</a:t>
+            </a:r>
           </a:p>
           <a:p>
             <a:pPr marL="368300" indent="-368300">
@@ -22567,82 +22682,8 @@
               </a:defRPr>
             </a:pPr>
             <a:r>
-              <a:rPr dirty="0" err="1"/>
-              <a:t>방식</a:t>
-            </a:r>
-            <a:r>
-              <a:rPr dirty="0"/>
-              <a:t>: </a:t>
-            </a:r>
-            <a:r>
-              <a:rPr dirty="0" err="1"/>
-              <a:t>각</a:t>
-            </a:r>
-            <a:r>
-              <a:rPr dirty="0"/>
-              <a:t> </a:t>
-            </a:r>
-            <a:r>
-              <a:rPr dirty="0" err="1"/>
-              <a:t>참가자가</a:t>
-            </a:r>
-            <a:r>
-              <a:rPr dirty="0"/>
-              <a:t> </a:t>
-            </a:r>
-            <a:r>
-              <a:rPr dirty="0" err="1"/>
-              <a:t>회사</a:t>
-            </a:r>
-            <a:r>
-              <a:rPr dirty="0"/>
-              <a:t> </a:t>
-            </a:r>
-            <a:r>
-              <a:rPr dirty="0" err="1"/>
-              <a:t>자금관리자와</a:t>
-            </a:r>
-            <a:r>
-              <a:rPr dirty="0"/>
-              <a:t> </a:t>
-            </a:r>
-            <a:r>
-              <a:rPr dirty="0" err="1"/>
-              <a:t>직원</a:t>
-            </a:r>
-            <a:r>
-              <a:rPr dirty="0"/>
-              <a:t> </a:t>
-            </a:r>
-            <a:r>
-              <a:rPr dirty="0" err="1"/>
-              <a:t>확인자</a:t>
-            </a:r>
-            <a:r>
-              <a:rPr dirty="0"/>
-              <a:t> </a:t>
-            </a:r>
-            <a:r>
-              <a:rPr dirty="0" err="1"/>
-              <a:t>역할을</a:t>
-            </a:r>
-            <a:r>
-              <a:rPr dirty="0"/>
-              <a:t> </a:t>
-            </a:r>
-            <a:r>
-              <a:rPr dirty="0" err="1"/>
-              <a:t>순서대로</a:t>
-            </a:r>
-            <a:r>
-              <a:rPr dirty="0"/>
-              <a:t> </a:t>
-            </a:r>
-            <a:r>
-              <a:rPr dirty="0" err="1"/>
-              <a:t>수행</a:t>
-            </a:r>
-            <a:endParaRPr dirty="0"/>
+              <a:t>방식: 각 참가자가 회사 자금관리자와 직원 확인자 역할을 순서대로 수행</a:t>
+            </a:r>
           </a:p>
           <a:p>
             <a:pPr marL="368300" indent="-368300">
@@ -22654,42 +22695,8 @@
               </a:defRPr>
             </a:pPr>
             <a:r>
-              <a:rPr dirty="0" err="1"/>
-              <a:t>계획</a:t>
-            </a:r>
-            <a:r>
-              <a:rPr dirty="0"/>
-              <a:t>: </a:t>
-            </a:r>
-            <a:r>
-              <a:rPr dirty="0" err="1"/>
-              <a:t>합성</a:t>
-            </a:r>
-            <a:r>
-              <a:rPr dirty="0"/>
-              <a:t> </a:t>
-            </a:r>
-            <a:r>
-              <a:rPr dirty="0" err="1"/>
-              <a:t>급여</a:t>
-            </a:r>
-            <a:r>
-              <a:rPr dirty="0"/>
-              <a:t> 300을 EMP-A, EMP-B, EMP-</a:t>
-            </a:r>
-            <a:r>
-              <a:rPr dirty="0" err="1"/>
-              <a:t>C에</a:t>
-            </a:r>
-            <a:r>
-              <a:rPr dirty="0"/>
-              <a:t> </a:t>
-            </a:r>
-            <a:r>
-              <a:rPr dirty="0" err="1"/>
-              <a:t>배분</a:t>
-            </a:r>
-            <a:endParaRPr dirty="0"/>
+              <a:t>계획: 합성 급여 300을 EMP-A, EMP-B, EMP-C에 배분</a:t>
+            </a:r>
           </a:p>
           <a:p>
             <a:pPr marL="368300" indent="-368300">
@@ -22701,58 +22708,8 @@
               </a:defRPr>
             </a:pPr>
             <a:r>
-              <a:rPr dirty="0" err="1"/>
-              <a:t>목표</a:t>
-            </a:r>
-            <a:r>
-              <a:rPr dirty="0"/>
-              <a:t>: 4주에서 8주 </a:t>
-            </a:r>
-            <a:r>
-              <a:rPr dirty="0" err="1"/>
-              <a:t>안에</a:t>
-            </a:r>
-            <a:r>
-              <a:rPr dirty="0"/>
-              <a:t> </a:t>
-            </a:r>
-            <a:r>
-              <a:rPr dirty="0" err="1"/>
-              <a:t>Maroo</a:t>
-            </a:r>
-            <a:r>
-              <a:rPr dirty="0"/>
-              <a:t> </a:t>
-            </a:r>
-            <a:r>
-              <a:rPr dirty="0" err="1"/>
-              <a:t>PoC의</a:t>
-            </a:r>
-            <a:r>
-              <a:rPr dirty="0"/>
-              <a:t> go </a:t>
-            </a:r>
-            <a:r>
-              <a:rPr dirty="0" err="1"/>
-              <a:t>또는</a:t>
-            </a:r>
-            <a:r>
-              <a:rPr dirty="0"/>
-              <a:t> no-go </a:t>
-            </a:r>
-            <a:r>
-              <a:rPr dirty="0" err="1"/>
-              <a:t>조건</a:t>
-            </a:r>
-            <a:r>
-              <a:rPr dirty="0"/>
-              <a:t> </a:t>
-            </a:r>
-            <a:r>
-              <a:rPr dirty="0" err="1"/>
-              <a:t>제안</a:t>
-            </a:r>
-            <a:endParaRPr dirty="0"/>
+              <a:t>목표: 4주에서 8주 안에 Maroo PoC의 go 또는 no-go 조건 제안</a:t>
+            </a:r>
           </a:p>
         </p:txBody>
       </p:sp>
@@ -22820,7 +22777,7 @@
       </p:grpSpPr>
       <p:sp>
         <p:nvSpPr>
-          <p:cNvPr id="641" name="마지막 질문"/>
+          <p:cNvPr id="671" name="마지막 질문"/>
           <p:cNvSpPr txBox="1">
             <a:spLocks noGrp="1"/>
           </p:cNvSpPr>
@@ -22854,7 +22811,7 @@
       </p:sp>
       <p:sp>
         <p:nvSpPr>
-          <p:cNvPr id="643" name="슬라이드 번호"/>
+          <p:cNvPr id="673" name="슬라이드 번호"/>
           <p:cNvSpPr txBox="1">
             <a:spLocks noGrp="1"/>
           </p:cNvSpPr>
@@ -22886,7 +22843,7 @@
       </p:sp>
       <p:sp>
         <p:nvSpPr>
-          <p:cNvPr id="644" name="어떤 증거가 있어야 급여를 완료 처리할 수 있는가"/>
+          <p:cNvPr id="674" name="어떤 증거가 있어야 급여를 완료 처리할 수 있는가"/>
           <p:cNvSpPr txBox="1"/>
           <p:nvPr/>
         </p:nvSpPr>
@@ -22933,7 +22890,7 @@
       </p:sp>
       <p:sp>
         <p:nvSpPr>
-          <p:cNvPr id="645" name="온체인 receipt만으로는 부족하다…"/>
+          <p:cNvPr id="675" name="온체인 receipt만으로는 부족하다…"/>
           <p:cNvSpPr txBox="1"/>
           <p:nvPr/>
         </p:nvSpPr>
@@ -22993,7 +22950,7 @@
               </a:defRPr>
             </a:pPr>
             <a:r>
-              <a:t>정책 판정, proof 상태, 직원별 scan, 업무 계획 대사를 함께 본다</a:t>
+              <a:t>PCL 정책 판정, 온체인 proof 검증, 직원별 scan과 업무 계획 대사를 함께 본다</a:t>
             </a:r>
           </a:p>
         </p:txBody>
@@ -23150,13 +23107,18 @@
                         </a:defRPr>
                       </a:pPr>
                       <a:r>
-                        <a:rPr sz="3200" b="1">
+                        <a:rPr sz="3200" b="1" dirty="0" err="1">
                           <a:solidFill>
                             <a:srgbClr val="FFFFFF"/>
                           </a:solidFill>
                         </a:rPr>
                         <a:t>시간</a:t>
                       </a:r>
+                      <a:endParaRPr sz="3200" b="1" dirty="0">
+                        <a:solidFill>
+                          <a:srgbClr val="FFFFFF"/>
+                        </a:solidFill>
+                      </a:endParaRPr>
                     </a:p>
                   </a:txBody>
                   <a:tcPr marL="50800" marR="50800" marT="50800" marB="50800" anchor="ctr" horzOverflow="overflow"/>
@@ -23812,7 +23774,7 @@
                         </a:defRPr>
                       </a:pPr>
                       <a:r>
-                        <a:rPr sz="3200" b="1">
+                        <a:rPr sz="3200" b="1" dirty="0">
                           <a:solidFill>
                             <a:srgbClr val="FFFFFF"/>
                           </a:solidFill>
@@ -23836,13 +23798,18 @@
                         </a:defRPr>
                       </a:pPr>
                       <a:r>
-                        <a:rPr sz="3200">
+                        <a:rPr sz="3200" dirty="0" err="1">
                           <a:solidFill>
                             <a:srgbClr val="FFFFFF"/>
                           </a:solidFill>
                         </a:rPr>
                         <a:t>종료</a:t>
                       </a:r>
+                      <a:endParaRPr sz="3200" dirty="0">
+                        <a:solidFill>
+                          <a:srgbClr val="FFFFFF"/>
+                        </a:solidFill>
+                      </a:endParaRPr>
                     </a:p>
                   </a:txBody>
                   <a:tcPr marL="50800" marR="50800" marT="50800" marB="50800" anchor="ctr" horzOverflow="overflow"/>
@@ -23860,13 +23827,66 @@
                         </a:defRPr>
                       </a:pPr>
                       <a:r>
-                        <a:rPr sz="3200">
+                        <a:rPr sz="3200" dirty="0" err="1">
                           <a:solidFill>
                             <a:srgbClr val="FFFFFF"/>
                           </a:solidFill>
                         </a:rPr>
-                        <a:t>증거와 다음 단계 기록</a:t>
+                        <a:t>증거와</a:t>
                       </a:r>
+                      <a:r>
+                        <a:rPr sz="3200" dirty="0">
+                          <a:solidFill>
+                            <a:srgbClr val="FFFFFF"/>
+                          </a:solidFill>
+                        </a:rPr>
+                        <a:t> </a:t>
+                      </a:r>
+                      <a:r>
+                        <a:rPr sz="3200" dirty="0" err="1">
+                          <a:solidFill>
+                            <a:srgbClr val="FFFFFF"/>
+                          </a:solidFill>
+                        </a:rPr>
+                        <a:t>다음</a:t>
+                      </a:r>
+                      <a:r>
+                        <a:rPr sz="3200" dirty="0">
+                          <a:solidFill>
+                            <a:srgbClr val="FFFFFF"/>
+                          </a:solidFill>
+                        </a:rPr>
+                        <a:t> </a:t>
+                      </a:r>
+                      <a:r>
+                        <a:rPr sz="3200" dirty="0" err="1">
+                          <a:solidFill>
+                            <a:srgbClr val="FFFFFF"/>
+                          </a:solidFill>
+                        </a:rPr>
+                        <a:t>단계</a:t>
+                      </a:r>
+                      <a:r>
+                        <a:rPr sz="3200" dirty="0">
+                          <a:solidFill>
+                            <a:srgbClr val="FFFFFF"/>
+                          </a:solidFill>
+                        </a:rPr>
+                        <a:t> </a:t>
+                      </a:r>
+                      <a:r>
+                        <a:rPr sz="3200" dirty="0" err="1">
+                          <a:solidFill>
+                            <a:srgbClr val="FFFFFF"/>
+                          </a:solidFill>
+                        </a:rPr>
+                        <a:t>기록</a:t>
+                      </a:r>
+                      <a:endParaRPr sz="3200" dirty="0">
+                        <a:solidFill>
+                          <a:srgbClr val="FFFFFF"/>
+                        </a:solidFill>
+                      </a:endParaRPr>
                     </a:p>
                   </a:txBody>
                   <a:tcPr marL="50800" marR="50800" marT="50800" marB="50800" anchor="ctr" horzOverflow="overflow"/>
@@ -24420,7 +24440,7 @@
                             <a:srgbClr val="FFFFFF"/>
                           </a:solidFill>
                         </a:rPr>
-                        <a:t>호환 prover 요구사항</a:t>
+                        <a:t>호환 off-chain prover 요구사항</a:t>
                       </a:r>
                     </a:p>
                   </a:txBody>
@@ -25139,7 +25159,6 @@
           <a:lstStyle/>
           <a:p>
             <a:fld id="{86CB4B4D-7CA3-9044-876B-883B54F8677D}" type="slidenum">
-              <a:rPr/>
               <a:t>7</a:t>
             </a:fld>
             <a:endParaRPr/>
@@ -25288,14 +25307,14 @@
       </p:sp>
       <p:sp>
         <p:nvSpPr>
-          <p:cNvPr id="239" name="OFF-CHAIN · 기관 책임"/>
+          <p:cNvPr id="239" name="OFF-CHAIN · 기관 통제 영역"/>
           <p:cNvSpPr txBox="1"/>
           <p:nvPr/>
         </p:nvSpPr>
         <p:spPr>
           <a:xfrm>
             <a:off x="1270000" y="2349500"/>
-            <a:ext cx="8255001" cy="508000"/>
+            <a:ext cx="8255000" cy="508000"/>
           </a:xfrm>
           <a:prstGeom prst="rect">
             <a:avLst/>
@@ -25328,7 +25347,7 @@
           </a:lstStyle>
           <a:p>
             <a:r>
-              <a:t>OFF-CHAIN · 기관 책임</a:t>
+              <a:t>OFF-CHAIN · 기관 통제 영역</a:t>
             </a:r>
           </a:p>
         </p:txBody>
@@ -25388,8 +25407,8 @@
         </p:nvSpPr>
         <p:spPr>
           <a:xfrm>
-            <a:off x="1397000" y="3492500"/>
-            <a:ext cx="3937000" cy="2159001"/>
+            <a:off x="1333500" y="3492500"/>
+            <a:ext cx="3238500" cy="2159001"/>
           </a:xfrm>
           <a:prstGeom prst="rect">
             <a:avLst/>
@@ -25430,14 +25449,14 @@
       </p:sp>
       <p:sp>
         <p:nvSpPr>
-          <p:cNvPr id="242" name="Company wallet"/>
+          <p:cNvPr id="242" name="Payroll app"/>
           <p:cNvSpPr txBox="1"/>
           <p:nvPr/>
         </p:nvSpPr>
         <p:spPr>
           <a:xfrm>
-            <a:off x="1701800" y="3810000"/>
-            <a:ext cx="3327400" cy="508000"/>
+            <a:off x="1638300" y="3810000"/>
+            <a:ext cx="2628900" cy="508000"/>
           </a:xfrm>
           <a:prstGeom prst="rect">
             <a:avLst/>
@@ -25470,21 +25489,21 @@
           </a:lstStyle>
           <a:p>
             <a:r>
-              <a:t>Company wallet</a:t>
-            </a:r>
-          </a:p>
-        </p:txBody>
-      </p:sp>
-      <p:sp>
-        <p:nvSpPr>
-          <p:cNvPr id="243" name="COMPANY_PRIVATE_KEY"/>
+              <a:t>Payroll app</a:t>
+            </a:r>
+          </a:p>
+        </p:txBody>
+      </p:sp>
+      <p:sp>
+        <p:nvSpPr>
+          <p:cNvPr id="243" name="employee registry"/>
           <p:cNvSpPr txBox="1"/>
           <p:nvPr/>
         </p:nvSpPr>
         <p:spPr>
           <a:xfrm>
-            <a:off x="1701800" y="4508500"/>
-            <a:ext cx="3327400" cy="368300"/>
+            <a:off x="1638300" y="4508500"/>
+            <a:ext cx="2628900" cy="368300"/>
           </a:xfrm>
           <a:prstGeom prst="rect">
             <a:avLst/>
@@ -25514,21 +25533,21 @@
           </a:lstStyle>
           <a:p>
             <a:r>
-              <a:t>COMPANY_PRIVATE_KEY</a:t>
-            </a:r>
-          </a:p>
-        </p:txBody>
-      </p:sp>
-      <p:sp>
-        <p:nvSpPr>
-          <p:cNvPr id="244" name="deposit · transfer 서명"/>
+              <a:t>employee registry</a:t>
+            </a:r>
+          </a:p>
+        </p:txBody>
+      </p:sp>
+      <p:sp>
+        <p:nvSpPr>
+          <p:cNvPr id="244" name="approved plan digest"/>
           <p:cNvSpPr txBox="1"/>
           <p:nvPr/>
         </p:nvSpPr>
         <p:spPr>
           <a:xfrm>
-            <a:off x="1701800" y="5016500"/>
-            <a:ext cx="3327400" cy="368300"/>
+            <a:off x="1638300" y="5016500"/>
+            <a:ext cx="2628900" cy="368300"/>
           </a:xfrm>
           <a:prstGeom prst="rect">
             <a:avLst/>
@@ -25558,7 +25577,7 @@
           </a:lstStyle>
           <a:p>
             <a:r>
-              <a:t>deposit · transfer 서명</a:t>
+              <a:t>approved plan digest</a:t>
             </a:r>
           </a:p>
         </p:txBody>
@@ -25571,8 +25590,8 @@
         </p:nvSpPr>
         <p:spPr>
           <a:xfrm>
-            <a:off x="6413500" y="3492500"/>
-            <a:ext cx="3937001" cy="2159001"/>
+            <a:off x="5143500" y="3492500"/>
+            <a:ext cx="3429000" cy="2159001"/>
           </a:xfrm>
           <a:prstGeom prst="rect">
             <a:avLst/>
@@ -25613,14 +25632,14 @@
       </p:sp>
       <p:sp>
         <p:nvSpPr>
-          <p:cNvPr id="246" name="Payroll app"/>
+          <p:cNvPr id="246" name="Off-chain prover"/>
           <p:cNvSpPr txBox="1"/>
           <p:nvPr/>
         </p:nvSpPr>
         <p:spPr>
           <a:xfrm>
-            <a:off x="6718300" y="3810000"/>
-            <a:ext cx="3327400" cy="508000"/>
+            <a:off x="5448300" y="3810000"/>
+            <a:ext cx="2819400" cy="508000"/>
           </a:xfrm>
           <a:prstGeom prst="rect">
             <a:avLst/>
@@ -25653,21 +25672,21 @@
           </a:lstStyle>
           <a:p>
             <a:r>
-              <a:t>Payroll app</a:t>
-            </a:r>
-          </a:p>
-        </p:txBody>
-      </p:sp>
-      <p:sp>
-        <p:nvSpPr>
-          <p:cNvPr id="247" name="employee registry"/>
+              <a:t>Off-chain prover</a:t>
+            </a:r>
+          </a:p>
+        </p:txBody>
+      </p:sp>
+      <p:sp>
+        <p:nvSpPr>
+          <p:cNvPr id="247" name="self-host 또는 managed"/>
           <p:cNvSpPr txBox="1"/>
           <p:nvPr/>
         </p:nvSpPr>
         <p:spPr>
           <a:xfrm>
-            <a:off x="6718300" y="4508500"/>
-            <a:ext cx="3327400" cy="368300"/>
+            <a:off x="5448300" y="4508500"/>
+            <a:ext cx="2819400" cy="368300"/>
           </a:xfrm>
           <a:prstGeom prst="rect">
             <a:avLst/>
@@ -25697,21 +25716,21 @@
           </a:lstStyle>
           <a:p>
             <a:r>
-              <a:t>employee registry</a:t>
-            </a:r>
-          </a:p>
-        </p:txBody>
-      </p:sp>
-      <p:sp>
-        <p:nvSpPr>
-          <p:cNvPr id="248" name="plan digest · fail closed"/>
+              <a:t>self-host 또는 managed</a:t>
+            </a:r>
+          </a:p>
+        </p:txBody>
+      </p:sp>
+      <p:sp>
+        <p:nvSpPr>
+          <p:cNvPr id="248" name="witness → proof"/>
           <p:cNvSpPr txBox="1"/>
           <p:nvPr/>
         </p:nvSpPr>
         <p:spPr>
           <a:xfrm>
-            <a:off x="6718300" y="5016500"/>
-            <a:ext cx="3327400" cy="368300"/>
+            <a:off x="5448300" y="5016500"/>
+            <a:ext cx="2819400" cy="368300"/>
           </a:xfrm>
           <a:prstGeom prst="rect">
             <a:avLst/>
@@ -25741,7 +25760,7 @@
           </a:lstStyle>
           <a:p>
             <a:r>
-              <a:t>plan digest · fail closed</a:t>
+              <a:t>witness → proof</a:t>
             </a:r>
           </a:p>
         </p:txBody>
@@ -25754,8 +25773,8 @@
         </p:nvSpPr>
         <p:spPr>
           <a:xfrm>
-            <a:off x="9017000" y="7747000"/>
-            <a:ext cx="3937001" cy="2159000"/>
+            <a:off x="9144000" y="3492500"/>
+            <a:ext cx="3746501" cy="2159001"/>
           </a:xfrm>
           <a:prstGeom prst="rect">
             <a:avLst/>
@@ -25796,14 +25815,14 @@
       </p:sp>
       <p:sp>
         <p:nvSpPr>
-          <p:cNvPr id="250" name="Prover"/>
+          <p:cNvPr id="250" name="Company wallet"/>
           <p:cNvSpPr txBox="1"/>
           <p:nvPr/>
         </p:nvSpPr>
         <p:spPr>
           <a:xfrm>
-            <a:off x="9321800" y="8064500"/>
-            <a:ext cx="3327400" cy="508000"/>
+            <a:off x="9448800" y="3810000"/>
+            <a:ext cx="3136900" cy="508000"/>
           </a:xfrm>
           <a:prstGeom prst="rect">
             <a:avLst/>
@@ -25836,21 +25855,21 @@
           </a:lstStyle>
           <a:p>
             <a:r>
-              <a:t>Prover</a:t>
-            </a:r>
-          </a:p>
-        </p:txBody>
-      </p:sp>
-      <p:sp>
-        <p:nvSpPr>
-          <p:cNvPr id="251" name="witness · proving key"/>
+              <a:t>Company wallet</a:t>
+            </a:r>
+          </a:p>
+        </p:txBody>
+      </p:sp>
+      <p:sp>
+        <p:nvSpPr>
+          <p:cNvPr id="251" name="COMPANY_PRIVATE_KEY"/>
           <p:cNvSpPr txBox="1"/>
           <p:nvPr/>
         </p:nvSpPr>
         <p:spPr>
           <a:xfrm>
-            <a:off x="9321800" y="8763000"/>
-            <a:ext cx="3327400" cy="368300"/>
+            <a:off x="9448800" y="4508500"/>
+            <a:ext cx="3136900" cy="368300"/>
           </a:xfrm>
           <a:prstGeom prst="rect">
             <a:avLst/>
@@ -25880,21 +25899,21 @@
           </a:lstStyle>
           <a:p>
             <a:r>
-              <a:t>witness · proving key</a:t>
-            </a:r>
-          </a:p>
-        </p:txBody>
-      </p:sp>
-      <p:sp>
-        <p:nvSpPr>
-          <p:cNvPr id="252" name="proof · encrypted outputs"/>
+              <a:t>COMPANY_PRIVATE_KEY</a:t>
+            </a:r>
+          </a:p>
+        </p:txBody>
+      </p:sp>
+      <p:sp>
+        <p:nvSpPr>
+          <p:cNvPr id="252" name="검토·서명·제출"/>
           <p:cNvSpPr txBox="1"/>
           <p:nvPr/>
         </p:nvSpPr>
         <p:spPr>
           <a:xfrm>
-            <a:off x="9321800" y="9271000"/>
-            <a:ext cx="3327400" cy="368300"/>
+            <a:off x="9448800" y="5016500"/>
+            <a:ext cx="3136900" cy="368300"/>
           </a:xfrm>
           <a:prstGeom prst="rect">
             <a:avLst/>
@@ -25924,7 +25943,7 @@
           </a:lstStyle>
           <a:p>
             <a:r>
-              <a:t>proof · encrypted outputs</a:t>
+              <a:t>검토·서명·제출</a:t>
             </a:r>
           </a:p>
         </p:txBody>
@@ -25938,7 +25957,7 @@
         <p:spPr>
           <a:xfrm>
             <a:off x="1397000" y="7747000"/>
-            <a:ext cx="3937000" cy="2159000"/>
+            <a:ext cx="4572000" cy="2159000"/>
           </a:xfrm>
           <a:prstGeom prst="rect">
             <a:avLst/>
@@ -25979,14 +25998,14 @@
       </p:sp>
       <p:sp>
         <p:nvSpPr>
-          <p:cNvPr id="254" name="Scanner / auditor"/>
+          <p:cNvPr id="254" name="Employee scanner"/>
           <p:cNvSpPr txBox="1"/>
           <p:nvPr/>
         </p:nvSpPr>
         <p:spPr>
           <a:xfrm>
             <a:off x="1701800" y="8064500"/>
-            <a:ext cx="3327400" cy="508000"/>
+            <a:ext cx="3962400" cy="508000"/>
           </a:xfrm>
           <a:prstGeom prst="rect">
             <a:avLst/>
@@ -26019,21 +26038,21 @@
           </a:lstStyle>
           <a:p>
             <a:r>
-              <a:t>Scanner / auditor</a:t>
-            </a:r>
-          </a:p>
-        </p:txBody>
-      </p:sp>
-      <p:sp>
-        <p:nvSpPr>
-          <p:cNvPr id="255" name="viewing · disclosure key"/>
+              <a:t>Employee scanner</a:t>
+            </a:r>
+          </a:p>
+        </p:txBody>
+      </p:sp>
+      <p:sp>
+        <p:nvSpPr>
+          <p:cNvPr id="255" name="viewing key"/>
           <p:cNvSpPr txBox="1"/>
           <p:nvPr/>
         </p:nvSpPr>
         <p:spPr>
           <a:xfrm>
             <a:off x="1701800" y="8763000"/>
-            <a:ext cx="3327400" cy="368300"/>
+            <a:ext cx="3962400" cy="368300"/>
           </a:xfrm>
           <a:prstGeom prst="rect">
             <a:avLst/>
@@ -26063,21 +26082,21 @@
           </a:lstStyle>
           <a:p>
             <a:r>
-              <a:t>viewing · disclosure key</a:t>
-            </a:r>
-          </a:p>
-        </p:txBody>
-      </p:sp>
-      <p:sp>
-        <p:nvSpPr>
-          <p:cNvPr id="256" name="수령·업무 대사"/>
+              <a:t>viewing key</a:t>
+            </a:r>
+          </a:p>
+        </p:txBody>
+      </p:sp>
+      <p:sp>
+        <p:nvSpPr>
+          <p:cNvPr id="256" name="직원별 note 확인"/>
           <p:cNvSpPr txBox="1"/>
           <p:nvPr/>
         </p:nvSpPr>
         <p:spPr>
           <a:xfrm>
             <a:off x="1701800" y="9271000"/>
-            <a:ext cx="3327400" cy="368300"/>
+            <a:ext cx="3962400" cy="368300"/>
           </a:xfrm>
           <a:prstGeom prst="rect">
             <a:avLst/>
@@ -26107,7 +26126,7 @@
           </a:lstStyle>
           <a:p>
             <a:r>
-              <a:t>수령·업무 대사</a:t>
+              <a:t>직원별 note 확인</a:t>
             </a:r>
           </a:p>
         </p:txBody>
@@ -26120,8 +26139,8 @@
         </p:nvSpPr>
         <p:spPr>
           <a:xfrm>
-            <a:off x="14795500" y="3492500"/>
-            <a:ext cx="3556001" cy="2159001"/>
+            <a:off x="7048500" y="7747000"/>
+            <a:ext cx="4572001" cy="2159000"/>
           </a:xfrm>
           <a:prstGeom prst="rect">
             <a:avLst/>
@@ -26162,14 +26181,14 @@
       </p:sp>
       <p:sp>
         <p:nvSpPr>
-          <p:cNvPr id="258" name="PCL"/>
+          <p:cNvPr id="258" name="Auditor"/>
           <p:cNvSpPr txBox="1"/>
           <p:nvPr/>
         </p:nvSpPr>
         <p:spPr>
           <a:xfrm>
-            <a:off x="15100300" y="3810000"/>
-            <a:ext cx="2946400" cy="508000"/>
+            <a:off x="7353300" y="8064500"/>
+            <a:ext cx="3962400" cy="508000"/>
           </a:xfrm>
           <a:prstGeom prst="rect">
             <a:avLst/>
@@ -26191,7 +26210,7 @@
             <a:lvl1pPr>
               <a:defRPr sz="2700">
                 <a:solidFill>
-                  <a:srgbClr val="FFBF2C"/>
+                  <a:srgbClr val="00E9FF"/>
                 </a:solidFill>
                 <a:latin typeface="Apple SD 산돌고딕 Neo 볼드체"/>
                 <a:ea typeface="Apple SD 산돌고딕 Neo 볼드체"/>
@@ -26202,21 +26221,21 @@
           </a:lstStyle>
           <a:p>
             <a:r>
-              <a:t>PCL</a:t>
-            </a:r>
-          </a:p>
-        </p:txBody>
-      </p:sp>
-      <p:sp>
-        <p:nvSpPr>
-          <p:cNvPr id="259" name="signer · EAS · denylist"/>
+              <a:t>Auditor</a:t>
+            </a:r>
+          </a:p>
+        </p:txBody>
+      </p:sp>
+      <p:sp>
+        <p:nvSpPr>
+          <p:cNvPr id="259" name="disclosure key"/>
           <p:cNvSpPr txBox="1"/>
           <p:nvPr/>
         </p:nvSpPr>
         <p:spPr>
           <a:xfrm>
-            <a:off x="15100300" y="4508500"/>
-            <a:ext cx="2946400" cy="368300"/>
+            <a:off x="7353300" y="8763000"/>
+            <a:ext cx="3962400" cy="368300"/>
           </a:xfrm>
           <a:prstGeom prst="rect">
             <a:avLst/>
@@ -26246,21 +26265,21 @@
           </a:lstStyle>
           <a:p>
             <a:r>
-              <a:t>signer · EAS · denylist</a:t>
-            </a:r>
-          </a:p>
-        </p:txBody>
-      </p:sp>
-      <p:sp>
-        <p:nvSpPr>
-          <p:cNvPr id="260" name="configured policy"/>
+              <a:t>disclosure key</a:t>
+            </a:r>
+          </a:p>
+        </p:txBody>
+      </p:sp>
+      <p:sp>
+        <p:nvSpPr>
+          <p:cNvPr id="260" name="허용 범위 대사"/>
           <p:cNvSpPr txBox="1"/>
           <p:nvPr/>
         </p:nvSpPr>
         <p:spPr>
           <a:xfrm>
-            <a:off x="15100300" y="5016500"/>
-            <a:ext cx="2946400" cy="368300"/>
+            <a:off x="7353300" y="9271000"/>
+            <a:ext cx="3962400" cy="368300"/>
           </a:xfrm>
           <a:prstGeom prst="rect">
             <a:avLst/>
@@ -26290,28 +26309,263 @@
           </a:lstStyle>
           <a:p>
             <a:r>
-              <a:t>configured policy</a:t>
-            </a:r>
-          </a:p>
-        </p:txBody>
-      </p:sp>
-      <p:sp>
-        <p:nvSpPr>
-          <p:cNvPr id="261" name="직사각형"/>
+              <a:t>허용 범위 대사</a:t>
+            </a:r>
+          </a:p>
+        </p:txBody>
+      </p:sp>
+      <p:sp>
+        <p:nvSpPr>
+          <p:cNvPr id="261" name="→"/>
+          <p:cNvSpPr txBox="1"/>
+          <p:nvPr/>
+        </p:nvSpPr>
+        <p:spPr>
+          <a:xfrm>
+            <a:off x="4572000" y="4127500"/>
+            <a:ext cx="571500" cy="622300"/>
+          </a:xfrm>
+          <a:prstGeom prst="rect">
+            <a:avLst/>
+          </a:prstGeom>
+          <a:ln w="12700">
+            <a:miter lim="400000"/>
+          </a:ln>
+          <a:extLst>
+            <a:ext uri="{C572A759-6A51-4108-AA02-DFA0A04FC94B}">
+              <ma14:wrappingTextBoxFlag xmlns:ma14="http://schemas.microsoft.com/office/mac/drawingml/2011/main" xmlns:a14="http://schemas.microsoft.com/office/drawing/2010/main" xmlns:m="http://schemas.openxmlformats.org/officeDocument/2006/math" xmlns="" val="1"/>
+            </a:ext>
+          </a:extLst>
+        </p:spPr>
+        <p:txBody>
+          <a:bodyPr lIns="50800" tIns="50800" rIns="50800" bIns="50800" anchor="ctr">
+            <a:spAutoFit/>
+          </a:bodyPr>
+          <a:lstStyle>
+            <a:lvl1pPr>
+              <a:defRPr sz="3400">
+                <a:solidFill>
+                  <a:srgbClr val="BEC9D4"/>
+                </a:solidFill>
+                <a:latin typeface="Apple SD 산돌고딕 Neo 볼드체"/>
+                <a:ea typeface="Apple SD 산돌고딕 Neo 볼드체"/>
+                <a:cs typeface="Apple SD 산돌고딕 Neo 볼드체"/>
+                <a:sym typeface="Apple SD 산돌고딕 Neo 볼드체"/>
+              </a:defRPr>
+            </a:lvl1pPr>
+          </a:lstStyle>
+          <a:p>
+            <a:r>
+              <a:t>→</a:t>
+            </a:r>
+          </a:p>
+        </p:txBody>
+      </p:sp>
+      <p:sp>
+        <p:nvSpPr>
+          <p:cNvPr id="262" name="→"/>
+          <p:cNvSpPr txBox="1"/>
+          <p:nvPr/>
+        </p:nvSpPr>
+        <p:spPr>
+          <a:xfrm>
+            <a:off x="8572500" y="4127500"/>
+            <a:ext cx="571500" cy="622300"/>
+          </a:xfrm>
+          <a:prstGeom prst="rect">
+            <a:avLst/>
+          </a:prstGeom>
+          <a:ln w="12700">
+            <a:miter lim="400000"/>
+          </a:ln>
+          <a:extLst>
+            <a:ext uri="{C572A759-6A51-4108-AA02-DFA0A04FC94B}">
+              <ma14:wrappingTextBoxFlag xmlns:ma14="http://schemas.microsoft.com/office/mac/drawingml/2011/main" xmlns:a14="http://schemas.microsoft.com/office/drawing/2010/main" xmlns:m="http://schemas.openxmlformats.org/officeDocument/2006/math" xmlns="" val="1"/>
+            </a:ext>
+          </a:extLst>
+        </p:spPr>
+        <p:txBody>
+          <a:bodyPr lIns="50800" tIns="50800" rIns="50800" bIns="50800" anchor="ctr">
+            <a:spAutoFit/>
+          </a:bodyPr>
+          <a:lstStyle>
+            <a:lvl1pPr>
+              <a:defRPr sz="3400">
+                <a:solidFill>
+                  <a:srgbClr val="BEC9D4"/>
+                </a:solidFill>
+                <a:latin typeface="Apple SD 산돌고딕 Neo 볼드체"/>
+                <a:ea typeface="Apple SD 산돌고딕 Neo 볼드체"/>
+                <a:cs typeface="Apple SD 산돌고딕 Neo 볼드체"/>
+                <a:sym typeface="Apple SD 산돌고딕 Neo 볼드체"/>
+              </a:defRPr>
+            </a:lvl1pPr>
+          </a:lstStyle>
+          <a:p>
+            <a:r>
+              <a:t>→</a:t>
+            </a:r>
+          </a:p>
+        </p:txBody>
+      </p:sp>
+      <p:sp>
+        <p:nvSpPr>
+          <p:cNvPr id="263" name="approved plan"/>
+          <p:cNvSpPr txBox="1"/>
+          <p:nvPr/>
+        </p:nvSpPr>
+        <p:spPr>
+          <a:xfrm>
+            <a:off x="4191000" y="5778500"/>
+            <a:ext cx="2413000" cy="368300"/>
+          </a:xfrm>
+          <a:prstGeom prst="rect">
+            <a:avLst/>
+          </a:prstGeom>
+          <a:ln w="12700">
+            <a:miter lim="400000"/>
+          </a:ln>
+          <a:extLst>
+            <a:ext uri="{C572A759-6A51-4108-AA02-DFA0A04FC94B}">
+              <ma14:wrappingTextBoxFlag xmlns:ma14="http://schemas.microsoft.com/office/mac/drawingml/2011/main" xmlns:a14="http://schemas.microsoft.com/office/drawing/2010/main" xmlns:m="http://schemas.openxmlformats.org/officeDocument/2006/math" xmlns="" val="1"/>
+            </a:ext>
+          </a:extLst>
+        </p:spPr>
+        <p:txBody>
+          <a:bodyPr lIns="50800" tIns="50800" rIns="50800" bIns="50800" anchor="ctr">
+            <a:spAutoFit/>
+          </a:bodyPr>
+          <a:lstStyle>
+            <a:lvl1pPr>
+              <a:defRPr sz="1800">
+                <a:solidFill>
+                  <a:srgbClr val="BEC9D4"/>
+                </a:solidFill>
+                <a:latin typeface="Apple SD 산돌고딕 Neo 일반체"/>
+                <a:ea typeface="Apple SD 산돌고딕 Neo 일반체"/>
+                <a:cs typeface="Apple SD 산돌고딕 Neo 일반체"/>
+                <a:sym typeface="Apple SD 산돌고딕 Neo 일반체"/>
+              </a:defRPr>
+            </a:lvl1pPr>
+          </a:lstStyle>
+          <a:p>
+            <a:r>
+              <a:t>approved plan</a:t>
+            </a:r>
+          </a:p>
+        </p:txBody>
+      </p:sp>
+      <p:sp>
+        <p:nvSpPr>
+          <p:cNvPr id="264" name="proof + outputs"/>
+          <p:cNvSpPr txBox="1"/>
+          <p:nvPr/>
+        </p:nvSpPr>
+        <p:spPr>
+          <a:xfrm>
+            <a:off x="8255000" y="5778500"/>
+            <a:ext cx="2667000" cy="368300"/>
+          </a:xfrm>
+          <a:prstGeom prst="rect">
+            <a:avLst/>
+          </a:prstGeom>
+          <a:ln w="12700">
+            <a:miter lim="400000"/>
+          </a:ln>
+          <a:extLst>
+            <a:ext uri="{C572A759-6A51-4108-AA02-DFA0A04FC94B}">
+              <ma14:wrappingTextBoxFlag xmlns:ma14="http://schemas.microsoft.com/office/mac/drawingml/2011/main" xmlns:a14="http://schemas.microsoft.com/office/drawing/2010/main" xmlns:m="http://schemas.openxmlformats.org/officeDocument/2006/math" xmlns="" val="1"/>
+            </a:ext>
+          </a:extLst>
+        </p:spPr>
+        <p:txBody>
+          <a:bodyPr lIns="50800" tIns="50800" rIns="50800" bIns="50800" anchor="ctr">
+            <a:spAutoFit/>
+          </a:bodyPr>
+          <a:lstStyle>
+            <a:lvl1pPr>
+              <a:defRPr sz="1800">
+                <a:solidFill>
+                  <a:srgbClr val="BEC9D4"/>
+                </a:solidFill>
+                <a:latin typeface="Apple SD 산돌고딕 Neo 일반체"/>
+                <a:ea typeface="Apple SD 산돌고딕 Neo 일반체"/>
+                <a:cs typeface="Apple SD 산돌고딕 Neo 일반체"/>
+                <a:sym typeface="Apple SD 산돌고딕 Neo 일반체"/>
+              </a:defRPr>
+            </a:lvl1pPr>
+          </a:lstStyle>
+          <a:p>
+            <a:r>
+              <a:t>proof + outputs</a:t>
+            </a:r>
+          </a:p>
+        </p:txBody>
+      </p:sp>
+      <p:sp>
+        <p:nvSpPr>
+          <p:cNvPr id="265" name="signing key는 prover에 전달하지 않음"/>
+          <p:cNvSpPr txBox="1"/>
+          <p:nvPr/>
+        </p:nvSpPr>
+        <p:spPr>
+          <a:xfrm>
+            <a:off x="5524500" y="6540500"/>
+            <a:ext cx="5588000" cy="393700"/>
+          </a:xfrm>
+          <a:prstGeom prst="rect">
+            <a:avLst/>
+          </a:prstGeom>
+          <a:ln w="12700">
+            <a:miter lim="400000"/>
+          </a:ln>
+          <a:extLst>
+            <a:ext uri="{C572A759-6A51-4108-AA02-DFA0A04FC94B}">
+              <ma14:wrappingTextBoxFlag xmlns:ma14="http://schemas.microsoft.com/office/mac/drawingml/2011/main" xmlns:a14="http://schemas.microsoft.com/office/drawing/2010/main" xmlns:m="http://schemas.openxmlformats.org/officeDocument/2006/math" xmlns="" val="1"/>
+            </a:ext>
+          </a:extLst>
+        </p:spPr>
+        <p:txBody>
+          <a:bodyPr lIns="50800" tIns="50800" rIns="50800" bIns="50800" anchor="ctr">
+            <a:spAutoFit/>
+          </a:bodyPr>
+          <a:lstStyle>
+            <a:lvl1pPr>
+              <a:defRPr sz="1900">
+                <a:solidFill>
+                  <a:srgbClr val="FFBF2C"/>
+                </a:solidFill>
+                <a:latin typeface="Apple SD 산돌고딕 Neo 일반체"/>
+                <a:ea typeface="Apple SD 산돌고딕 Neo 일반체"/>
+                <a:cs typeface="Apple SD 산돌고딕 Neo 일반체"/>
+                <a:sym typeface="Apple SD 산돌고딕 Neo 일반체"/>
+              </a:defRPr>
+            </a:lvl1pPr>
+          </a:lstStyle>
+          <a:p>
+            <a:r>
+              <a:t>signing key는 prover에 전달하지 않음</a:t>
+            </a:r>
+          </a:p>
+        </p:txBody>
+      </p:sp>
+      <p:sp>
+        <p:nvSpPr>
+          <p:cNvPr id="266" name="직사각형"/>
           <p:cNvSpPr/>
           <p:nvPr/>
         </p:nvSpPr>
         <p:spPr>
           <a:xfrm>
-            <a:off x="19177000" y="3492500"/>
-            <a:ext cx="3683000" cy="2159001"/>
+            <a:off x="14605000" y="3175000"/>
+            <a:ext cx="8382001" cy="6477000"/>
           </a:xfrm>
           <a:prstGeom prst="rect">
             <a:avLst/>
           </a:prstGeom>
           <a:solidFill>
             <a:srgbClr val="FFFFFF">
-              <a:alpha val="14000"/>
+              <a:alpha val="6000"/>
             </a:srgbClr>
           </a:solidFill>
           <a:ln w="12700">
@@ -26345,14 +26599,14 @@
       </p:sp>
       <p:sp>
         <p:nvSpPr>
-          <p:cNvPr id="262" name="x/privacy"/>
+          <p:cNvPr id="267" name="Privacy policy-aware wrapper"/>
           <p:cNvSpPr txBox="1"/>
           <p:nvPr/>
         </p:nvSpPr>
         <p:spPr>
           <a:xfrm>
-            <a:off x="19481800" y="3810000"/>
-            <a:ext cx="3073400" cy="508000"/>
+            <a:off x="15113000" y="3365500"/>
+            <a:ext cx="7239000" cy="495300"/>
           </a:xfrm>
           <a:prstGeom prst="rect">
             <a:avLst/>
@@ -26372,7 +26626,7 @@
           </a:bodyPr>
           <a:lstStyle>
             <a:lvl1pPr>
-              <a:defRPr sz="2700">
+              <a:defRPr sz="2500">
                 <a:solidFill>
                   <a:srgbClr val="FFBF2C"/>
                 </a:solidFill>
@@ -26385,109 +26639,21 @@
           </a:lstStyle>
           <a:p>
             <a:r>
-              <a:t>x/privacy</a:t>
-            </a:r>
-          </a:p>
-        </p:txBody>
-      </p:sp>
-      <p:sp>
-        <p:nvSpPr>
-          <p:cNvPr id="263" name="VK · root · nullifier"/>
-          <p:cNvSpPr txBox="1"/>
-          <p:nvPr/>
-        </p:nvSpPr>
-        <p:spPr>
-          <a:xfrm>
-            <a:off x="19481800" y="4508500"/>
-            <a:ext cx="3073400" cy="368300"/>
-          </a:xfrm>
-          <a:prstGeom prst="rect">
-            <a:avLst/>
-          </a:prstGeom>
-          <a:ln w="12700">
-            <a:miter lim="400000"/>
-          </a:ln>
-          <a:extLst>
-            <a:ext uri="{C572A759-6A51-4108-AA02-DFA0A04FC94B}">
-              <ma14:wrappingTextBoxFlag xmlns:ma14="http://schemas.microsoft.com/office/mac/drawingml/2011/main" xmlns:a14="http://schemas.microsoft.com/office/drawing/2010/main" xmlns:m="http://schemas.openxmlformats.org/officeDocument/2006/math" xmlns="" val="1"/>
-            </a:ext>
-          </a:extLst>
-        </p:spPr>
-        <p:txBody>
-          <a:bodyPr lIns="50800" tIns="50800" rIns="50800" bIns="50800" anchor="ctr">
-            <a:spAutoFit/>
-          </a:bodyPr>
-          <a:lstStyle>
-            <a:lvl1pPr>
-              <a:defRPr sz="1800">
-                <a:latin typeface="Apple SD 산돌고딕 Neo 일반체"/>
-                <a:ea typeface="Apple SD 산돌고딕 Neo 일반체"/>
-                <a:cs typeface="Apple SD 산돌고딕 Neo 일반체"/>
-                <a:sym typeface="Apple SD 산돌고딕 Neo 일반체"/>
-              </a:defRPr>
-            </a:lvl1pPr>
-          </a:lstStyle>
-          <a:p>
-            <a:r>
-              <a:t>VK · root · nullifier</a:t>
-            </a:r>
-          </a:p>
-        </p:txBody>
-      </p:sp>
-      <p:sp>
-        <p:nvSpPr>
-          <p:cNvPr id="264" name="commitment state"/>
-          <p:cNvSpPr txBox="1"/>
-          <p:nvPr/>
-        </p:nvSpPr>
-        <p:spPr>
-          <a:xfrm>
-            <a:off x="19481800" y="5016500"/>
-            <a:ext cx="3073400" cy="368300"/>
-          </a:xfrm>
-          <a:prstGeom prst="rect">
-            <a:avLst/>
-          </a:prstGeom>
-          <a:ln w="12700">
-            <a:miter lim="400000"/>
-          </a:ln>
-          <a:extLst>
-            <a:ext uri="{C572A759-6A51-4108-AA02-DFA0A04FC94B}">
-              <ma14:wrappingTextBoxFlag xmlns:ma14="http://schemas.microsoft.com/office/mac/drawingml/2011/main" xmlns:a14="http://schemas.microsoft.com/office/drawing/2010/main" xmlns:m="http://schemas.openxmlformats.org/officeDocument/2006/math" xmlns="" val="1"/>
-            </a:ext>
-          </a:extLst>
-        </p:spPr>
-        <p:txBody>
-          <a:bodyPr lIns="50800" tIns="50800" rIns="50800" bIns="50800" anchor="ctr">
-            <a:spAutoFit/>
-          </a:bodyPr>
-          <a:lstStyle>
-            <a:lvl1pPr>
-              <a:defRPr sz="1800">
-                <a:latin typeface="Apple SD 산돌고딕 Neo 일반체"/>
-                <a:ea typeface="Apple SD 산돌고딕 Neo 일반체"/>
-                <a:cs typeface="Apple SD 산돌고딕 Neo 일반체"/>
-                <a:sym typeface="Apple SD 산돌고딕 Neo 일반체"/>
-              </a:defRPr>
-            </a:lvl1pPr>
-          </a:lstStyle>
-          <a:p>
-            <a:r>
-              <a:t>commitment state</a:t>
-            </a:r>
-          </a:p>
-        </p:txBody>
-      </p:sp>
-      <p:sp>
-        <p:nvSpPr>
-          <p:cNvPr id="265" name="직사각형"/>
+              <a:t>Privacy policy-aware wrapper</a:t>
+            </a:r>
+          </a:p>
+        </p:txBody>
+      </p:sp>
+      <p:sp>
+        <p:nvSpPr>
+          <p:cNvPr id="268" name="직사각형"/>
           <p:cNvSpPr/>
           <p:nvPr/>
         </p:nvSpPr>
         <p:spPr>
           <a:xfrm>
-            <a:off x="16954500" y="7747000"/>
-            <a:ext cx="3810001" cy="2159000"/>
+            <a:off x="14922500" y="4381500"/>
+            <a:ext cx="3302000" cy="2095500"/>
           </a:xfrm>
           <a:prstGeom prst="rect">
             <a:avLst/>
@@ -26528,14 +26694,14 @@
       </p:sp>
       <p:sp>
         <p:nvSpPr>
-          <p:cNvPr id="266" name="OKRW"/>
+          <p:cNvPr id="269" name="PCL pre / post"/>
           <p:cNvSpPr txBox="1"/>
           <p:nvPr/>
         </p:nvSpPr>
         <p:spPr>
           <a:xfrm>
-            <a:off x="17259300" y="8064500"/>
-            <a:ext cx="3200400" cy="508000"/>
+            <a:off x="15227300" y="4699000"/>
+            <a:ext cx="2692400" cy="508000"/>
           </a:xfrm>
           <a:prstGeom prst="rect">
             <a:avLst/>
@@ -26568,21 +26734,21 @@
           </a:lstStyle>
           <a:p>
             <a:r>
-              <a:t>OKRW</a:t>
-            </a:r>
-          </a:p>
-        </p:txBody>
-      </p:sp>
-      <p:sp>
-        <p:nvSpPr>
-          <p:cNvPr id="267" name="deposit의 msg.value"/>
+              <a:t>PCL pre / post</a:t>
+            </a:r>
+          </a:p>
+        </p:txBody>
+      </p:sp>
+      <p:sp>
+        <p:nvSpPr>
+          <p:cNvPr id="270" name="signer · EAS · denylist"/>
           <p:cNvSpPr txBox="1"/>
           <p:nvPr/>
         </p:nvSpPr>
         <p:spPr>
           <a:xfrm>
-            <a:off x="17259300" y="8763000"/>
-            <a:ext cx="3200400" cy="368300"/>
+            <a:off x="15227300" y="5397500"/>
+            <a:ext cx="2692400" cy="368300"/>
           </a:xfrm>
           <a:prstGeom prst="rect">
             <a:avLst/>
@@ -26612,21 +26778,21 @@
           </a:lstStyle>
           <a:p>
             <a:r>
-              <a:t>deposit의 msg.value</a:t>
-            </a:r>
-          </a:p>
-        </p:txBody>
-      </p:sp>
-      <p:sp>
-        <p:nvSpPr>
-          <p:cNvPr id="268" name="공개 native asset"/>
+              <a:t>signer · EAS · denylist</a:t>
+            </a:r>
+          </a:p>
+        </p:txBody>
+      </p:sp>
+      <p:sp>
+        <p:nvSpPr>
+          <p:cNvPr id="271" name="평가·기록"/>
           <p:cNvSpPr txBox="1"/>
           <p:nvPr/>
         </p:nvSpPr>
         <p:spPr>
           <a:xfrm>
-            <a:off x="17259300" y="9271000"/>
-            <a:ext cx="3200400" cy="368300"/>
+            <a:off x="15227300" y="5905500"/>
+            <a:ext cx="2692400" cy="368300"/>
           </a:xfrm>
           <a:prstGeom prst="rect">
             <a:avLst/>
@@ -26656,217 +26822,31 @@
           </a:lstStyle>
           <a:p>
             <a:r>
-              <a:t>공개 native asset</a:t>
-            </a:r>
-          </a:p>
-        </p:txBody>
-      </p:sp>
-      <p:sp>
-        <p:nvSpPr>
-          <p:cNvPr id="269" name="→"/>
-          <p:cNvSpPr txBox="1"/>
-          <p:nvPr/>
-        </p:nvSpPr>
-        <p:spPr>
-          <a:xfrm>
-            <a:off x="5397500" y="4127500"/>
-            <a:ext cx="889000" cy="673100"/>
-          </a:xfrm>
-          <a:prstGeom prst="rect">
-            <a:avLst/>
-          </a:prstGeom>
+              <a:t>평가·기록</a:t>
+            </a:r>
+          </a:p>
+        </p:txBody>
+      </p:sp>
+      <p:sp>
+        <p:nvSpPr>
+          <p:cNvPr id="272" name="직사각형"/>
+          <p:cNvSpPr/>
+          <p:nvPr/>
+        </p:nvSpPr>
+        <p:spPr>
+          <a:xfrm>
+            <a:off x="18923000" y="4381500"/>
+            <a:ext cx="3619500" cy="2095501"/>
+          </a:xfrm>
+          <a:prstGeom prst="rect">
+            <a:avLst/>
+          </a:prstGeom>
+          <a:solidFill>
+            <a:srgbClr val="FFFFFF">
+              <a:alpha val="14000"/>
+            </a:srgbClr>
+          </a:solidFill>
           <a:ln w="12700">
-            <a:miter lim="400000"/>
-          </a:ln>
-          <a:extLst>
-            <a:ext uri="{C572A759-6A51-4108-AA02-DFA0A04FC94B}">
-              <ma14:wrappingTextBoxFlag xmlns:ma14="http://schemas.microsoft.com/office/mac/drawingml/2011/main" xmlns:a14="http://schemas.microsoft.com/office/drawing/2010/main" xmlns:m="http://schemas.openxmlformats.org/officeDocument/2006/math" xmlns="" val="1"/>
-            </a:ext>
-          </a:extLst>
-        </p:spPr>
-        <p:txBody>
-          <a:bodyPr lIns="50800" tIns="50800" rIns="50800" bIns="50800" anchor="ctr">
-            <a:spAutoFit/>
-          </a:bodyPr>
-          <a:lstStyle>
-            <a:lvl1pPr>
-              <a:defRPr sz="3800">
-                <a:solidFill>
-                  <a:srgbClr val="BEC9D4"/>
-                </a:solidFill>
-                <a:latin typeface="Apple SD 산돌고딕 Neo 볼드체"/>
-                <a:ea typeface="Apple SD 산돌고딕 Neo 볼드체"/>
-                <a:cs typeface="Apple SD 산돌고딕 Neo 볼드체"/>
-                <a:sym typeface="Apple SD 산돌고딕 Neo 볼드체"/>
-              </a:defRPr>
-            </a:lvl1pPr>
-          </a:lstStyle>
-          <a:p>
-            <a:r>
-              <a:t>→</a:t>
-            </a:r>
-          </a:p>
-        </p:txBody>
-      </p:sp>
-      <p:sp>
-        <p:nvSpPr>
-          <p:cNvPr id="270" name="→"/>
-          <p:cNvSpPr txBox="1"/>
-          <p:nvPr/>
-        </p:nvSpPr>
-        <p:spPr>
-          <a:xfrm>
-            <a:off x="10477500" y="4127500"/>
-            <a:ext cx="889000" cy="673100"/>
-          </a:xfrm>
-          <a:prstGeom prst="rect">
-            <a:avLst/>
-          </a:prstGeom>
-          <a:ln w="12700">
-            <a:miter lim="400000"/>
-          </a:ln>
-          <a:extLst>
-            <a:ext uri="{C572A759-6A51-4108-AA02-DFA0A04FC94B}">
-              <ma14:wrappingTextBoxFlag xmlns:ma14="http://schemas.microsoft.com/office/mac/drawingml/2011/main" xmlns:a14="http://schemas.microsoft.com/office/drawing/2010/main" xmlns:m="http://schemas.openxmlformats.org/officeDocument/2006/math" xmlns="" val="1"/>
-            </a:ext>
-          </a:extLst>
-        </p:spPr>
-        <p:txBody>
-          <a:bodyPr lIns="50800" tIns="50800" rIns="50800" bIns="50800" anchor="ctr">
-            <a:spAutoFit/>
-          </a:bodyPr>
-          <a:lstStyle>
-            <a:lvl1pPr>
-              <a:defRPr sz="3800">
-                <a:solidFill>
-                  <a:srgbClr val="BEC9D4"/>
-                </a:solidFill>
-                <a:latin typeface="Apple SD 산돌고딕 Neo 볼드체"/>
-                <a:ea typeface="Apple SD 산돌고딕 Neo 볼드체"/>
-                <a:cs typeface="Apple SD 산돌고딕 Neo 볼드체"/>
-                <a:sym typeface="Apple SD 산돌고딕 Neo 볼드체"/>
-              </a:defRPr>
-            </a:lvl1pPr>
-          </a:lstStyle>
-          <a:p>
-            <a:r>
-              <a:t>→</a:t>
-            </a:r>
-          </a:p>
-        </p:txBody>
-      </p:sp>
-      <p:sp>
-        <p:nvSpPr>
-          <p:cNvPr id="271" name="→"/>
-          <p:cNvSpPr txBox="1"/>
-          <p:nvPr/>
-        </p:nvSpPr>
-        <p:spPr>
-          <a:xfrm>
-            <a:off x="13652500" y="4127500"/>
-            <a:ext cx="889000" cy="673100"/>
-          </a:xfrm>
-          <a:prstGeom prst="rect">
-            <a:avLst/>
-          </a:prstGeom>
-          <a:ln w="12700">
-            <a:miter lim="400000"/>
-          </a:ln>
-          <a:extLst>
-            <a:ext uri="{C572A759-6A51-4108-AA02-DFA0A04FC94B}">
-              <ma14:wrappingTextBoxFlag xmlns:ma14="http://schemas.microsoft.com/office/mac/drawingml/2011/main" xmlns:a14="http://schemas.microsoft.com/office/drawing/2010/main" xmlns:m="http://schemas.openxmlformats.org/officeDocument/2006/math" xmlns="" val="1"/>
-            </a:ext>
-          </a:extLst>
-        </p:spPr>
-        <p:txBody>
-          <a:bodyPr lIns="50800" tIns="50800" rIns="50800" bIns="50800" anchor="ctr">
-            <a:spAutoFit/>
-          </a:bodyPr>
-          <a:lstStyle>
-            <a:lvl1pPr>
-              <a:defRPr sz="3800">
-                <a:solidFill>
-                  <a:srgbClr val="BEC9D4"/>
-                </a:solidFill>
-                <a:latin typeface="Apple SD 산돌고딕 Neo 볼드체"/>
-                <a:ea typeface="Apple SD 산돌고딕 Neo 볼드체"/>
-                <a:cs typeface="Apple SD 산돌고딕 Neo 볼드체"/>
-                <a:sym typeface="Apple SD 산돌고딕 Neo 볼드체"/>
-              </a:defRPr>
-            </a:lvl1pPr>
-          </a:lstStyle>
-          <a:p>
-            <a:r>
-              <a:t>→</a:t>
-            </a:r>
-          </a:p>
-        </p:txBody>
-      </p:sp>
-      <p:sp>
-        <p:nvSpPr>
-          <p:cNvPr id="272" name="→"/>
-          <p:cNvSpPr txBox="1"/>
-          <p:nvPr/>
-        </p:nvSpPr>
-        <p:spPr>
-          <a:xfrm>
-            <a:off x="18351500" y="4127500"/>
-            <a:ext cx="889000" cy="673100"/>
-          </a:xfrm>
-          <a:prstGeom prst="rect">
-            <a:avLst/>
-          </a:prstGeom>
-          <a:ln w="12700">
-            <a:miter lim="400000"/>
-          </a:ln>
-          <a:extLst>
-            <a:ext uri="{C572A759-6A51-4108-AA02-DFA0A04FC94B}">
-              <ma14:wrappingTextBoxFlag xmlns:ma14="http://schemas.microsoft.com/office/mac/drawingml/2011/main" xmlns:a14="http://schemas.microsoft.com/office/drawing/2010/main" xmlns:m="http://schemas.openxmlformats.org/officeDocument/2006/math" xmlns="" val="1"/>
-            </a:ext>
-          </a:extLst>
-        </p:spPr>
-        <p:txBody>
-          <a:bodyPr lIns="50800" tIns="50800" rIns="50800" bIns="50800" anchor="ctr">
-            <a:spAutoFit/>
-          </a:bodyPr>
-          <a:lstStyle>
-            <a:lvl1pPr>
-              <a:defRPr sz="3800">
-                <a:solidFill>
-                  <a:srgbClr val="BEC9D4"/>
-                </a:solidFill>
-                <a:latin typeface="Apple SD 산돌고딕 Neo 볼드체"/>
-                <a:ea typeface="Apple SD 산돌고딕 Neo 볼드체"/>
-                <a:cs typeface="Apple SD 산돌고딕 Neo 볼드체"/>
-                <a:sym typeface="Apple SD 산돌고딕 Neo 볼드체"/>
-              </a:defRPr>
-            </a:lvl1pPr>
-          </a:lstStyle>
-          <a:p>
-            <a:r>
-              <a:t>→</a:t>
-            </a:r>
-          </a:p>
-        </p:txBody>
-      </p:sp>
-      <p:sp>
-        <p:nvSpPr>
-          <p:cNvPr id="273" name="선"/>
-          <p:cNvSpPr/>
-          <p:nvPr/>
-        </p:nvSpPr>
-        <p:spPr>
-          <a:xfrm>
-            <a:off x="8381999" y="5651500"/>
-            <a:ext cx="1" cy="952500"/>
-          </a:xfrm>
-          <a:prstGeom prst="line">
-            <a:avLst/>
-          </a:prstGeom>
-          <a:ln w="25400">
-            <a:solidFill>
-              <a:srgbClr val="FFFFFF"/>
-            </a:solidFill>
             <a:miter lim="400000"/>
           </a:ln>
         </p:spPr>
@@ -26874,306 +26854,37 @@
           <a:bodyPr lIns="50800" tIns="50800" rIns="50800" bIns="50800" anchor="ctr"/>
           <a:lstStyle/>
           <a:p>
+            <a:pPr algn="ctr" defTabSz="825500">
+              <a:lnSpc>
+                <a:spcPct val="100000"/>
+              </a:lnSpc>
+              <a:spcBef>
+                <a:spcPts val="0"/>
+              </a:spcBef>
+              <a:defRPr sz="3200">
+                <a:solidFill>
+                  <a:srgbClr val="000000"/>
+                </a:solidFill>
+                <a:latin typeface="Helvetica Neue Medium"/>
+                <a:ea typeface="Helvetica Neue Medium"/>
+                <a:cs typeface="Helvetica Neue Medium"/>
+                <a:sym typeface="Helvetica Neue Medium"/>
+              </a:defRPr>
+            </a:pPr>
             <a:endParaRPr/>
           </a:p>
         </p:txBody>
       </p:sp>
       <p:sp>
         <p:nvSpPr>
-          <p:cNvPr id="274" name="선"/>
-          <p:cNvSpPr/>
-          <p:nvPr/>
-        </p:nvSpPr>
-        <p:spPr>
-          <a:xfrm>
-            <a:off x="8381999" y="6604000"/>
-            <a:ext cx="2603501" cy="0"/>
-          </a:xfrm>
-          <a:prstGeom prst="line">
-            <a:avLst/>
-          </a:prstGeom>
-          <a:ln w="25400">
-            <a:solidFill>
-              <a:srgbClr val="FFFFFF"/>
-            </a:solidFill>
-            <a:miter lim="400000"/>
-          </a:ln>
-        </p:spPr>
-        <p:txBody>
-          <a:bodyPr lIns="50800" tIns="50800" rIns="50800" bIns="50800" anchor="ctr"/>
-          <a:lstStyle/>
-          <a:p>
-            <a:endParaRPr/>
-          </a:p>
-        </p:txBody>
-      </p:sp>
-      <p:sp>
-        <p:nvSpPr>
-          <p:cNvPr id="275" name="선"/>
-          <p:cNvSpPr/>
-          <p:nvPr/>
-        </p:nvSpPr>
-        <p:spPr>
-          <a:xfrm>
-            <a:off x="10985499" y="6604000"/>
-            <a:ext cx="1" cy="1143001"/>
-          </a:xfrm>
-          <a:prstGeom prst="line">
-            <a:avLst/>
-          </a:prstGeom>
-          <a:ln w="25400">
-            <a:solidFill>
-              <a:srgbClr val="FFFFFF"/>
-            </a:solidFill>
-            <a:miter lim="400000"/>
-          </a:ln>
-        </p:spPr>
-        <p:txBody>
-          <a:bodyPr lIns="50800" tIns="50800" rIns="50800" bIns="50800" anchor="ctr"/>
-          <a:lstStyle/>
-          <a:p>
-            <a:endParaRPr/>
-          </a:p>
-        </p:txBody>
-      </p:sp>
-      <p:sp>
-        <p:nvSpPr>
-          <p:cNvPr id="276" name="plan ↔ proof"/>
+          <p:cNvPr id="273" name="x/privacy verifier"/>
           <p:cNvSpPr txBox="1"/>
           <p:nvPr/>
         </p:nvSpPr>
         <p:spPr>
           <a:xfrm>
-            <a:off x="8636000" y="6032500"/>
-            <a:ext cx="2413000" cy="393700"/>
-          </a:xfrm>
-          <a:prstGeom prst="rect">
-            <a:avLst/>
-          </a:prstGeom>
-          <a:ln w="12700">
-            <a:miter lim="400000"/>
-          </a:ln>
-          <a:extLst>
-            <a:ext uri="{C572A759-6A51-4108-AA02-DFA0A04FC94B}">
-              <ma14:wrappingTextBoxFlag xmlns:ma14="http://schemas.microsoft.com/office/mac/drawingml/2011/main" xmlns:a14="http://schemas.microsoft.com/office/drawing/2010/main" xmlns:m="http://schemas.openxmlformats.org/officeDocument/2006/math" xmlns="" val="1"/>
-            </a:ext>
-          </a:extLst>
-        </p:spPr>
-        <p:txBody>
-          <a:bodyPr lIns="50800" tIns="50800" rIns="50800" bIns="50800" anchor="ctr">
-            <a:spAutoFit/>
-          </a:bodyPr>
-          <a:lstStyle>
-            <a:lvl1pPr>
-              <a:defRPr sz="1900">
-                <a:solidFill>
-                  <a:srgbClr val="BEC9D4"/>
-                </a:solidFill>
-                <a:latin typeface="Apple SD 산돌고딕 Neo 일반체"/>
-                <a:ea typeface="Apple SD 산돌고딕 Neo 일반체"/>
-                <a:cs typeface="Apple SD 산돌고딕 Neo 일반체"/>
-                <a:sym typeface="Apple SD 산돌고딕 Neo 일반체"/>
-              </a:defRPr>
-            </a:lvl1pPr>
-          </a:lstStyle>
-          <a:p>
-            <a:r>
-              <a:t>plan ↔ proof</a:t>
-            </a:r>
-          </a:p>
-        </p:txBody>
-      </p:sp>
-      <p:sp>
-        <p:nvSpPr>
-          <p:cNvPr id="277" name="선"/>
-          <p:cNvSpPr/>
-          <p:nvPr/>
-        </p:nvSpPr>
-        <p:spPr>
-          <a:xfrm>
-            <a:off x="21018499" y="5651499"/>
-            <a:ext cx="2" cy="1397002"/>
-          </a:xfrm>
-          <a:prstGeom prst="line">
-            <a:avLst/>
-          </a:prstGeom>
-          <a:ln w="25400">
-            <a:solidFill>
-              <a:srgbClr val="FFFFFF"/>
-            </a:solidFill>
-            <a:miter lim="400000"/>
-          </a:ln>
-        </p:spPr>
-        <p:txBody>
-          <a:bodyPr lIns="50800" tIns="50800" rIns="50800" bIns="50800" anchor="ctr"/>
-          <a:lstStyle/>
-          <a:p>
-            <a:endParaRPr/>
-          </a:p>
-        </p:txBody>
-      </p:sp>
-      <p:sp>
-        <p:nvSpPr>
-          <p:cNvPr id="278" name="선"/>
-          <p:cNvSpPr/>
-          <p:nvPr/>
-        </p:nvSpPr>
-        <p:spPr>
-          <a:xfrm flipH="1" flipV="1">
-            <a:off x="5334001" y="7048499"/>
-            <a:ext cx="15684499" cy="1"/>
-          </a:xfrm>
-          <a:prstGeom prst="line">
-            <a:avLst/>
-          </a:prstGeom>
-          <a:ln w="25400">
-            <a:solidFill>
-              <a:srgbClr val="FFFFFF"/>
-            </a:solidFill>
-            <a:miter lim="400000"/>
-          </a:ln>
-        </p:spPr>
-        <p:txBody>
-          <a:bodyPr lIns="50800" tIns="50800" rIns="50800" bIns="50800" anchor="ctr"/>
-          <a:lstStyle/>
-          <a:p>
-            <a:endParaRPr/>
-          </a:p>
-        </p:txBody>
-      </p:sp>
-      <p:sp>
-        <p:nvSpPr>
-          <p:cNvPr id="279" name="선"/>
-          <p:cNvSpPr/>
-          <p:nvPr/>
-        </p:nvSpPr>
-        <p:spPr>
-          <a:xfrm>
-            <a:off x="5333999" y="7048500"/>
-            <a:ext cx="1" cy="698500"/>
-          </a:xfrm>
-          <a:prstGeom prst="line">
-            <a:avLst/>
-          </a:prstGeom>
-          <a:ln w="25400">
-            <a:solidFill>
-              <a:srgbClr val="FFFFFF"/>
-            </a:solidFill>
-            <a:miter lim="400000"/>
-          </a:ln>
-        </p:spPr>
-        <p:txBody>
-          <a:bodyPr lIns="50800" tIns="50800" rIns="50800" bIns="50800" anchor="ctr"/>
-          <a:lstStyle/>
-          <a:p>
-            <a:endParaRPr/>
-          </a:p>
-        </p:txBody>
-      </p:sp>
-      <p:sp>
-        <p:nvSpPr>
-          <p:cNvPr id="280" name="← RPC events · commitments · disclosure"/>
-          <p:cNvSpPr txBox="1"/>
-          <p:nvPr/>
-        </p:nvSpPr>
-        <p:spPr>
-          <a:xfrm>
-            <a:off x="10287000" y="6731000"/>
-            <a:ext cx="5969000" cy="393700"/>
-          </a:xfrm>
-          <a:prstGeom prst="rect">
-            <a:avLst/>
-          </a:prstGeom>
-          <a:ln w="12700">
-            <a:miter lim="400000"/>
-          </a:ln>
-          <a:extLst>
-            <a:ext uri="{C572A759-6A51-4108-AA02-DFA0A04FC94B}">
-              <ma14:wrappingTextBoxFlag xmlns:ma14="http://schemas.microsoft.com/office/mac/drawingml/2011/main" xmlns:a14="http://schemas.microsoft.com/office/drawing/2010/main" xmlns:m="http://schemas.openxmlformats.org/officeDocument/2006/math" xmlns="" val="1"/>
-            </a:ext>
-          </a:extLst>
-        </p:spPr>
-        <p:txBody>
-          <a:bodyPr lIns="50800" tIns="50800" rIns="50800" bIns="50800" anchor="ctr">
-            <a:spAutoFit/>
-          </a:bodyPr>
-          <a:lstStyle>
-            <a:lvl1pPr>
-              <a:defRPr sz="1900">
-                <a:solidFill>
-                  <a:srgbClr val="BEC9D4"/>
-                </a:solidFill>
-                <a:latin typeface="Apple SD 산돌고딕 Neo 일반체"/>
-                <a:ea typeface="Apple SD 산돌고딕 Neo 일반체"/>
-                <a:cs typeface="Apple SD 산돌고딕 Neo 일반체"/>
-                <a:sym typeface="Apple SD 산돌고딕 Neo 일반체"/>
-              </a:defRPr>
-            </a:lvl1pPr>
-          </a:lstStyle>
-          <a:p>
-            <a:r>
-              <a:t>← RPC events · commitments · disclosure</a:t>
-            </a:r>
-          </a:p>
-        </p:txBody>
-      </p:sp>
-      <p:sp>
-        <p:nvSpPr>
-          <p:cNvPr id="281" name="↑ msg.value"/>
-          <p:cNvSpPr txBox="1"/>
-          <p:nvPr/>
-        </p:nvSpPr>
-        <p:spPr>
-          <a:xfrm>
-            <a:off x="17526000" y="6921500"/>
-            <a:ext cx="2413000" cy="393700"/>
-          </a:xfrm>
-          <a:prstGeom prst="rect">
-            <a:avLst/>
-          </a:prstGeom>
-          <a:ln w="12700">
-            <a:miter lim="400000"/>
-          </a:ln>
-          <a:extLst>
-            <a:ext uri="{C572A759-6A51-4108-AA02-DFA0A04FC94B}">
-              <ma14:wrappingTextBoxFlag xmlns:ma14="http://schemas.microsoft.com/office/mac/drawingml/2011/main" xmlns:a14="http://schemas.microsoft.com/office/drawing/2010/main" xmlns:m="http://schemas.openxmlformats.org/officeDocument/2006/math" xmlns="" val="1"/>
-            </a:ext>
-          </a:extLst>
-        </p:spPr>
-        <p:txBody>
-          <a:bodyPr lIns="50800" tIns="50800" rIns="50800" bIns="50800" anchor="ctr">
-            <a:spAutoFit/>
-          </a:bodyPr>
-          <a:lstStyle>
-            <a:lvl1pPr>
-              <a:defRPr sz="1900">
-                <a:solidFill>
-                  <a:srgbClr val="BEC9D4"/>
-                </a:solidFill>
-                <a:latin typeface="Apple SD 산돌고딕 Neo 일반체"/>
-                <a:ea typeface="Apple SD 산돌고딕 Neo 일반체"/>
-                <a:cs typeface="Apple SD 산돌고딕 Neo 일반체"/>
-                <a:sym typeface="Apple SD 산돌고딕 Neo 일반체"/>
-              </a:defRPr>
-            </a:lvl1pPr>
-          </a:lstStyle>
-          <a:p>
-            <a:r>
-              <a:t>↑ msg.value</a:t>
-            </a:r>
-          </a:p>
-        </p:txBody>
-      </p:sp>
-      <p:sp>
-        <p:nvSpPr>
-          <p:cNvPr id="282" name="PCL은 구성된 정책을 검사한다 · payroll intent는 app/prover/auditor가 결속한다"/>
-          <p:cNvSpPr txBox="1"/>
-          <p:nvPr/>
-        </p:nvSpPr>
-        <p:spPr>
-          <a:xfrm>
-            <a:off x="3619500" y="11811000"/>
-            <a:ext cx="17399001" cy="508000"/>
+            <a:off x="19227800" y="4699000"/>
+            <a:ext cx="3009900" cy="508000"/>
           </a:xfrm>
           <a:prstGeom prst="rect">
             <a:avLst/>
@@ -27206,7 +26917,749 @@
           </a:lstStyle>
           <a:p>
             <a:r>
-              <a:t>PCL은 구성된 정책을 검사한다 · payroll intent는 app/prover/auditor가 결속한다</a:t>
+              <a:t>x/privacy verifier</a:t>
+            </a:r>
+          </a:p>
+        </p:txBody>
+      </p:sp>
+      <p:sp>
+        <p:nvSpPr>
+          <p:cNvPr id="274" name="VK로 proof 검증"/>
+          <p:cNvSpPr txBox="1"/>
+          <p:nvPr/>
+        </p:nvSpPr>
+        <p:spPr>
+          <a:xfrm>
+            <a:off x="19227800" y="5397500"/>
+            <a:ext cx="3009900" cy="368300"/>
+          </a:xfrm>
+          <a:prstGeom prst="rect">
+            <a:avLst/>
+          </a:prstGeom>
+          <a:ln w="12700">
+            <a:miter lim="400000"/>
+          </a:ln>
+          <a:extLst>
+            <a:ext uri="{C572A759-6A51-4108-AA02-DFA0A04FC94B}">
+              <ma14:wrappingTextBoxFlag xmlns:ma14="http://schemas.microsoft.com/office/mac/drawingml/2011/main" xmlns:a14="http://schemas.microsoft.com/office/drawing/2010/main" xmlns:m="http://schemas.openxmlformats.org/officeDocument/2006/math" xmlns="" val="1"/>
+            </a:ext>
+          </a:extLst>
+        </p:spPr>
+        <p:txBody>
+          <a:bodyPr lIns="50800" tIns="50800" rIns="50800" bIns="50800" anchor="ctr">
+            <a:spAutoFit/>
+          </a:bodyPr>
+          <a:lstStyle>
+            <a:lvl1pPr>
+              <a:defRPr sz="1800">
+                <a:latin typeface="Apple SD 산돌고딕 Neo 일반체"/>
+                <a:ea typeface="Apple SD 산돌고딕 Neo 일반체"/>
+                <a:cs typeface="Apple SD 산돌고딕 Neo 일반체"/>
+                <a:sym typeface="Apple SD 산돌고딕 Neo 일반체"/>
+              </a:defRPr>
+            </a:lvl1pPr>
+          </a:lstStyle>
+          <a:p>
+            <a:r>
+              <a:t>VK로 proof 검증</a:t>
+            </a:r>
+          </a:p>
+        </p:txBody>
+      </p:sp>
+      <p:sp>
+        <p:nvSpPr>
+          <p:cNvPr id="275" name="가치 보존 판정"/>
+          <p:cNvSpPr txBox="1"/>
+          <p:nvPr/>
+        </p:nvSpPr>
+        <p:spPr>
+          <a:xfrm>
+            <a:off x="19227800" y="5905500"/>
+            <a:ext cx="3009900" cy="368300"/>
+          </a:xfrm>
+          <a:prstGeom prst="rect">
+            <a:avLst/>
+          </a:prstGeom>
+          <a:ln w="12700">
+            <a:miter lim="400000"/>
+          </a:ln>
+          <a:extLst>
+            <a:ext uri="{C572A759-6A51-4108-AA02-DFA0A04FC94B}">
+              <ma14:wrappingTextBoxFlag xmlns:ma14="http://schemas.microsoft.com/office/mac/drawingml/2011/main" xmlns:a14="http://schemas.microsoft.com/office/drawing/2010/main" xmlns:m="http://schemas.openxmlformats.org/officeDocument/2006/math" xmlns="" val="1"/>
+            </a:ext>
+          </a:extLst>
+        </p:spPr>
+        <p:txBody>
+          <a:bodyPr lIns="50800" tIns="50800" rIns="50800" bIns="50800" anchor="ctr">
+            <a:spAutoFit/>
+          </a:bodyPr>
+          <a:lstStyle>
+            <a:lvl1pPr>
+              <a:defRPr sz="1800">
+                <a:latin typeface="Apple SD 산돌고딕 Neo 일반체"/>
+                <a:ea typeface="Apple SD 산돌고딕 Neo 일반체"/>
+                <a:cs typeface="Apple SD 산돌고딕 Neo 일반체"/>
+                <a:sym typeface="Apple SD 산돌고딕 Neo 일반체"/>
+              </a:defRPr>
+            </a:lvl1pPr>
+          </a:lstStyle>
+          <a:p>
+            <a:r>
+              <a:t>가치 보존 판정</a:t>
+            </a:r>
+          </a:p>
+        </p:txBody>
+      </p:sp>
+      <p:sp>
+        <p:nvSpPr>
+          <p:cNvPr id="276" name="pre →"/>
+          <p:cNvSpPr txBox="1"/>
+          <p:nvPr/>
+        </p:nvSpPr>
+        <p:spPr>
+          <a:xfrm>
+            <a:off x="18224500" y="4762500"/>
+            <a:ext cx="762000" cy="355600"/>
+          </a:xfrm>
+          <a:prstGeom prst="rect">
+            <a:avLst/>
+          </a:prstGeom>
+          <a:ln w="12700">
+            <a:miter lim="400000"/>
+          </a:ln>
+          <a:extLst>
+            <a:ext uri="{C572A759-6A51-4108-AA02-DFA0A04FC94B}">
+              <ma14:wrappingTextBoxFlag xmlns:ma14="http://schemas.microsoft.com/office/mac/drawingml/2011/main" xmlns:a14="http://schemas.microsoft.com/office/drawing/2010/main" xmlns:m="http://schemas.openxmlformats.org/officeDocument/2006/math" xmlns="" val="1"/>
+            </a:ext>
+          </a:extLst>
+        </p:spPr>
+        <p:txBody>
+          <a:bodyPr lIns="50800" tIns="50800" rIns="50800" bIns="50800" anchor="ctr">
+            <a:spAutoFit/>
+          </a:bodyPr>
+          <a:lstStyle>
+            <a:lvl1pPr>
+              <a:defRPr sz="1700">
+                <a:solidFill>
+                  <a:srgbClr val="BEC9D4"/>
+                </a:solidFill>
+                <a:latin typeface="Apple SD 산돌고딕 Neo 일반체"/>
+                <a:ea typeface="Apple SD 산돌고딕 Neo 일반체"/>
+                <a:cs typeface="Apple SD 산돌고딕 Neo 일반체"/>
+                <a:sym typeface="Apple SD 산돌고딕 Neo 일반체"/>
+              </a:defRPr>
+            </a:lvl1pPr>
+          </a:lstStyle>
+          <a:p>
+            <a:r>
+              <a:t>pre →</a:t>
+            </a:r>
+          </a:p>
+        </p:txBody>
+      </p:sp>
+      <p:sp>
+        <p:nvSpPr>
+          <p:cNvPr id="277" name="← post"/>
+          <p:cNvSpPr txBox="1"/>
+          <p:nvPr/>
+        </p:nvSpPr>
+        <p:spPr>
+          <a:xfrm>
+            <a:off x="18224500" y="5651500"/>
+            <a:ext cx="889000" cy="355600"/>
+          </a:xfrm>
+          <a:prstGeom prst="rect">
+            <a:avLst/>
+          </a:prstGeom>
+          <a:ln w="12700">
+            <a:miter lim="400000"/>
+          </a:ln>
+          <a:extLst>
+            <a:ext uri="{C572A759-6A51-4108-AA02-DFA0A04FC94B}">
+              <ma14:wrappingTextBoxFlag xmlns:ma14="http://schemas.microsoft.com/office/mac/drawingml/2011/main" xmlns:a14="http://schemas.microsoft.com/office/drawing/2010/main" xmlns:m="http://schemas.openxmlformats.org/officeDocument/2006/math" xmlns="" val="1"/>
+            </a:ext>
+          </a:extLst>
+        </p:spPr>
+        <p:txBody>
+          <a:bodyPr lIns="50800" tIns="50800" rIns="50800" bIns="50800" anchor="ctr">
+            <a:spAutoFit/>
+          </a:bodyPr>
+          <a:lstStyle>
+            <a:lvl1pPr>
+              <a:defRPr sz="1700">
+                <a:solidFill>
+                  <a:srgbClr val="BEC9D4"/>
+                </a:solidFill>
+                <a:latin typeface="Apple SD 산돌고딕 Neo 일반체"/>
+                <a:ea typeface="Apple SD 산돌고딕 Neo 일반체"/>
+                <a:cs typeface="Apple SD 산돌고딕 Neo 일반체"/>
+                <a:sym typeface="Apple SD 산돌고딕 Neo 일반체"/>
+              </a:defRPr>
+            </a:lvl1pPr>
+          </a:lstStyle>
+          <a:p>
+            <a:r>
+              <a:t>← post</a:t>
+            </a:r>
+          </a:p>
+        </p:txBody>
+      </p:sp>
+      <p:sp>
+        <p:nvSpPr>
+          <p:cNvPr id="278" name="직사각형"/>
+          <p:cNvSpPr/>
+          <p:nvPr/>
+        </p:nvSpPr>
+        <p:spPr>
+          <a:xfrm>
+            <a:off x="16319500" y="7429500"/>
+            <a:ext cx="4572001" cy="1841500"/>
+          </a:xfrm>
+          <a:prstGeom prst="rect">
+            <a:avLst/>
+          </a:prstGeom>
+          <a:solidFill>
+            <a:srgbClr val="FFFFFF">
+              <a:alpha val="14000"/>
+            </a:srgbClr>
+          </a:solidFill>
+          <a:ln w="12700">
+            <a:miter lim="400000"/>
+          </a:ln>
+        </p:spPr>
+        <p:txBody>
+          <a:bodyPr lIns="50800" tIns="50800" rIns="50800" bIns="50800" anchor="ctr"/>
+          <a:lstStyle/>
+          <a:p>
+            <a:pPr algn="ctr" defTabSz="825500">
+              <a:lnSpc>
+                <a:spcPct val="100000"/>
+              </a:lnSpc>
+              <a:spcBef>
+                <a:spcPts val="0"/>
+              </a:spcBef>
+              <a:defRPr sz="3200">
+                <a:solidFill>
+                  <a:srgbClr val="000000"/>
+                </a:solidFill>
+                <a:latin typeface="Helvetica Neue Medium"/>
+                <a:ea typeface="Helvetica Neue Medium"/>
+                <a:cs typeface="Helvetica Neue Medium"/>
+                <a:sym typeface="Helvetica Neue Medium"/>
+              </a:defRPr>
+            </a:pPr>
+            <a:endParaRPr/>
+          </a:p>
+        </p:txBody>
+      </p:sp>
+      <p:sp>
+        <p:nvSpPr>
+          <p:cNvPr id="279" name="On-chain state"/>
+          <p:cNvSpPr txBox="1"/>
+          <p:nvPr/>
+        </p:nvSpPr>
+        <p:spPr>
+          <a:xfrm>
+            <a:off x="16624300" y="7747000"/>
+            <a:ext cx="3962400" cy="508000"/>
+          </a:xfrm>
+          <a:prstGeom prst="rect">
+            <a:avLst/>
+          </a:prstGeom>
+          <a:ln w="12700">
+            <a:miter lim="400000"/>
+          </a:ln>
+          <a:extLst>
+            <a:ext uri="{C572A759-6A51-4108-AA02-DFA0A04FC94B}">
+              <ma14:wrappingTextBoxFlag xmlns:ma14="http://schemas.microsoft.com/office/mac/drawingml/2011/main" xmlns:a14="http://schemas.microsoft.com/office/drawing/2010/main" xmlns:m="http://schemas.openxmlformats.org/officeDocument/2006/math" xmlns="" val="1"/>
+            </a:ext>
+          </a:extLst>
+        </p:spPr>
+        <p:txBody>
+          <a:bodyPr lIns="50800" tIns="50800" rIns="50800" bIns="50800" anchor="ctr">
+            <a:spAutoFit/>
+          </a:bodyPr>
+          <a:lstStyle>
+            <a:lvl1pPr>
+              <a:defRPr sz="2700">
+                <a:solidFill>
+                  <a:srgbClr val="FFBF2C"/>
+                </a:solidFill>
+                <a:latin typeface="Apple SD 산돌고딕 Neo 볼드체"/>
+                <a:ea typeface="Apple SD 산돌고딕 Neo 볼드체"/>
+                <a:cs typeface="Apple SD 산돌고딕 Neo 볼드체"/>
+                <a:sym typeface="Apple SD 산돌고딕 Neo 볼드체"/>
+              </a:defRPr>
+            </a:lvl1pPr>
+          </a:lstStyle>
+          <a:p>
+            <a:r>
+              <a:t>On-chain state</a:t>
+            </a:r>
+          </a:p>
+        </p:txBody>
+      </p:sp>
+      <p:sp>
+        <p:nvSpPr>
+          <p:cNvPr id="280" name="OKRW escrow · Merkle root"/>
+          <p:cNvSpPr txBox="1"/>
+          <p:nvPr/>
+        </p:nvSpPr>
+        <p:spPr>
+          <a:xfrm>
+            <a:off x="16624300" y="8445500"/>
+            <a:ext cx="3962400" cy="368300"/>
+          </a:xfrm>
+          <a:prstGeom prst="rect">
+            <a:avLst/>
+          </a:prstGeom>
+          <a:ln w="12700">
+            <a:miter lim="400000"/>
+          </a:ln>
+          <a:extLst>
+            <a:ext uri="{C572A759-6A51-4108-AA02-DFA0A04FC94B}">
+              <ma14:wrappingTextBoxFlag xmlns:ma14="http://schemas.microsoft.com/office/mac/drawingml/2011/main" xmlns:a14="http://schemas.microsoft.com/office/drawing/2010/main" xmlns:m="http://schemas.openxmlformats.org/officeDocument/2006/math" xmlns="" val="1"/>
+            </a:ext>
+          </a:extLst>
+        </p:spPr>
+        <p:txBody>
+          <a:bodyPr lIns="50800" tIns="50800" rIns="50800" bIns="50800" anchor="ctr">
+            <a:spAutoFit/>
+          </a:bodyPr>
+          <a:lstStyle>
+            <a:lvl1pPr>
+              <a:defRPr sz="1800">
+                <a:latin typeface="Apple SD 산돌고딕 Neo 일반체"/>
+                <a:ea typeface="Apple SD 산돌고딕 Neo 일반체"/>
+                <a:cs typeface="Apple SD 산돌고딕 Neo 일반체"/>
+                <a:sym typeface="Apple SD 산돌고딕 Neo 일반체"/>
+              </a:defRPr>
+            </a:lvl1pPr>
+          </a:lstStyle>
+          <a:p>
+            <a:r>
+              <a:t>OKRW escrow · Merkle root</a:t>
+            </a:r>
+          </a:p>
+        </p:txBody>
+      </p:sp>
+      <p:sp>
+        <p:nvSpPr>
+          <p:cNvPr id="281" name="nullifiers · commitments"/>
+          <p:cNvSpPr txBox="1"/>
+          <p:nvPr/>
+        </p:nvSpPr>
+        <p:spPr>
+          <a:xfrm>
+            <a:off x="16624300" y="8953500"/>
+            <a:ext cx="3962400" cy="368300"/>
+          </a:xfrm>
+          <a:prstGeom prst="rect">
+            <a:avLst/>
+          </a:prstGeom>
+          <a:ln w="12700">
+            <a:miter lim="400000"/>
+          </a:ln>
+          <a:extLst>
+            <a:ext uri="{C572A759-6A51-4108-AA02-DFA0A04FC94B}">
+              <ma14:wrappingTextBoxFlag xmlns:ma14="http://schemas.microsoft.com/office/mac/drawingml/2011/main" xmlns:a14="http://schemas.microsoft.com/office/drawing/2010/main" xmlns:m="http://schemas.openxmlformats.org/officeDocument/2006/math" xmlns="" val="1"/>
+            </a:ext>
+          </a:extLst>
+        </p:spPr>
+        <p:txBody>
+          <a:bodyPr lIns="50800" tIns="50800" rIns="50800" bIns="50800" anchor="ctr">
+            <a:spAutoFit/>
+          </a:bodyPr>
+          <a:lstStyle>
+            <a:lvl1pPr>
+              <a:defRPr sz="1800">
+                <a:latin typeface="Apple SD 산돌고딕 Neo 일반체"/>
+                <a:ea typeface="Apple SD 산돌고딕 Neo 일반체"/>
+                <a:cs typeface="Apple SD 산돌고딕 Neo 일반체"/>
+                <a:sym typeface="Apple SD 산돌고딕 Neo 일반체"/>
+              </a:defRPr>
+            </a:lvl1pPr>
+          </a:lstStyle>
+          <a:p>
+            <a:r>
+              <a:t>nullifiers · commitments</a:t>
+            </a:r>
+          </a:p>
+        </p:txBody>
+      </p:sp>
+      <p:sp>
+        <p:nvSpPr>
+          <p:cNvPr id="282" name="↓"/>
+          <p:cNvSpPr txBox="1"/>
+          <p:nvPr/>
+        </p:nvSpPr>
+        <p:spPr>
+          <a:xfrm>
+            <a:off x="20447000" y="6540500"/>
+            <a:ext cx="698500" cy="622300"/>
+          </a:xfrm>
+          <a:prstGeom prst="rect">
+            <a:avLst/>
+          </a:prstGeom>
+          <a:ln w="12700">
+            <a:miter lim="400000"/>
+          </a:ln>
+          <a:extLst>
+            <a:ext uri="{C572A759-6A51-4108-AA02-DFA0A04FC94B}">
+              <ma14:wrappingTextBoxFlag xmlns:ma14="http://schemas.microsoft.com/office/mac/drawingml/2011/main" xmlns:a14="http://schemas.microsoft.com/office/drawing/2010/main" xmlns:m="http://schemas.openxmlformats.org/officeDocument/2006/math" xmlns="" val="1"/>
+            </a:ext>
+          </a:extLst>
+        </p:spPr>
+        <p:txBody>
+          <a:bodyPr lIns="50800" tIns="50800" rIns="50800" bIns="50800" anchor="ctr">
+            <a:spAutoFit/>
+          </a:bodyPr>
+          <a:lstStyle>
+            <a:lvl1pPr>
+              <a:defRPr sz="3400">
+                <a:solidFill>
+                  <a:srgbClr val="BEC9D4"/>
+                </a:solidFill>
+                <a:latin typeface="Apple SD 산돌고딕 Neo 볼드체"/>
+                <a:ea typeface="Apple SD 산돌고딕 Neo 볼드체"/>
+                <a:cs typeface="Apple SD 산돌고딕 Neo 볼드체"/>
+                <a:sym typeface="Apple SD 산돌고딕 Neo 볼드체"/>
+              </a:defRPr>
+            </a:lvl1pPr>
+          </a:lstStyle>
+          <a:p>
+            <a:r>
+              <a:t>↓</a:t>
+            </a:r>
+          </a:p>
+        </p:txBody>
+      </p:sp>
+      <p:sp>
+        <p:nvSpPr>
+          <p:cNvPr id="283" name="signed tx + proof + deposit msg.value →"/>
+          <p:cNvSpPr txBox="1"/>
+          <p:nvPr/>
+        </p:nvSpPr>
+        <p:spPr>
+          <a:xfrm>
+            <a:off x="10033000" y="2921000"/>
+            <a:ext cx="4445000" cy="368300"/>
+          </a:xfrm>
+          <a:prstGeom prst="rect">
+            <a:avLst/>
+          </a:prstGeom>
+          <a:ln w="12700">
+            <a:miter lim="400000"/>
+          </a:ln>
+          <a:extLst>
+            <a:ext uri="{C572A759-6A51-4108-AA02-DFA0A04FC94B}">
+              <ma14:wrappingTextBoxFlag xmlns:ma14="http://schemas.microsoft.com/office/mac/drawingml/2011/main" xmlns:a14="http://schemas.microsoft.com/office/drawing/2010/main" xmlns:m="http://schemas.openxmlformats.org/officeDocument/2006/math" xmlns="" val="1"/>
+            </a:ext>
+          </a:extLst>
+        </p:spPr>
+        <p:txBody>
+          <a:bodyPr lIns="50800" tIns="50800" rIns="50800" bIns="50800" anchor="ctr">
+            <a:spAutoFit/>
+          </a:bodyPr>
+          <a:lstStyle>
+            <a:lvl1pPr>
+              <a:defRPr sz="1800">
+                <a:latin typeface="Apple SD 산돌고딕 Neo 일반체"/>
+                <a:ea typeface="Apple SD 산돌고딕 Neo 일반체"/>
+                <a:cs typeface="Apple SD 산돌고딕 Neo 일반체"/>
+                <a:sym typeface="Apple SD 산돌고딕 Neo 일반체"/>
+              </a:defRPr>
+            </a:lvl1pPr>
+          </a:lstStyle>
+          <a:p>
+            <a:r>
+              <a:t>signed tx + proof + deposit msg.value →</a:t>
+            </a:r>
+          </a:p>
+        </p:txBody>
+      </p:sp>
+      <p:sp>
+        <p:nvSpPr>
+          <p:cNvPr id="284" name="선"/>
+          <p:cNvSpPr/>
+          <p:nvPr/>
+        </p:nvSpPr>
+        <p:spPr>
+          <a:xfrm flipV="1">
+            <a:off x="12890500" y="4572000"/>
+            <a:ext cx="1714500" cy="1"/>
+          </a:xfrm>
+          <a:prstGeom prst="line">
+            <a:avLst/>
+          </a:prstGeom>
+          <a:ln w="25400">
+            <a:solidFill>
+              <a:srgbClr val="FFFFFF"/>
+            </a:solidFill>
+            <a:miter lim="400000"/>
+          </a:ln>
+        </p:spPr>
+        <p:txBody>
+          <a:bodyPr lIns="50800" tIns="50800" rIns="50800" bIns="50800" anchor="ctr"/>
+          <a:lstStyle/>
+          <a:p>
+            <a:endParaRPr/>
+          </a:p>
+        </p:txBody>
+      </p:sp>
+      <p:sp>
+        <p:nvSpPr>
+          <p:cNvPr id="285" name="선"/>
+          <p:cNvSpPr/>
+          <p:nvPr/>
+        </p:nvSpPr>
+        <p:spPr>
+          <a:xfrm flipH="1">
+            <a:off x="18605500" y="9271000"/>
+            <a:ext cx="1" cy="1206500"/>
+          </a:xfrm>
+          <a:prstGeom prst="line">
+            <a:avLst/>
+          </a:prstGeom>
+          <a:ln w="25400">
+            <a:solidFill>
+              <a:srgbClr val="FFFFFF"/>
+            </a:solidFill>
+            <a:miter lim="400000"/>
+          </a:ln>
+        </p:spPr>
+        <p:txBody>
+          <a:bodyPr lIns="50800" tIns="50800" rIns="50800" bIns="50800" anchor="ctr"/>
+          <a:lstStyle/>
+          <a:p>
+            <a:endParaRPr/>
+          </a:p>
+        </p:txBody>
+      </p:sp>
+      <p:sp>
+        <p:nvSpPr>
+          <p:cNvPr id="286" name="선"/>
+          <p:cNvSpPr/>
+          <p:nvPr/>
+        </p:nvSpPr>
+        <p:spPr>
+          <a:xfrm flipH="1" flipV="1">
+            <a:off x="3683001" y="10477500"/>
+            <a:ext cx="14922499" cy="1"/>
+          </a:xfrm>
+          <a:prstGeom prst="line">
+            <a:avLst/>
+          </a:prstGeom>
+          <a:ln w="25400">
+            <a:solidFill>
+              <a:srgbClr val="FFFFFF"/>
+            </a:solidFill>
+            <a:miter lim="400000"/>
+          </a:ln>
+        </p:spPr>
+        <p:txBody>
+          <a:bodyPr lIns="50800" tIns="50800" rIns="50800" bIns="50800" anchor="ctr"/>
+          <a:lstStyle/>
+          <a:p>
+            <a:endParaRPr/>
+          </a:p>
+        </p:txBody>
+      </p:sp>
+      <p:sp>
+        <p:nvSpPr>
+          <p:cNvPr id="287" name="선"/>
+          <p:cNvSpPr/>
+          <p:nvPr/>
+        </p:nvSpPr>
+        <p:spPr>
+          <a:xfrm flipH="1" flipV="1">
+            <a:off x="3683000" y="9905999"/>
+            <a:ext cx="1" cy="571501"/>
+          </a:xfrm>
+          <a:prstGeom prst="line">
+            <a:avLst/>
+          </a:prstGeom>
+          <a:ln w="25400">
+            <a:solidFill>
+              <a:srgbClr val="FFFFFF"/>
+            </a:solidFill>
+            <a:miter lim="400000"/>
+          </a:ln>
+        </p:spPr>
+        <p:txBody>
+          <a:bodyPr lIns="50800" tIns="50800" rIns="50800" bIns="50800" anchor="ctr"/>
+          <a:lstStyle/>
+          <a:p>
+            <a:endParaRPr/>
+          </a:p>
+        </p:txBody>
+      </p:sp>
+      <p:sp>
+        <p:nvSpPr>
+          <p:cNvPr id="288" name="선"/>
+          <p:cNvSpPr/>
+          <p:nvPr/>
+        </p:nvSpPr>
+        <p:spPr>
+          <a:xfrm flipH="1" flipV="1">
+            <a:off x="9334500" y="9905999"/>
+            <a:ext cx="1" cy="571502"/>
+          </a:xfrm>
+          <a:prstGeom prst="line">
+            <a:avLst/>
+          </a:prstGeom>
+          <a:ln w="25400">
+            <a:solidFill>
+              <a:srgbClr val="FFFFFF"/>
+            </a:solidFill>
+            <a:miter lim="400000"/>
+          </a:ln>
+        </p:spPr>
+        <p:txBody>
+          <a:bodyPr lIns="50800" tIns="50800" rIns="50800" bIns="50800" anchor="ctr"/>
+          <a:lstStyle/>
+          <a:p>
+            <a:endParaRPr/>
+          </a:p>
+        </p:txBody>
+      </p:sp>
+      <p:sp>
+        <p:nvSpPr>
+          <p:cNvPr id="289" name="←"/>
+          <p:cNvSpPr txBox="1"/>
+          <p:nvPr/>
+        </p:nvSpPr>
+        <p:spPr>
+          <a:xfrm>
+            <a:off x="10096500" y="10096500"/>
+            <a:ext cx="571500" cy="469900"/>
+          </a:xfrm>
+          <a:prstGeom prst="rect">
+            <a:avLst/>
+          </a:prstGeom>
+          <a:ln w="12700">
+            <a:miter lim="400000"/>
+          </a:ln>
+          <a:extLst>
+            <a:ext uri="{C572A759-6A51-4108-AA02-DFA0A04FC94B}">
+              <ma14:wrappingTextBoxFlag xmlns:ma14="http://schemas.microsoft.com/office/mac/drawingml/2011/main" xmlns:a14="http://schemas.microsoft.com/office/drawing/2010/main" xmlns:m="http://schemas.openxmlformats.org/officeDocument/2006/math" xmlns="" val="1"/>
+            </a:ext>
+          </a:extLst>
+        </p:spPr>
+        <p:txBody>
+          <a:bodyPr lIns="50800" tIns="50800" rIns="50800" bIns="50800" anchor="ctr">
+            <a:spAutoFit/>
+          </a:bodyPr>
+          <a:lstStyle>
+            <a:lvl1pPr>
+              <a:defRPr sz="2400">
+                <a:solidFill>
+                  <a:srgbClr val="BEC9D4"/>
+                </a:solidFill>
+                <a:latin typeface="Apple SD 산돌고딕 Neo 볼드체"/>
+                <a:ea typeface="Apple SD 산돌고딕 Neo 볼드체"/>
+                <a:cs typeface="Apple SD 산돌고딕 Neo 볼드체"/>
+                <a:sym typeface="Apple SD 산돌고딕 Neo 볼드체"/>
+              </a:defRPr>
+            </a:lvl1pPr>
+          </a:lstStyle>
+          <a:p>
+            <a:r>
+              <a:t>←</a:t>
+            </a:r>
+          </a:p>
+        </p:txBody>
+      </p:sp>
+      <p:sp>
+        <p:nvSpPr>
+          <p:cNvPr id="290" name="receipt · commitments · ciphertext · disclosure"/>
+          <p:cNvSpPr txBox="1"/>
+          <p:nvPr/>
+        </p:nvSpPr>
+        <p:spPr>
+          <a:xfrm>
+            <a:off x="10604500" y="10096500"/>
+            <a:ext cx="6350000" cy="368300"/>
+          </a:xfrm>
+          <a:prstGeom prst="rect">
+            <a:avLst/>
+          </a:prstGeom>
+          <a:ln w="12700">
+            <a:miter lim="400000"/>
+          </a:ln>
+          <a:extLst>
+            <a:ext uri="{C572A759-6A51-4108-AA02-DFA0A04FC94B}">
+              <ma14:wrappingTextBoxFlag xmlns:ma14="http://schemas.microsoft.com/office/mac/drawingml/2011/main" xmlns:a14="http://schemas.microsoft.com/office/drawing/2010/main" xmlns:m="http://schemas.openxmlformats.org/officeDocument/2006/math" xmlns="" val="1"/>
+            </a:ext>
+          </a:extLst>
+        </p:spPr>
+        <p:txBody>
+          <a:bodyPr lIns="50800" tIns="50800" rIns="50800" bIns="50800" anchor="ctr">
+            <a:spAutoFit/>
+          </a:bodyPr>
+          <a:lstStyle>
+            <a:lvl1pPr>
+              <a:defRPr sz="1800">
+                <a:solidFill>
+                  <a:srgbClr val="BEC9D4"/>
+                </a:solidFill>
+                <a:latin typeface="Apple SD 산돌고딕 Neo 일반체"/>
+                <a:ea typeface="Apple SD 산돌고딕 Neo 일반체"/>
+                <a:cs typeface="Apple SD 산돌고딕 Neo 일반체"/>
+                <a:sym typeface="Apple SD 산돌고딕 Neo 일반체"/>
+              </a:defRPr>
+            </a:lvl1pPr>
+          </a:lstStyle>
+          <a:p>
+            <a:r>
+              <a:t>receipt · commitments · ciphertext · disclosure</a:t>
+            </a:r>
+          </a:p>
+        </p:txBody>
+      </p:sp>
+      <p:sp>
+        <p:nvSpPr>
+          <p:cNvPr id="291" name="PCL은 정책을 평가하고 · verifier는 proof와 상태를 검증하며 · app/scanner/auditor는 급여 의도를 대사한다"/>
+          <p:cNvSpPr txBox="1"/>
+          <p:nvPr/>
+        </p:nvSpPr>
+        <p:spPr>
+          <a:xfrm>
+            <a:off x="2603500" y="11811000"/>
+            <a:ext cx="19177001" cy="469900"/>
+          </a:xfrm>
+          <a:prstGeom prst="rect">
+            <a:avLst/>
+          </a:prstGeom>
+          <a:ln w="12700">
+            <a:miter lim="400000"/>
+          </a:ln>
+          <a:extLst>
+            <a:ext uri="{C572A759-6A51-4108-AA02-DFA0A04FC94B}">
+              <ma14:wrappingTextBoxFlag xmlns:ma14="http://schemas.microsoft.com/office/mac/drawingml/2011/main" xmlns:a14="http://schemas.microsoft.com/office/drawing/2010/main" xmlns:m="http://schemas.openxmlformats.org/officeDocument/2006/math" xmlns="" val="1"/>
+            </a:ext>
+          </a:extLst>
+        </p:spPr>
+        <p:txBody>
+          <a:bodyPr lIns="50800" tIns="50800" rIns="50800" bIns="50800" anchor="ctr">
+            <a:spAutoFit/>
+          </a:bodyPr>
+          <a:lstStyle>
+            <a:lvl1pPr>
+              <a:defRPr sz="2400">
+                <a:solidFill>
+                  <a:srgbClr val="FFBF2C"/>
+                </a:solidFill>
+                <a:latin typeface="Apple SD 산돌고딕 Neo 볼드체"/>
+                <a:ea typeface="Apple SD 산돌고딕 Neo 볼드체"/>
+                <a:cs typeface="Apple SD 산돌고딕 Neo 볼드체"/>
+                <a:sym typeface="Apple SD 산돌고딕 Neo 볼드체"/>
+              </a:defRPr>
+            </a:lvl1pPr>
+          </a:lstStyle>
+          <a:p>
+            <a:r>
+              <a:t>PCL은 정책을 평가하고 · verifier는 proof와 상태를 검증하며 · app/scanner/auditor는 급여 의도를 대사한다</a:t>
             </a:r>
           </a:p>
         </p:txBody>
@@ -27239,7 +27692,7 @@
       </p:grpSpPr>
       <p:sp>
         <p:nvSpPr>
-          <p:cNvPr id="286" name="슬라이드 번호"/>
+          <p:cNvPr id="295" name="슬라이드 번호"/>
           <p:cNvSpPr txBox="1">
             <a:spLocks noGrp="1"/>
           </p:cNvSpPr>
@@ -27275,7 +27728,7 @@
       </p:sp>
       <p:sp>
         <p:nvSpPr>
-          <p:cNvPr id="287" name="급여 1회의 트랜잭션 시퀀스"/>
+          <p:cNvPr id="296" name="급여 1회의 트랜잭션 시퀀스"/>
           <p:cNvSpPr txBox="1"/>
           <p:nvPr/>
         </p:nvSpPr>
@@ -27319,14 +27772,14 @@
       </p:sp>
       <p:sp>
         <p:nvSpPr>
-          <p:cNvPr id="288" name="Wallet"/>
+          <p:cNvPr id="297" name="Payroll app"/>
           <p:cNvSpPr txBox="1"/>
           <p:nvPr/>
         </p:nvSpPr>
         <p:spPr>
           <a:xfrm>
             <a:off x="1524000" y="1968500"/>
-            <a:ext cx="2921000" cy="469900"/>
+            <a:ext cx="3111500" cy="419100"/>
           </a:xfrm>
           <a:prstGeom prst="rect">
             <a:avLst/>
@@ -27346,7 +27799,7 @@
           </a:bodyPr>
           <a:lstStyle>
             <a:lvl1pPr>
-              <a:defRPr sz="2400">
+              <a:defRPr sz="2100">
                 <a:solidFill>
                   <a:srgbClr val="00E9FF"/>
                 </a:solidFill>
@@ -27359,14 +27812,14 @@
           </a:lstStyle>
           <a:p>
             <a:r>
-              <a:t>Wallet</a:t>
-            </a:r>
-          </a:p>
-        </p:txBody>
-      </p:sp>
-      <p:sp>
-        <p:nvSpPr>
-          <p:cNvPr id="289" name="선"/>
+              <a:t>Payroll app</a:t>
+            </a:r>
+          </a:p>
+        </p:txBody>
+      </p:sp>
+      <p:sp>
+        <p:nvSpPr>
+          <p:cNvPr id="298" name="선"/>
           <p:cNvSpPr/>
           <p:nvPr/>
         </p:nvSpPr>
@@ -27395,14 +27848,14 @@
       </p:sp>
       <p:sp>
         <p:nvSpPr>
-          <p:cNvPr id="290" name="Payroll app"/>
+          <p:cNvPr id="299" name="Off-chain prover"/>
           <p:cNvSpPr txBox="1"/>
           <p:nvPr/>
         </p:nvSpPr>
         <p:spPr>
           <a:xfrm>
             <a:off x="5207000" y="1968500"/>
-            <a:ext cx="2921000" cy="469900"/>
+            <a:ext cx="3111500" cy="419100"/>
           </a:xfrm>
           <a:prstGeom prst="rect">
             <a:avLst/>
@@ -27422,7 +27875,7 @@
           </a:bodyPr>
           <a:lstStyle>
             <a:lvl1pPr>
-              <a:defRPr sz="2400">
+              <a:defRPr sz="2100">
                 <a:solidFill>
                   <a:srgbClr val="00E9FF"/>
                 </a:solidFill>
@@ -27435,14 +27888,14 @@
           </a:lstStyle>
           <a:p>
             <a:r>
-              <a:t>Payroll app</a:t>
-            </a:r>
-          </a:p>
-        </p:txBody>
-      </p:sp>
-      <p:sp>
-        <p:nvSpPr>
-          <p:cNvPr id="291" name="선"/>
+              <a:t>Off-chain prover</a:t>
+            </a:r>
+          </a:p>
+        </p:txBody>
+      </p:sp>
+      <p:sp>
+        <p:nvSpPr>
+          <p:cNvPr id="300" name="선"/>
           <p:cNvSpPr/>
           <p:nvPr/>
         </p:nvSpPr>
@@ -27471,14 +27924,14 @@
       </p:sp>
       <p:sp>
         <p:nvSpPr>
-          <p:cNvPr id="292" name="Prover"/>
+          <p:cNvPr id="301" name="Company wallet"/>
           <p:cNvSpPr txBox="1"/>
           <p:nvPr/>
         </p:nvSpPr>
         <p:spPr>
           <a:xfrm>
             <a:off x="8890000" y="1968500"/>
-            <a:ext cx="2921000" cy="469900"/>
+            <a:ext cx="3111500" cy="419100"/>
           </a:xfrm>
           <a:prstGeom prst="rect">
             <a:avLst/>
@@ -27498,7 +27951,7 @@
           </a:bodyPr>
           <a:lstStyle>
             <a:lvl1pPr>
-              <a:defRPr sz="2400">
+              <a:defRPr sz="2100">
                 <a:solidFill>
                   <a:srgbClr val="00E9FF"/>
                 </a:solidFill>
@@ -27511,14 +27964,14 @@
           </a:lstStyle>
           <a:p>
             <a:r>
-              <a:t>Prover</a:t>
-            </a:r>
-          </a:p>
-        </p:txBody>
-      </p:sp>
-      <p:sp>
-        <p:nvSpPr>
-          <p:cNvPr id="293" name="선"/>
+              <a:t>Company wallet</a:t>
+            </a:r>
+          </a:p>
+        </p:txBody>
+      </p:sp>
+      <p:sp>
+        <p:nvSpPr>
+          <p:cNvPr id="302" name="선"/>
           <p:cNvSpPr/>
           <p:nvPr/>
         </p:nvSpPr>
@@ -27547,14 +28000,14 @@
       </p:sp>
       <p:sp>
         <p:nvSpPr>
-          <p:cNvPr id="294" name="PCL"/>
+          <p:cNvPr id="303" name="Policy wrapper / PCL"/>
           <p:cNvSpPr txBox="1"/>
           <p:nvPr/>
         </p:nvSpPr>
         <p:spPr>
           <a:xfrm>
             <a:off x="12573000" y="1968500"/>
-            <a:ext cx="2921000" cy="469900"/>
+            <a:ext cx="3111500" cy="419100"/>
           </a:xfrm>
           <a:prstGeom prst="rect">
             <a:avLst/>
@@ -27574,7 +28027,7 @@
           </a:bodyPr>
           <a:lstStyle>
             <a:lvl1pPr>
-              <a:defRPr sz="2400">
+              <a:defRPr sz="2100">
                 <a:solidFill>
                   <a:srgbClr val="00E9FF"/>
                 </a:solidFill>
@@ -27587,14 +28040,14 @@
           </a:lstStyle>
           <a:p>
             <a:r>
-              <a:t>PCL</a:t>
-            </a:r>
-          </a:p>
-        </p:txBody>
-      </p:sp>
-      <p:sp>
-        <p:nvSpPr>
-          <p:cNvPr id="295" name="선"/>
+              <a:t>Policy wrapper / PCL</a:t>
+            </a:r>
+          </a:p>
+        </p:txBody>
+      </p:sp>
+      <p:sp>
+        <p:nvSpPr>
+          <p:cNvPr id="304" name="선"/>
           <p:cNvSpPr/>
           <p:nvPr/>
         </p:nvSpPr>
@@ -27623,14 +28076,14 @@
       </p:sp>
       <p:sp>
         <p:nvSpPr>
-          <p:cNvPr id="296" name="x/privacy"/>
+          <p:cNvPr id="305" name="x/privacy verifier"/>
           <p:cNvSpPr txBox="1"/>
           <p:nvPr/>
         </p:nvSpPr>
         <p:spPr>
           <a:xfrm>
             <a:off x="16256000" y="1968500"/>
-            <a:ext cx="2921000" cy="469900"/>
+            <a:ext cx="3111500" cy="419100"/>
           </a:xfrm>
           <a:prstGeom prst="rect">
             <a:avLst/>
@@ -27650,7 +28103,7 @@
           </a:bodyPr>
           <a:lstStyle>
             <a:lvl1pPr>
-              <a:defRPr sz="2400">
+              <a:defRPr sz="2100">
                 <a:solidFill>
                   <a:srgbClr val="00E9FF"/>
                 </a:solidFill>
@@ -27663,14 +28116,14 @@
           </a:lstStyle>
           <a:p>
             <a:r>
-              <a:t>x/privacy</a:t>
-            </a:r>
-          </a:p>
-        </p:txBody>
-      </p:sp>
-      <p:sp>
-        <p:nvSpPr>
-          <p:cNvPr id="297" name="선"/>
+              <a:t>x/privacy verifier</a:t>
+            </a:r>
+          </a:p>
+        </p:txBody>
+      </p:sp>
+      <p:sp>
+        <p:nvSpPr>
+          <p:cNvPr id="306" name="선"/>
           <p:cNvSpPr/>
           <p:nvPr/>
         </p:nvSpPr>
@@ -27699,14 +28152,14 @@
       </p:sp>
       <p:sp>
         <p:nvSpPr>
-          <p:cNvPr id="298" name="Scanner / auditor"/>
+          <p:cNvPr id="307" name="Scanner / auditor"/>
           <p:cNvSpPr txBox="1"/>
           <p:nvPr/>
         </p:nvSpPr>
         <p:spPr>
           <a:xfrm>
             <a:off x="19939000" y="1968500"/>
-            <a:ext cx="2921000" cy="469900"/>
+            <a:ext cx="3111500" cy="419100"/>
           </a:xfrm>
           <a:prstGeom prst="rect">
             <a:avLst/>
@@ -27726,7 +28179,7 @@
           </a:bodyPr>
           <a:lstStyle>
             <a:lvl1pPr>
-              <a:defRPr sz="2400">
+              <a:defRPr sz="2100">
                 <a:solidFill>
                   <a:srgbClr val="00E9FF"/>
                 </a:solidFill>
@@ -27746,7 +28199,7 @@
       </p:sp>
       <p:sp>
         <p:nvSpPr>
-          <p:cNvPr id="299" name="선"/>
+          <p:cNvPr id="308" name="선"/>
           <p:cNvSpPr/>
           <p:nvPr/>
         </p:nvSpPr>
@@ -27775,13 +28228,60 @@
       </p:sp>
       <p:sp>
         <p:nvSpPr>
-          <p:cNvPr id="300" name="01"/>
+          <p:cNvPr id="309" name="DEPOSIT"/>
           <p:cNvSpPr txBox="1"/>
           <p:nvPr/>
         </p:nvSpPr>
         <p:spPr>
           <a:xfrm>
-            <a:off x="1524000" y="3111500"/>
+            <a:off x="1333500" y="3111500"/>
+            <a:ext cx="2032000" cy="406400"/>
+          </a:xfrm>
+          <a:prstGeom prst="rect">
+            <a:avLst/>
+          </a:prstGeom>
+          <a:ln w="12700">
+            <a:miter lim="400000"/>
+          </a:ln>
+          <a:extLst>
+            <a:ext uri="{C572A759-6A51-4108-AA02-DFA0A04FC94B}">
+              <ma14:wrappingTextBoxFlag xmlns:ma14="http://schemas.microsoft.com/office/mac/drawingml/2011/main" xmlns:a14="http://schemas.microsoft.com/office/drawing/2010/main" xmlns:m="http://schemas.openxmlformats.org/officeDocument/2006/math" xmlns="" val="1"/>
+            </a:ext>
+          </a:extLst>
+        </p:spPr>
+        <p:txBody>
+          <a:bodyPr lIns="50800" tIns="50800" rIns="50800" bIns="50800" anchor="ctr">
+            <a:spAutoFit/>
+          </a:bodyPr>
+          <a:lstStyle>
+            <a:lvl1pPr>
+              <a:defRPr sz="2000">
+                <a:solidFill>
+                  <a:srgbClr val="BEC9D4"/>
+                </a:solidFill>
+                <a:latin typeface="Apple SD 산돌고딕 Neo 볼드체"/>
+                <a:ea typeface="Apple SD 산돌고딕 Neo 볼드체"/>
+                <a:cs typeface="Apple SD 산돌고딕 Neo 볼드체"/>
+                <a:sym typeface="Apple SD 산돌고딕 Neo 볼드체"/>
+              </a:defRPr>
+            </a:lvl1pPr>
+          </a:lstStyle>
+          <a:p>
+            <a:r>
+              <a:t>DEPOSIT</a:t>
+            </a:r>
+          </a:p>
+        </p:txBody>
+      </p:sp>
+      <p:sp>
+        <p:nvSpPr>
+          <p:cNvPr id="310" name="01"/>
+          <p:cNvSpPr txBox="1"/>
+          <p:nvPr/>
+        </p:nvSpPr>
+        <p:spPr>
+          <a:xfrm>
+            <a:off x="8890000" y="3111500"/>
             <a:ext cx="698500" cy="457200"/>
           </a:xfrm>
           <a:prstGeom prst="rect">
@@ -27822,14 +28322,14 @@
       </p:sp>
       <p:sp>
         <p:nvSpPr>
-          <p:cNvPr id="301" name="deposit(msg.value) ─────────────────────────────→"/>
+          <p:cNvPr id="311" name="deposit{value} + proof"/>
           <p:cNvSpPr txBox="1"/>
           <p:nvPr/>
         </p:nvSpPr>
         <p:spPr>
           <a:xfrm>
-            <a:off x="2222500" y="3111500"/>
-            <a:ext cx="14478000" cy="444500"/>
+            <a:off x="10096500" y="2984500"/>
+            <a:ext cx="3048000" cy="406400"/>
           </a:xfrm>
           <a:prstGeom prst="rect">
             <a:avLst/>
@@ -27849,7 +28349,7 @@
           </a:bodyPr>
           <a:lstStyle>
             <a:lvl1pPr>
-              <a:defRPr sz="2200">
+              <a:defRPr sz="2000">
                 <a:latin typeface="Apple SD 산돌고딕 Neo 일반체"/>
                 <a:ea typeface="Apple SD 산돌고딕 Neo 일반체"/>
                 <a:cs typeface="Apple SD 산돌고딕 Neo 일반체"/>
@@ -27859,20 +28359,96 @@
           </a:lstStyle>
           <a:p>
             <a:r>
-              <a:t>deposit(msg.value) ─────────────────────────────→</a:t>
-            </a:r>
-          </a:p>
-        </p:txBody>
-      </p:sp>
-      <p:sp>
-        <p:nvSpPr>
-          <p:cNvPr id="302" name="02"/>
+              <a:t>deposit{value} + proof</a:t>
+            </a:r>
+          </a:p>
+        </p:txBody>
+      </p:sp>
+      <p:sp>
+        <p:nvSpPr>
+          <p:cNvPr id="312" name="선"/>
+          <p:cNvSpPr/>
+          <p:nvPr/>
+        </p:nvSpPr>
+        <p:spPr>
+          <a:xfrm>
+            <a:off x="9905999" y="3619500"/>
+            <a:ext cx="3683001" cy="0"/>
+          </a:xfrm>
+          <a:prstGeom prst="line">
+            <a:avLst/>
+          </a:prstGeom>
+          <a:ln w="25400">
+            <a:solidFill>
+              <a:srgbClr val="FFFFFF"/>
+            </a:solidFill>
+            <a:miter lim="400000"/>
+          </a:ln>
+        </p:spPr>
+        <p:txBody>
+          <a:bodyPr lIns="50800" tIns="50800" rIns="50800" bIns="50800" anchor="ctr"/>
+          <a:lstStyle/>
+          <a:p>
+            <a:endParaRPr/>
+          </a:p>
+        </p:txBody>
+      </p:sp>
+      <p:sp>
+        <p:nvSpPr>
+          <p:cNvPr id="313" name="→"/>
           <p:cNvSpPr txBox="1"/>
           <p:nvPr/>
         </p:nvSpPr>
         <p:spPr>
           <a:xfrm>
-            <a:off x="12573000" y="4127500"/>
+            <a:off x="13144500" y="3238500"/>
+            <a:ext cx="571500" cy="469900"/>
+          </a:xfrm>
+          <a:prstGeom prst="rect">
+            <a:avLst/>
+          </a:prstGeom>
+          <a:ln w="12700">
+            <a:miter lim="400000"/>
+          </a:ln>
+          <a:extLst>
+            <a:ext uri="{C572A759-6A51-4108-AA02-DFA0A04FC94B}">
+              <ma14:wrappingTextBoxFlag xmlns:ma14="http://schemas.microsoft.com/office/mac/drawingml/2011/main" xmlns:a14="http://schemas.microsoft.com/office/drawing/2010/main" xmlns:m="http://schemas.openxmlformats.org/officeDocument/2006/math" xmlns="" val="1"/>
+            </a:ext>
+          </a:extLst>
+        </p:spPr>
+        <p:txBody>
+          <a:bodyPr lIns="50800" tIns="50800" rIns="50800" bIns="50800" anchor="ctr">
+            <a:spAutoFit/>
+          </a:bodyPr>
+          <a:lstStyle>
+            <a:lvl1pPr>
+              <a:defRPr sz="2400">
+                <a:solidFill>
+                  <a:srgbClr val="BEC9D4"/>
+                </a:solidFill>
+                <a:latin typeface="Apple SD 산돌고딕 Neo 볼드체"/>
+                <a:ea typeface="Apple SD 산돌고딕 Neo 볼드체"/>
+                <a:cs typeface="Apple SD 산돌고딕 Neo 볼드체"/>
+                <a:sym typeface="Apple SD 산돌고딕 Neo 볼드체"/>
+              </a:defRPr>
+            </a:lvl1pPr>
+          </a:lstStyle>
+          <a:p>
+            <a:r>
+              <a:t>→</a:t>
+            </a:r>
+          </a:p>
+        </p:txBody>
+      </p:sp>
+      <p:sp>
+        <p:nvSpPr>
+          <p:cNvPr id="314" name="02"/>
+          <p:cNvSpPr txBox="1"/>
+          <p:nvPr/>
+        </p:nvSpPr>
+        <p:spPr>
+          <a:xfrm>
+            <a:off x="12573000" y="4191000"/>
             <a:ext cx="698500" cy="457200"/>
           </a:xfrm>
           <a:prstGeom prst="rect">
@@ -27913,14 +28489,14 @@
       </p:sp>
       <p:sp>
         <p:nvSpPr>
-          <p:cNvPr id="303" name="policy allow ─────────→"/>
+          <p:cNvPr id="315" name="PCL lifecycle (pre/post)"/>
           <p:cNvSpPr txBox="1"/>
           <p:nvPr/>
         </p:nvSpPr>
         <p:spPr>
           <a:xfrm>
-            <a:off x="13271500" y="4127500"/>
-            <a:ext cx="4572000" cy="444500"/>
+            <a:off x="13843000" y="4064000"/>
+            <a:ext cx="2857500" cy="368300"/>
           </a:xfrm>
           <a:prstGeom prst="rect">
             <a:avLst/>
@@ -27940,7 +28516,7 @@
           </a:bodyPr>
           <a:lstStyle>
             <a:lvl1pPr>
-              <a:defRPr sz="2200">
+              <a:defRPr sz="1800">
                 <a:latin typeface="Apple SD 산돌고딕 Neo 일반체"/>
                 <a:ea typeface="Apple SD 산돌고딕 Neo 일반체"/>
                 <a:cs typeface="Apple SD 산돌고딕 Neo 일반체"/>
@@ -27950,20 +28526,140 @@
           </a:lstStyle>
           <a:p>
             <a:r>
-              <a:t>policy allow ─────────→</a:t>
-            </a:r>
-          </a:p>
-        </p:txBody>
-      </p:sp>
-      <p:sp>
-        <p:nvSpPr>
-          <p:cNvPr id="304" name="03"/>
+              <a:t>PCL lifecycle (pre/post)</a:t>
+            </a:r>
+          </a:p>
+        </p:txBody>
+      </p:sp>
+      <p:sp>
+        <p:nvSpPr>
+          <p:cNvPr id="316" name="verify(VK) · state update"/>
           <p:cNvSpPr txBox="1"/>
           <p:nvPr/>
         </p:nvSpPr>
         <p:spPr>
           <a:xfrm>
-            <a:off x="16256000" y="5143500"/>
+            <a:off x="17526000" y="4064000"/>
+            <a:ext cx="3048000" cy="406400"/>
+          </a:xfrm>
+          <a:prstGeom prst="rect">
+            <a:avLst/>
+          </a:prstGeom>
+          <a:ln w="12700">
+            <a:miter lim="400000"/>
+          </a:ln>
+          <a:extLst>
+            <a:ext uri="{C572A759-6A51-4108-AA02-DFA0A04FC94B}">
+              <ma14:wrappingTextBoxFlag xmlns:ma14="http://schemas.microsoft.com/office/mac/drawingml/2011/main" xmlns:a14="http://schemas.microsoft.com/office/drawing/2010/main" xmlns:m="http://schemas.openxmlformats.org/officeDocument/2006/math" xmlns="" val="1"/>
+            </a:ext>
+          </a:extLst>
+        </p:spPr>
+        <p:txBody>
+          <a:bodyPr lIns="50800" tIns="50800" rIns="50800" bIns="50800" anchor="ctr">
+            <a:spAutoFit/>
+          </a:bodyPr>
+          <a:lstStyle>
+            <a:lvl1pPr>
+              <a:defRPr sz="2000">
+                <a:latin typeface="Apple SD 산돌고딕 Neo 일반체"/>
+                <a:ea typeface="Apple SD 산돌고딕 Neo 일반체"/>
+                <a:cs typeface="Apple SD 산돌고딕 Neo 일반체"/>
+                <a:sym typeface="Apple SD 산돌고딕 Neo 일반체"/>
+              </a:defRPr>
+            </a:lvl1pPr>
+          </a:lstStyle>
+          <a:p>
+            <a:r>
+              <a:t>verify(VK) · state update</a:t>
+            </a:r>
+          </a:p>
+        </p:txBody>
+      </p:sp>
+      <p:sp>
+        <p:nvSpPr>
+          <p:cNvPr id="317" name="선"/>
+          <p:cNvSpPr/>
+          <p:nvPr/>
+        </p:nvSpPr>
+        <p:spPr>
+          <a:xfrm flipV="1">
+            <a:off x="13589000" y="4698999"/>
+            <a:ext cx="3683000" cy="2"/>
+          </a:xfrm>
+          <a:prstGeom prst="line">
+            <a:avLst/>
+          </a:prstGeom>
+          <a:ln w="25400">
+            <a:solidFill>
+              <a:srgbClr val="FFFFFF"/>
+            </a:solidFill>
+            <a:miter lim="400000"/>
+          </a:ln>
+        </p:spPr>
+        <p:txBody>
+          <a:bodyPr lIns="50800" tIns="50800" rIns="50800" bIns="50800" anchor="ctr"/>
+          <a:lstStyle/>
+          <a:p>
+            <a:endParaRPr/>
+          </a:p>
+        </p:txBody>
+      </p:sp>
+      <p:sp>
+        <p:nvSpPr>
+          <p:cNvPr id="318" name="→"/>
+          <p:cNvSpPr txBox="1"/>
+          <p:nvPr/>
+        </p:nvSpPr>
+        <p:spPr>
+          <a:xfrm>
+            <a:off x="16827500" y="4318000"/>
+            <a:ext cx="571500" cy="469900"/>
+          </a:xfrm>
+          <a:prstGeom prst="rect">
+            <a:avLst/>
+          </a:prstGeom>
+          <a:ln w="12700">
+            <a:miter lim="400000"/>
+          </a:ln>
+          <a:extLst>
+            <a:ext uri="{C572A759-6A51-4108-AA02-DFA0A04FC94B}">
+              <ma14:wrappingTextBoxFlag xmlns:ma14="http://schemas.microsoft.com/office/mac/drawingml/2011/main" xmlns:a14="http://schemas.microsoft.com/office/drawing/2010/main" xmlns:m="http://schemas.openxmlformats.org/officeDocument/2006/math" xmlns="" val="1"/>
+            </a:ext>
+          </a:extLst>
+        </p:spPr>
+        <p:txBody>
+          <a:bodyPr lIns="50800" tIns="50800" rIns="50800" bIns="50800" anchor="ctr">
+            <a:spAutoFit/>
+          </a:bodyPr>
+          <a:lstStyle>
+            <a:lvl1pPr>
+              <a:defRPr sz="2400">
+                <a:solidFill>
+                  <a:srgbClr val="BEC9D4"/>
+                </a:solidFill>
+                <a:latin typeface="Apple SD 산돌고딕 Neo 볼드체"/>
+                <a:ea typeface="Apple SD 산돌고딕 Neo 볼드체"/>
+                <a:cs typeface="Apple SD 산돌고딕 Neo 볼드체"/>
+                <a:sym typeface="Apple SD 산돌고딕 Neo 볼드체"/>
+              </a:defRPr>
+            </a:lvl1pPr>
+          </a:lstStyle>
+          <a:p>
+            <a:r>
+              <a:t>→</a:t>
+            </a:r>
+          </a:p>
+        </p:txBody>
+      </p:sp>
+      <p:sp>
+        <p:nvSpPr>
+          <p:cNvPr id="319" name="03"/>
+          <p:cNvSpPr txBox="1"/>
+          <p:nvPr/>
+        </p:nvSpPr>
+        <p:spPr>
+          <a:xfrm>
+            <a:off x="16256000" y="5270500"/>
             <a:ext cx="698500" cy="457200"/>
           </a:xfrm>
           <a:prstGeom prst="rect">
@@ -28004,14 +28700,14 @@
       </p:sp>
       <p:sp>
         <p:nvSpPr>
-          <p:cNvPr id="305" name="←──────────────────────── commitment · root event"/>
+          <p:cNvPr id="320" name="receipt · treasury root"/>
           <p:cNvSpPr txBox="1"/>
           <p:nvPr/>
         </p:nvSpPr>
         <p:spPr>
           <a:xfrm>
-            <a:off x="2222500" y="5143500"/>
-            <a:ext cx="14224000" cy="444500"/>
+            <a:off x="10985500" y="5143500"/>
+            <a:ext cx="3302000" cy="406400"/>
           </a:xfrm>
           <a:prstGeom prst="rect">
             <a:avLst/>
@@ -28031,7 +28727,7 @@
           </a:bodyPr>
           <a:lstStyle>
             <a:lvl1pPr>
-              <a:defRPr sz="2200">
+              <a:defRPr sz="2000">
                 <a:latin typeface="Apple SD 산돌고딕 Neo 일반체"/>
                 <a:ea typeface="Apple SD 산돌고딕 Neo 일반체"/>
                 <a:cs typeface="Apple SD 산돌고딕 Neo 일반체"/>
@@ -28041,20 +28737,143 @@
           </a:lstStyle>
           <a:p>
             <a:r>
-              <a:t>←──────────────────────── commitment · root event</a:t>
-            </a:r>
-          </a:p>
-        </p:txBody>
-      </p:sp>
-      <p:sp>
-        <p:nvSpPr>
-          <p:cNvPr id="306" name="04"/>
+              <a:t>receipt · treasury root</a:t>
+            </a:r>
+          </a:p>
+        </p:txBody>
+      </p:sp>
+      <p:sp>
+        <p:nvSpPr>
+          <p:cNvPr id="321" name="선"/>
+          <p:cNvSpPr/>
+          <p:nvPr/>
+        </p:nvSpPr>
+        <p:spPr>
+          <a:xfrm flipH="1" flipV="1">
+            <a:off x="9906000" y="5778500"/>
+            <a:ext cx="7366000" cy="1"/>
+          </a:xfrm>
+          <a:prstGeom prst="line">
+            <a:avLst/>
+          </a:prstGeom>
+          <a:ln w="25400">
+            <a:solidFill>
+              <a:srgbClr val="FFFFFF"/>
+            </a:solidFill>
+            <a:miter lim="400000"/>
+          </a:ln>
+        </p:spPr>
+        <p:txBody>
+          <a:bodyPr lIns="50800" tIns="50800" rIns="50800" bIns="50800" anchor="ctr"/>
+          <a:lstStyle/>
+          <a:p>
+            <a:endParaRPr/>
+          </a:p>
+        </p:txBody>
+      </p:sp>
+      <p:sp>
+        <p:nvSpPr>
+          <p:cNvPr id="322" name="←"/>
           <p:cNvSpPr txBox="1"/>
           <p:nvPr/>
         </p:nvSpPr>
         <p:spPr>
           <a:xfrm>
-            <a:off x="5207000" y="6159500"/>
+            <a:off x="9588500" y="5397500"/>
+            <a:ext cx="571500" cy="469900"/>
+          </a:xfrm>
+          <a:prstGeom prst="rect">
+            <a:avLst/>
+          </a:prstGeom>
+          <a:ln w="12700">
+            <a:miter lim="400000"/>
+          </a:ln>
+          <a:extLst>
+            <a:ext uri="{C572A759-6A51-4108-AA02-DFA0A04FC94B}">
+              <ma14:wrappingTextBoxFlag xmlns:ma14="http://schemas.microsoft.com/office/mac/drawingml/2011/main" xmlns:a14="http://schemas.microsoft.com/office/drawing/2010/main" xmlns:m="http://schemas.openxmlformats.org/officeDocument/2006/math" xmlns="" val="1"/>
+            </a:ext>
+          </a:extLst>
+        </p:spPr>
+        <p:txBody>
+          <a:bodyPr lIns="50800" tIns="50800" rIns="50800" bIns="50800" anchor="ctr">
+            <a:spAutoFit/>
+          </a:bodyPr>
+          <a:lstStyle>
+            <a:lvl1pPr>
+              <a:defRPr sz="2400">
+                <a:solidFill>
+                  <a:srgbClr val="BEC9D4"/>
+                </a:solidFill>
+                <a:latin typeface="Apple SD 산돌고딕 Neo 볼드체"/>
+                <a:ea typeface="Apple SD 산돌고딕 Neo 볼드체"/>
+                <a:cs typeface="Apple SD 산돌고딕 Neo 볼드체"/>
+                <a:sym typeface="Apple SD 산돌고딕 Neo 볼드체"/>
+              </a:defRPr>
+            </a:lvl1pPr>
+          </a:lstStyle>
+          <a:p>
+            <a:r>
+              <a:t>←</a:t>
+            </a:r>
+          </a:p>
+        </p:txBody>
+      </p:sp>
+      <p:sp>
+        <p:nvSpPr>
+          <p:cNvPr id="323" name="PAYROLL BATCH"/>
+          <p:cNvSpPr txBox="1"/>
+          <p:nvPr/>
+        </p:nvSpPr>
+        <p:spPr>
+          <a:xfrm>
+            <a:off x="1333500" y="6540500"/>
+            <a:ext cx="2667000" cy="406400"/>
+          </a:xfrm>
+          <a:prstGeom prst="rect">
+            <a:avLst/>
+          </a:prstGeom>
+          <a:ln w="12700">
+            <a:miter lim="400000"/>
+          </a:ln>
+          <a:extLst>
+            <a:ext uri="{C572A759-6A51-4108-AA02-DFA0A04FC94B}">
+              <ma14:wrappingTextBoxFlag xmlns:ma14="http://schemas.microsoft.com/office/mac/drawingml/2011/main" xmlns:a14="http://schemas.microsoft.com/office/drawing/2010/main" xmlns:m="http://schemas.openxmlformats.org/officeDocument/2006/math" xmlns="" val="1"/>
+            </a:ext>
+          </a:extLst>
+        </p:spPr>
+        <p:txBody>
+          <a:bodyPr lIns="50800" tIns="50800" rIns="50800" bIns="50800" anchor="ctr">
+            <a:spAutoFit/>
+          </a:bodyPr>
+          <a:lstStyle>
+            <a:lvl1pPr>
+              <a:defRPr sz="2000">
+                <a:solidFill>
+                  <a:srgbClr val="BEC9D4"/>
+                </a:solidFill>
+                <a:latin typeface="Apple SD 산돌고딕 Neo 볼드체"/>
+                <a:ea typeface="Apple SD 산돌고딕 Neo 볼드체"/>
+                <a:cs typeface="Apple SD 산돌고딕 Neo 볼드체"/>
+                <a:sym typeface="Apple SD 산돌고딕 Neo 볼드체"/>
+              </a:defRPr>
+            </a:lvl1pPr>
+          </a:lstStyle>
+          <a:p>
+            <a:r>
+              <a:t>PAYROLL BATCH</a:t>
+            </a:r>
+          </a:p>
+        </p:txBody>
+      </p:sp>
+      <p:sp>
+        <p:nvSpPr>
+          <p:cNvPr id="324" name="04"/>
+          <p:cNvSpPr txBox="1"/>
+          <p:nvPr/>
+        </p:nvSpPr>
+        <p:spPr>
+          <a:xfrm>
+            <a:off x="1524000" y="7048500"/>
             <a:ext cx="698500" cy="457200"/>
           </a:xfrm>
           <a:prstGeom prst="rect">
@@ -28095,14 +28914,14 @@
       </p:sp>
       <p:sp>
         <p:nvSpPr>
-          <p:cNvPr id="307" name="plan + witness ─────→ proof + outputs"/>
+          <p:cNvPr id="325" name="approved plan + witness"/>
           <p:cNvSpPr txBox="1"/>
           <p:nvPr/>
         </p:nvSpPr>
         <p:spPr>
           <a:xfrm>
-            <a:off x="5905500" y="6159500"/>
-            <a:ext cx="6604000" cy="444500"/>
+            <a:off x="2667000" y="6921500"/>
+            <a:ext cx="3111500" cy="406400"/>
           </a:xfrm>
           <a:prstGeom prst="rect">
             <a:avLst/>
@@ -28122,7 +28941,7 @@
           </a:bodyPr>
           <a:lstStyle>
             <a:lvl1pPr>
-              <a:defRPr sz="2200">
+              <a:defRPr sz="2000">
                 <a:latin typeface="Apple SD 산돌고딕 Neo 일반체"/>
                 <a:ea typeface="Apple SD 산돌고딕 Neo 일반체"/>
                 <a:cs typeface="Apple SD 산돌고딕 Neo 일반체"/>
@@ -28132,20 +28951,96 @@
           </a:lstStyle>
           <a:p>
             <a:r>
-              <a:t>plan + witness ─────→ proof + outputs</a:t>
-            </a:r>
-          </a:p>
-        </p:txBody>
-      </p:sp>
-      <p:sp>
-        <p:nvSpPr>
-          <p:cNvPr id="308" name="05"/>
+              <a:t>approved plan + witness</a:t>
+            </a:r>
+          </a:p>
+        </p:txBody>
+      </p:sp>
+      <p:sp>
+        <p:nvSpPr>
+          <p:cNvPr id="326" name="선"/>
+          <p:cNvSpPr/>
+          <p:nvPr/>
+        </p:nvSpPr>
+        <p:spPr>
+          <a:xfrm flipV="1">
+            <a:off x="2540000" y="7556500"/>
+            <a:ext cx="3683000" cy="1"/>
+          </a:xfrm>
+          <a:prstGeom prst="line">
+            <a:avLst/>
+          </a:prstGeom>
+          <a:ln w="25400">
+            <a:solidFill>
+              <a:srgbClr val="FFFFFF"/>
+            </a:solidFill>
+            <a:miter lim="400000"/>
+          </a:ln>
+        </p:spPr>
+        <p:txBody>
+          <a:bodyPr lIns="50800" tIns="50800" rIns="50800" bIns="50800" anchor="ctr"/>
+          <a:lstStyle/>
+          <a:p>
+            <a:endParaRPr/>
+          </a:p>
+        </p:txBody>
+      </p:sp>
+      <p:sp>
+        <p:nvSpPr>
+          <p:cNvPr id="327" name="→"/>
           <p:cNvSpPr txBox="1"/>
           <p:nvPr/>
         </p:nvSpPr>
         <p:spPr>
           <a:xfrm>
-            <a:off x="1524000" y="7175500"/>
+            <a:off x="5778500" y="7175500"/>
+            <a:ext cx="571500" cy="469900"/>
+          </a:xfrm>
+          <a:prstGeom prst="rect">
+            <a:avLst/>
+          </a:prstGeom>
+          <a:ln w="12700">
+            <a:miter lim="400000"/>
+          </a:ln>
+          <a:extLst>
+            <a:ext uri="{C572A759-6A51-4108-AA02-DFA0A04FC94B}">
+              <ma14:wrappingTextBoxFlag xmlns:ma14="http://schemas.microsoft.com/office/mac/drawingml/2011/main" xmlns:a14="http://schemas.microsoft.com/office/drawing/2010/main" xmlns:m="http://schemas.openxmlformats.org/officeDocument/2006/math" xmlns="" val="1"/>
+            </a:ext>
+          </a:extLst>
+        </p:spPr>
+        <p:txBody>
+          <a:bodyPr lIns="50800" tIns="50800" rIns="50800" bIns="50800" anchor="ctr">
+            <a:spAutoFit/>
+          </a:bodyPr>
+          <a:lstStyle>
+            <a:lvl1pPr>
+              <a:defRPr sz="2400">
+                <a:solidFill>
+                  <a:srgbClr val="BEC9D4"/>
+                </a:solidFill>
+                <a:latin typeface="Apple SD 산돌고딕 Neo 볼드체"/>
+                <a:ea typeface="Apple SD 산돌고딕 Neo 볼드체"/>
+                <a:cs typeface="Apple SD 산돌고딕 Neo 볼드체"/>
+                <a:sym typeface="Apple SD 산돌고딕 Neo 볼드체"/>
+              </a:defRPr>
+            </a:lvl1pPr>
+          </a:lstStyle>
+          <a:p>
+            <a:r>
+              <a:t>→</a:t>
+            </a:r>
+          </a:p>
+        </p:txBody>
+      </p:sp>
+      <p:sp>
+        <p:nvSpPr>
+          <p:cNvPr id="328" name="05"/>
+          <p:cNvSpPr txBox="1"/>
+          <p:nvPr/>
+        </p:nvSpPr>
+        <p:spPr>
+          <a:xfrm>
+            <a:off x="5207000" y="8064500"/>
             <a:ext cx="698500" cy="457200"/>
           </a:xfrm>
           <a:prstGeom prst="rect">
@@ -28186,14 +29081,14 @@
       </p:sp>
       <p:sp>
         <p:nvSpPr>
-          <p:cNvPr id="309" name="transfer(bundle, proof) ───────────────────────→"/>
+          <p:cNvPr id="329" name="proof + outputs"/>
           <p:cNvSpPr txBox="1"/>
           <p:nvPr/>
         </p:nvSpPr>
         <p:spPr>
           <a:xfrm>
-            <a:off x="2222500" y="7175500"/>
-            <a:ext cx="14287500" cy="444500"/>
+            <a:off x="6604000" y="7937500"/>
+            <a:ext cx="2413000" cy="406400"/>
           </a:xfrm>
           <a:prstGeom prst="rect">
             <a:avLst/>
@@ -28213,7 +29108,7 @@
           </a:bodyPr>
           <a:lstStyle>
             <a:lvl1pPr>
-              <a:defRPr sz="2200">
+              <a:defRPr sz="2000">
                 <a:latin typeface="Apple SD 산돌고딕 Neo 일반체"/>
                 <a:ea typeface="Apple SD 산돌고딕 Neo 일반체"/>
                 <a:cs typeface="Apple SD 산돌고딕 Neo 일반체"/>
@@ -28223,20 +29118,263 @@
           </a:lstStyle>
           <a:p>
             <a:r>
-              <a:t>transfer(bundle, proof) ───────────────────────→</a:t>
-            </a:r>
-          </a:p>
-        </p:txBody>
-      </p:sp>
-      <p:sp>
-        <p:nvSpPr>
-          <p:cNvPr id="310" name="06"/>
+              <a:t>proof + outputs</a:t>
+            </a:r>
+          </a:p>
+        </p:txBody>
+      </p:sp>
+      <p:sp>
+        <p:nvSpPr>
+          <p:cNvPr id="330" name="선"/>
+          <p:cNvSpPr/>
+          <p:nvPr/>
+        </p:nvSpPr>
+        <p:spPr>
+          <a:xfrm>
+            <a:off x="6222999" y="8572499"/>
+            <a:ext cx="3683002" cy="1"/>
+          </a:xfrm>
+          <a:prstGeom prst="line">
+            <a:avLst/>
+          </a:prstGeom>
+          <a:ln w="25400">
+            <a:solidFill>
+              <a:srgbClr val="FFFFFF"/>
+            </a:solidFill>
+            <a:miter lim="400000"/>
+          </a:ln>
+        </p:spPr>
+        <p:txBody>
+          <a:bodyPr lIns="50800" tIns="50800" rIns="50800" bIns="50800" anchor="ctr"/>
+          <a:lstStyle/>
+          <a:p>
+            <a:endParaRPr/>
+          </a:p>
+        </p:txBody>
+      </p:sp>
+      <p:sp>
+        <p:nvSpPr>
+          <p:cNvPr id="331" name="→"/>
           <p:cNvSpPr txBox="1"/>
           <p:nvPr/>
         </p:nvSpPr>
         <p:spPr>
           <a:xfrm>
-            <a:off x="12573000" y="8191500"/>
+            <a:off x="9461500" y="8191500"/>
+            <a:ext cx="571500" cy="469900"/>
+          </a:xfrm>
+          <a:prstGeom prst="rect">
+            <a:avLst/>
+          </a:prstGeom>
+          <a:ln w="12700">
+            <a:miter lim="400000"/>
+          </a:ln>
+          <a:extLst>
+            <a:ext uri="{C572A759-6A51-4108-AA02-DFA0A04FC94B}">
+              <ma14:wrappingTextBoxFlag xmlns:ma14="http://schemas.microsoft.com/office/mac/drawingml/2011/main" xmlns:a14="http://schemas.microsoft.com/office/drawing/2010/main" xmlns:m="http://schemas.openxmlformats.org/officeDocument/2006/math" xmlns="" val="1"/>
+            </a:ext>
+          </a:extLst>
+        </p:spPr>
+        <p:txBody>
+          <a:bodyPr lIns="50800" tIns="50800" rIns="50800" bIns="50800" anchor="ctr">
+            <a:spAutoFit/>
+          </a:bodyPr>
+          <a:lstStyle>
+            <a:lvl1pPr>
+              <a:defRPr sz="2400">
+                <a:solidFill>
+                  <a:srgbClr val="BEC9D4"/>
+                </a:solidFill>
+                <a:latin typeface="Apple SD 산돌고딕 Neo 볼드체"/>
+                <a:ea typeface="Apple SD 산돌고딕 Neo 볼드체"/>
+                <a:cs typeface="Apple SD 산돌고딕 Neo 볼드체"/>
+                <a:sym typeface="Apple SD 산돌고딕 Neo 볼드체"/>
+              </a:defRPr>
+            </a:lvl1pPr>
+          </a:lstStyle>
+          <a:p>
+            <a:r>
+              <a:t>→</a:t>
+            </a:r>
+          </a:p>
+        </p:txBody>
+      </p:sp>
+      <p:sp>
+        <p:nvSpPr>
+          <p:cNvPr id="332" name="06"/>
+          <p:cNvSpPr txBox="1"/>
+          <p:nvPr/>
+        </p:nvSpPr>
+        <p:spPr>
+          <a:xfrm>
+            <a:off x="8890000" y="9080500"/>
+            <a:ext cx="698500" cy="457200"/>
+          </a:xfrm>
+          <a:prstGeom prst="rect">
+            <a:avLst/>
+          </a:prstGeom>
+          <a:ln w="12700">
+            <a:miter lim="400000"/>
+          </a:ln>
+          <a:extLst>
+            <a:ext uri="{C572A759-6A51-4108-AA02-DFA0A04FC94B}">
+              <ma14:wrappingTextBoxFlag xmlns:ma14="http://schemas.microsoft.com/office/mac/drawingml/2011/main" xmlns:a14="http://schemas.microsoft.com/office/drawing/2010/main" xmlns:m="http://schemas.openxmlformats.org/officeDocument/2006/math" xmlns="" val="1"/>
+            </a:ext>
+          </a:extLst>
+        </p:spPr>
+        <p:txBody>
+          <a:bodyPr lIns="50800" tIns="50800" rIns="50800" bIns="50800" anchor="ctr">
+            <a:spAutoFit/>
+          </a:bodyPr>
+          <a:lstStyle>
+            <a:lvl1pPr>
+              <a:defRPr sz="2300">
+                <a:solidFill>
+                  <a:srgbClr val="00E9FF"/>
+                </a:solidFill>
+                <a:latin typeface="Apple SD 산돌고딕 Neo 볼드체"/>
+                <a:ea typeface="Apple SD 산돌고딕 Neo 볼드체"/>
+                <a:cs typeface="Apple SD 산돌고딕 Neo 볼드체"/>
+                <a:sym typeface="Apple SD 산돌고딕 Neo 볼드체"/>
+              </a:defRPr>
+            </a:lvl1pPr>
+          </a:lstStyle>
+          <a:p>
+            <a:r>
+              <a:t>06</a:t>
+            </a:r>
+          </a:p>
+        </p:txBody>
+      </p:sp>
+      <p:sp>
+        <p:nvSpPr>
+          <p:cNvPr id="333" name="signed batch tx"/>
+          <p:cNvSpPr txBox="1"/>
+          <p:nvPr/>
+        </p:nvSpPr>
+        <p:spPr>
+          <a:xfrm>
+            <a:off x="10287000" y="8953500"/>
+            <a:ext cx="2286000" cy="406400"/>
+          </a:xfrm>
+          <a:prstGeom prst="rect">
+            <a:avLst/>
+          </a:prstGeom>
+          <a:ln w="12700">
+            <a:miter lim="400000"/>
+          </a:ln>
+          <a:extLst>
+            <a:ext uri="{C572A759-6A51-4108-AA02-DFA0A04FC94B}">
+              <ma14:wrappingTextBoxFlag xmlns:ma14="http://schemas.microsoft.com/office/mac/drawingml/2011/main" xmlns:a14="http://schemas.microsoft.com/office/drawing/2010/main" xmlns:m="http://schemas.openxmlformats.org/officeDocument/2006/math" xmlns="" val="1"/>
+            </a:ext>
+          </a:extLst>
+        </p:spPr>
+        <p:txBody>
+          <a:bodyPr lIns="50800" tIns="50800" rIns="50800" bIns="50800" anchor="ctr">
+            <a:spAutoFit/>
+          </a:bodyPr>
+          <a:lstStyle>
+            <a:lvl1pPr>
+              <a:defRPr sz="2000">
+                <a:latin typeface="Apple SD 산돌고딕 Neo 일반체"/>
+                <a:ea typeface="Apple SD 산돌고딕 Neo 일반체"/>
+                <a:cs typeface="Apple SD 산돌고딕 Neo 일반체"/>
+                <a:sym typeface="Apple SD 산돌고딕 Neo 일반체"/>
+              </a:defRPr>
+            </a:lvl1pPr>
+          </a:lstStyle>
+          <a:p>
+            <a:r>
+              <a:t>signed batch tx</a:t>
+            </a:r>
+          </a:p>
+        </p:txBody>
+      </p:sp>
+      <p:sp>
+        <p:nvSpPr>
+          <p:cNvPr id="334" name="선"/>
+          <p:cNvSpPr/>
+          <p:nvPr/>
+        </p:nvSpPr>
+        <p:spPr>
+          <a:xfrm>
+            <a:off x="9906000" y="9588500"/>
+            <a:ext cx="3683000" cy="0"/>
+          </a:xfrm>
+          <a:prstGeom prst="line">
+            <a:avLst/>
+          </a:prstGeom>
+          <a:ln w="25400">
+            <a:solidFill>
+              <a:srgbClr val="FFFFFF"/>
+            </a:solidFill>
+            <a:miter lim="400000"/>
+          </a:ln>
+        </p:spPr>
+        <p:txBody>
+          <a:bodyPr lIns="50800" tIns="50800" rIns="50800" bIns="50800" anchor="ctr"/>
+          <a:lstStyle/>
+          <a:p>
+            <a:endParaRPr/>
+          </a:p>
+        </p:txBody>
+      </p:sp>
+      <p:sp>
+        <p:nvSpPr>
+          <p:cNvPr id="335" name="→"/>
+          <p:cNvSpPr txBox="1"/>
+          <p:nvPr/>
+        </p:nvSpPr>
+        <p:spPr>
+          <a:xfrm>
+            <a:off x="13144500" y="9207500"/>
+            <a:ext cx="571500" cy="469900"/>
+          </a:xfrm>
+          <a:prstGeom prst="rect">
+            <a:avLst/>
+          </a:prstGeom>
+          <a:ln w="12700">
+            <a:miter lim="400000"/>
+          </a:ln>
+          <a:extLst>
+            <a:ext uri="{C572A759-6A51-4108-AA02-DFA0A04FC94B}">
+              <ma14:wrappingTextBoxFlag xmlns:ma14="http://schemas.microsoft.com/office/mac/drawingml/2011/main" xmlns:a14="http://schemas.microsoft.com/office/drawing/2010/main" xmlns:m="http://schemas.openxmlformats.org/officeDocument/2006/math" xmlns="" val="1"/>
+            </a:ext>
+          </a:extLst>
+        </p:spPr>
+        <p:txBody>
+          <a:bodyPr lIns="50800" tIns="50800" rIns="50800" bIns="50800" anchor="ctr">
+            <a:spAutoFit/>
+          </a:bodyPr>
+          <a:lstStyle>
+            <a:lvl1pPr>
+              <a:defRPr sz="2400">
+                <a:solidFill>
+                  <a:srgbClr val="BEC9D4"/>
+                </a:solidFill>
+                <a:latin typeface="Apple SD 산돌고딕 Neo 볼드체"/>
+                <a:ea typeface="Apple SD 산돌고딕 Neo 볼드체"/>
+                <a:cs typeface="Apple SD 산돌고딕 Neo 볼드체"/>
+                <a:sym typeface="Apple SD 산돌고딕 Neo 볼드체"/>
+              </a:defRPr>
+            </a:lvl1pPr>
+          </a:lstStyle>
+          <a:p>
+            <a:r>
+              <a:t>→</a:t>
+            </a:r>
+          </a:p>
+        </p:txBody>
+      </p:sp>
+      <p:sp>
+        <p:nvSpPr>
+          <p:cNvPr id="336" name="07"/>
+          <p:cNvSpPr txBox="1"/>
+          <p:nvPr/>
+        </p:nvSpPr>
+        <p:spPr>
+          <a:xfrm>
+            <a:off x="12573000" y="10096500"/>
             <a:ext cx="698500" cy="457200"/>
           </a:xfrm>
           <a:prstGeom prst="rect">
@@ -28270,21 +29408,21 @@
           </a:lstStyle>
           <a:p>
             <a:r>
-              <a:t>06</a:t>
-            </a:r>
-          </a:p>
-        </p:txBody>
-      </p:sp>
-      <p:sp>
-        <p:nvSpPr>
-          <p:cNvPr id="311" name="authorized call ─────→ verify + state transition"/>
+              <a:t>07</a:t>
+            </a:r>
+          </a:p>
+        </p:txBody>
+      </p:sp>
+      <p:sp>
+        <p:nvSpPr>
+          <p:cNvPr id="337" name="PCL lifecycle"/>
           <p:cNvSpPr txBox="1"/>
           <p:nvPr/>
         </p:nvSpPr>
         <p:spPr>
           <a:xfrm>
-            <a:off x="13271500" y="8191500"/>
-            <a:ext cx="7239000" cy="444500"/>
+            <a:off x="13843000" y="9969500"/>
+            <a:ext cx="2159000" cy="406400"/>
           </a:xfrm>
           <a:prstGeom prst="rect">
             <a:avLst/>
@@ -28304,7 +29442,7 @@
           </a:bodyPr>
           <a:lstStyle>
             <a:lvl1pPr>
-              <a:defRPr sz="2200">
+              <a:defRPr sz="2000">
                 <a:latin typeface="Apple SD 산돌고딕 Neo 일반체"/>
                 <a:ea typeface="Apple SD 산돌고딕 Neo 일반체"/>
                 <a:cs typeface="Apple SD 산돌고딕 Neo 일반체"/>
@@ -28314,21 +29452,21 @@
           </a:lstStyle>
           <a:p>
             <a:r>
-              <a:t>authorized call ─────→ verify + state transition</a:t>
-            </a:r>
-          </a:p>
-        </p:txBody>
-      </p:sp>
-      <p:sp>
-        <p:nvSpPr>
-          <p:cNvPr id="312" name="07"/>
+              <a:t>PCL lifecycle</a:t>
+            </a:r>
+          </a:p>
+        </p:txBody>
+      </p:sp>
+      <p:sp>
+        <p:nvSpPr>
+          <p:cNvPr id="338" name="verify · state update"/>
           <p:cNvSpPr txBox="1"/>
           <p:nvPr/>
         </p:nvSpPr>
         <p:spPr>
           <a:xfrm>
-            <a:off x="16256000" y="9207500"/>
-            <a:ext cx="698500" cy="457200"/>
+            <a:off x="17526000" y="9969500"/>
+            <a:ext cx="2794000" cy="406400"/>
           </a:xfrm>
           <a:prstGeom prst="rect">
             <a:avLst/>
@@ -28348,9 +29486,82 @@
           </a:bodyPr>
           <a:lstStyle>
             <a:lvl1pPr>
-              <a:defRPr sz="2300">
+              <a:defRPr sz="2000">
+                <a:latin typeface="Apple SD 산돌고딕 Neo 일반체"/>
+                <a:ea typeface="Apple SD 산돌고딕 Neo 일반체"/>
+                <a:cs typeface="Apple SD 산돌고딕 Neo 일반체"/>
+                <a:sym typeface="Apple SD 산돌고딕 Neo 일반체"/>
+              </a:defRPr>
+            </a:lvl1pPr>
+          </a:lstStyle>
+          <a:p>
+            <a:r>
+              <a:t>verify · state update</a:t>
+            </a:r>
+          </a:p>
+        </p:txBody>
+      </p:sp>
+      <p:sp>
+        <p:nvSpPr>
+          <p:cNvPr id="339" name="선"/>
+          <p:cNvSpPr/>
+          <p:nvPr/>
+        </p:nvSpPr>
+        <p:spPr>
+          <a:xfrm>
+            <a:off x="13589000" y="10604500"/>
+            <a:ext cx="3683000" cy="1"/>
+          </a:xfrm>
+          <a:prstGeom prst="line">
+            <a:avLst/>
+          </a:prstGeom>
+          <a:ln w="25400">
+            <a:solidFill>
+              <a:srgbClr val="FFFFFF"/>
+            </a:solidFill>
+            <a:miter lim="400000"/>
+          </a:ln>
+        </p:spPr>
+        <p:txBody>
+          <a:bodyPr lIns="50800" tIns="50800" rIns="50800" bIns="50800" anchor="ctr"/>
+          <a:lstStyle/>
+          <a:p>
+            <a:endParaRPr/>
+          </a:p>
+        </p:txBody>
+      </p:sp>
+      <p:sp>
+        <p:nvSpPr>
+          <p:cNvPr id="340" name="→"/>
+          <p:cNvSpPr txBox="1"/>
+          <p:nvPr/>
+        </p:nvSpPr>
+        <p:spPr>
+          <a:xfrm>
+            <a:off x="16827500" y="10223500"/>
+            <a:ext cx="571500" cy="469900"/>
+          </a:xfrm>
+          <a:prstGeom prst="rect">
+            <a:avLst/>
+          </a:prstGeom>
+          <a:ln w="12700">
+            <a:miter lim="400000"/>
+          </a:ln>
+          <a:extLst>
+            <a:ext uri="{C572A759-6A51-4108-AA02-DFA0A04FC94B}">
+              <ma14:wrappingTextBoxFlag xmlns:ma14="http://schemas.microsoft.com/office/mac/drawingml/2011/main" xmlns:a14="http://schemas.microsoft.com/office/drawing/2010/main" xmlns:m="http://schemas.openxmlformats.org/officeDocument/2006/math" xmlns="" val="1"/>
+            </a:ext>
+          </a:extLst>
+        </p:spPr>
+        <p:txBody>
+          <a:bodyPr lIns="50800" tIns="50800" rIns="50800" bIns="50800" anchor="ctr">
+            <a:spAutoFit/>
+          </a:bodyPr>
+          <a:lstStyle>
+            <a:lvl1pPr>
+              <a:defRPr sz="2400">
                 <a:solidFill>
-                  <a:srgbClr val="FFBF2C"/>
+                  <a:srgbClr val="BEC9D4"/>
                 </a:solidFill>
                 <a:latin typeface="Apple SD 산돌고딕 Neo 볼드체"/>
                 <a:ea typeface="Apple SD 산돌고딕 Neo 볼드체"/>
@@ -28361,64 +29572,20 @@
           </a:lstStyle>
           <a:p>
             <a:r>
-              <a:t>07</a:t>
-            </a:r>
-          </a:p>
-        </p:txBody>
-      </p:sp>
-      <p:sp>
-        <p:nvSpPr>
-          <p:cNvPr id="313" name="output commitments + disclosure ─────────→"/>
+              <a:t>→</a:t>
+            </a:r>
+          </a:p>
+        </p:txBody>
+      </p:sp>
+      <p:sp>
+        <p:nvSpPr>
+          <p:cNvPr id="341" name="08"/>
           <p:cNvSpPr txBox="1"/>
           <p:nvPr/>
         </p:nvSpPr>
         <p:spPr>
           <a:xfrm>
-            <a:off x="16954500" y="9207500"/>
-            <a:ext cx="6350000" cy="753110"/>
-          </a:xfrm>
-          <a:prstGeom prst="rect">
-            <a:avLst/>
-          </a:prstGeom>
-          <a:ln w="12700">
-            <a:miter lim="400000"/>
-          </a:ln>
-          <a:extLst>
-            <a:ext uri="{C572A759-6A51-4108-AA02-DFA0A04FC94B}">
-              <ma14:wrappingTextBoxFlag xmlns:ma14="http://schemas.microsoft.com/office/mac/drawingml/2011/main" xmlns:a14="http://schemas.microsoft.com/office/drawing/2010/main" xmlns:m="http://schemas.openxmlformats.org/officeDocument/2006/math" xmlns="" val="1"/>
-            </a:ext>
-          </a:extLst>
-        </p:spPr>
-        <p:txBody>
-          <a:bodyPr lIns="50800" tIns="50800" rIns="50800" bIns="50800" anchor="ctr">
-            <a:spAutoFit/>
-          </a:bodyPr>
-          <a:lstStyle>
-            <a:lvl1pPr>
-              <a:defRPr sz="2200">
-                <a:latin typeface="Apple SD 산돌고딕 Neo 일반체"/>
-                <a:ea typeface="Apple SD 산돌고딕 Neo 일반체"/>
-                <a:cs typeface="Apple SD 산돌고딕 Neo 일반체"/>
-                <a:sym typeface="Apple SD 산돌고딕 Neo 일반체"/>
-              </a:defRPr>
-            </a:lvl1pPr>
-          </a:lstStyle>
-          <a:p>
-            <a:r>
-              <a:t>output commitments + disclosure ─────────→</a:t>
-            </a:r>
-          </a:p>
-        </p:txBody>
-      </p:sp>
-      <p:sp>
-        <p:nvSpPr>
-          <p:cNvPr id="314" name="08"/>
-          <p:cNvSpPr txBox="1"/>
-          <p:nvPr/>
-        </p:nvSpPr>
-        <p:spPr>
-          <a:xfrm>
-            <a:off x="19939000" y="10223500"/>
+            <a:off x="16256000" y="10985500"/>
             <a:ext cx="698500" cy="457200"/>
           </a:xfrm>
           <a:prstGeom prst="rect">
@@ -28459,14 +29626,14 @@
       </p:sp>
       <p:sp>
         <p:nvSpPr>
-          <p:cNvPr id="315" name="employee scan + plan reconciliation"/>
+          <p:cNvPr id="342" name="commitments · ciphertext"/>
           <p:cNvSpPr txBox="1"/>
           <p:nvPr/>
         </p:nvSpPr>
         <p:spPr>
           <a:xfrm>
-            <a:off x="15621000" y="10223500"/>
-            <a:ext cx="4191000" cy="753110"/>
+            <a:off x="17526000" y="10858500"/>
+            <a:ext cx="3175000" cy="393700"/>
           </a:xfrm>
           <a:prstGeom prst="rect">
             <a:avLst/>
@@ -28486,7 +29653,7 @@
           </a:bodyPr>
           <a:lstStyle>
             <a:lvl1pPr>
-              <a:defRPr sz="2200">
+              <a:defRPr sz="1900">
                 <a:latin typeface="Apple SD 산돌고딕 Neo 일반체"/>
                 <a:ea typeface="Apple SD 산돌고딕 Neo 일반체"/>
                 <a:cs typeface="Apple SD 산돌고딕 Neo 일반체"/>
@@ -28496,14 +29663,134 @@
           </a:lstStyle>
           <a:p>
             <a:r>
-              <a:t>employee scan + plan reconciliation</a:t>
-            </a:r>
-          </a:p>
-        </p:txBody>
-      </p:sp>
-      <p:sp>
-        <p:nvSpPr>
-          <p:cNvPr id="316" name="완료 = receipt 포함 + 직원별 note 탐색 + payroll plan 대사"/>
+              <a:t>commitments · ciphertext</a:t>
+            </a:r>
+          </a:p>
+        </p:txBody>
+      </p:sp>
+      <p:sp>
+        <p:nvSpPr>
+          <p:cNvPr id="343" name="scan + audit"/>
+          <p:cNvSpPr txBox="1"/>
+          <p:nvPr/>
+        </p:nvSpPr>
+        <p:spPr>
+          <a:xfrm>
+            <a:off x="21336000" y="10858500"/>
+            <a:ext cx="1714500" cy="393700"/>
+          </a:xfrm>
+          <a:prstGeom prst="rect">
+            <a:avLst/>
+          </a:prstGeom>
+          <a:ln w="12700">
+            <a:miter lim="400000"/>
+          </a:ln>
+          <a:extLst>
+            <a:ext uri="{C572A759-6A51-4108-AA02-DFA0A04FC94B}">
+              <ma14:wrappingTextBoxFlag xmlns:ma14="http://schemas.microsoft.com/office/mac/drawingml/2011/main" xmlns:a14="http://schemas.microsoft.com/office/drawing/2010/main" xmlns:m="http://schemas.openxmlformats.org/officeDocument/2006/math" xmlns="" val="1"/>
+            </a:ext>
+          </a:extLst>
+        </p:spPr>
+        <p:txBody>
+          <a:bodyPr lIns="50800" tIns="50800" rIns="50800" bIns="50800" anchor="ctr">
+            <a:spAutoFit/>
+          </a:bodyPr>
+          <a:lstStyle>
+            <a:lvl1pPr>
+              <a:defRPr sz="1900">
+                <a:latin typeface="Apple SD 산돌고딕 Neo 일반체"/>
+                <a:ea typeface="Apple SD 산돌고딕 Neo 일반체"/>
+                <a:cs typeface="Apple SD 산돌고딕 Neo 일반체"/>
+                <a:sym typeface="Apple SD 산돌고딕 Neo 일반체"/>
+              </a:defRPr>
+            </a:lvl1pPr>
+          </a:lstStyle>
+          <a:p>
+            <a:r>
+              <a:t>scan + audit</a:t>
+            </a:r>
+          </a:p>
+        </p:txBody>
+      </p:sp>
+      <p:sp>
+        <p:nvSpPr>
+          <p:cNvPr id="344" name="선"/>
+          <p:cNvSpPr/>
+          <p:nvPr/>
+        </p:nvSpPr>
+        <p:spPr>
+          <a:xfrm>
+            <a:off x="17272000" y="11493499"/>
+            <a:ext cx="3683000" cy="1"/>
+          </a:xfrm>
+          <a:prstGeom prst="line">
+            <a:avLst/>
+          </a:prstGeom>
+          <a:ln w="25400">
+            <a:solidFill>
+              <a:srgbClr val="FFFFFF"/>
+            </a:solidFill>
+            <a:miter lim="400000"/>
+          </a:ln>
+        </p:spPr>
+        <p:txBody>
+          <a:bodyPr lIns="50800" tIns="50800" rIns="50800" bIns="50800" anchor="ctr"/>
+          <a:lstStyle/>
+          <a:p>
+            <a:endParaRPr/>
+          </a:p>
+        </p:txBody>
+      </p:sp>
+      <p:sp>
+        <p:nvSpPr>
+          <p:cNvPr id="345" name="→"/>
+          <p:cNvSpPr txBox="1"/>
+          <p:nvPr/>
+        </p:nvSpPr>
+        <p:spPr>
+          <a:xfrm>
+            <a:off x="20510500" y="11112500"/>
+            <a:ext cx="571500" cy="469900"/>
+          </a:xfrm>
+          <a:prstGeom prst="rect">
+            <a:avLst/>
+          </a:prstGeom>
+          <a:ln w="12700">
+            <a:miter lim="400000"/>
+          </a:ln>
+          <a:extLst>
+            <a:ext uri="{C572A759-6A51-4108-AA02-DFA0A04FC94B}">
+              <ma14:wrappingTextBoxFlag xmlns:ma14="http://schemas.microsoft.com/office/mac/drawingml/2011/main" xmlns:a14="http://schemas.microsoft.com/office/drawing/2010/main" xmlns:m="http://schemas.openxmlformats.org/officeDocument/2006/math" xmlns="" val="1"/>
+            </a:ext>
+          </a:extLst>
+        </p:spPr>
+        <p:txBody>
+          <a:bodyPr lIns="50800" tIns="50800" rIns="50800" bIns="50800" anchor="ctr">
+            <a:spAutoFit/>
+          </a:bodyPr>
+          <a:lstStyle>
+            <a:lvl1pPr>
+              <a:defRPr sz="2400">
+                <a:solidFill>
+                  <a:srgbClr val="BEC9D4"/>
+                </a:solidFill>
+                <a:latin typeface="Apple SD 산돌고딕 Neo 볼드체"/>
+                <a:ea typeface="Apple SD 산돌고딕 Neo 볼드체"/>
+                <a:cs typeface="Apple SD 산돌고딕 Neo 볼드체"/>
+                <a:sym typeface="Apple SD 산돌고딕 Neo 볼드체"/>
+              </a:defRPr>
+            </a:lvl1pPr>
+          </a:lstStyle>
+          <a:p>
+            <a:r>
+              <a:t>→</a:t>
+            </a:r>
+          </a:p>
+        </p:txBody>
+      </p:sp>
+      <p:sp>
+        <p:nvSpPr>
+          <p:cNvPr id="346" name="완료 = receipt 포함 + 직원별 note 탐색 + payroll plan 대사"/>
           <p:cNvSpPr txBox="1"/>
           <p:nvPr/>
         </p:nvSpPr>
@@ -28576,7 +29863,7 @@
       </p:grpSpPr>
       <p:sp>
         <p:nvSpPr>
-          <p:cNvPr id="320" name="키·서비스 책임 경계"/>
+          <p:cNvPr id="350" name="키·서비스 책임 경계"/>
           <p:cNvSpPr txBox="1">
             <a:spLocks noGrp="1"/>
           </p:cNvSpPr>
@@ -28610,7 +29897,7 @@
       </p:sp>
       <p:sp>
         <p:nvSpPr>
-          <p:cNvPr id="322" name="슬라이드 번호"/>
+          <p:cNvPr id="352" name="슬라이드 번호"/>
           <p:cNvSpPr txBox="1">
             <a:spLocks noGrp="1"/>
           </p:cNvSpPr>
@@ -28646,13 +29933,13 @@
       </p:sp>
       <p:graphicFrame>
         <p:nvGraphicFramePr>
-          <p:cNvPr id="323" name="표 1"/>
+          <p:cNvPr id="353" name="표 1"/>
           <p:cNvGraphicFramePr/>
           <p:nvPr/>
         </p:nvGraphicFramePr>
         <p:xfrm>
           <a:off x="1270000" y="2413000"/>
-          <a:ext cx="21844000" cy="6934200"/>
+          <a:ext cx="21844000" cy="7924800"/>
         </p:xfrm>
         <a:graphic>
           <a:graphicData uri="http://schemas.openxmlformats.org/drawingml/2006/table">
@@ -28827,7 +30114,7 @@
                             <a:srgbClr val="FFFFFF"/>
                           </a:solidFill>
                         </a:rPr>
-                        <a:t>Company wallet</a:t>
+                        <a:t>Payroll app</a:t>
                       </a:r>
                     </a:p>
                   </a:txBody>
@@ -28851,7 +30138,7 @@
                             <a:srgbClr val="FFFFFF"/>
                           </a:solidFill>
                         </a:rPr>
-                        <a:t>COMPANY_PRIVATE_KEY</a:t>
+                        <a:t>registry·plan digest</a:t>
                       </a:r>
                     </a:p>
                   </a:txBody>
@@ -28875,7 +30162,7 @@
                             <a:srgbClr val="FFFFFF"/>
                           </a:solidFill>
                         </a:rPr>
-                        <a:t>deposit·transfer 서명</a:t>
+                        <a:t>승인 plan과 output 결속</a:t>
                       </a:r>
                     </a:p>
                   </a:txBody>
@@ -28899,7 +30186,7 @@
                             <a:srgbClr val="FFFFFF"/>
                           </a:solidFill>
                         </a:rPr>
-                        <a:t>키 노출·잘못된 chain</a:t>
+                        <a:t>직원 profile 오결속</a:t>
                       </a:r>
                     </a:p>
                   </a:txBody>
@@ -28933,7 +30220,7 @@
                             <a:srgbClr val="FFFFFF"/>
                           </a:solidFill>
                         </a:rPr>
-                        <a:t>Prover</a:t>
+                        <a:t>Off-chain prover</a:t>
                       </a:r>
                     </a:p>
                   </a:txBody>
@@ -28957,7 +30244,7 @@
                             <a:srgbClr val="FFFFFF"/>
                           </a:solidFill>
                         </a:rPr>
-                        <a:t>proving key·VK reference</a:t>
+                        <a:t>witness·proving artifact</a:t>
                       </a:r>
                     </a:p>
                   </a:txBody>
@@ -28981,7 +30268,7 @@
                             <a:srgbClr val="FFFFFF"/>
                           </a:solidFill>
                         </a:rPr>
-                        <a:t>witness와 proof 생성</a:t>
+                        <a:t>proof와 암호화 output 생성</a:t>
                       </a:r>
                     </a:p>
                   </a:txBody>
@@ -29005,7 +30292,7 @@
                             <a:srgbClr val="FFFFFF"/>
                           </a:solidFill>
                         </a:rPr>
-                        <a:t>Maroo 비호환 proof</a:t>
+                        <a:t>호환 실패·witness 노출</a:t>
                       </a:r>
                     </a:p>
                   </a:txBody>
@@ -29039,7 +30326,7 @@
                             <a:srgbClr val="FFFFFF"/>
                           </a:solidFill>
                         </a:rPr>
-                        <a:t>PCL</a:t>
+                        <a:t>Company wallet</a:t>
                       </a:r>
                     </a:p>
                   </a:txBody>
@@ -29063,7 +30350,7 @@
                             <a:srgbClr val="FFFFFF"/>
                           </a:solidFill>
                         </a:rPr>
-                        <a:t>policy state·EAS</a:t>
+                        <a:t>COMPANY_PRIVATE_KEY</a:t>
                       </a:r>
                     </a:p>
                   </a:txBody>
@@ -29087,7 +30374,7 @@
                             <a:srgbClr val="FFFFFF"/>
                           </a:solidFill>
                         </a:rPr>
-                        <a:t>호출자와 규칙 판정</a:t>
+                        <a:t>검토·서명·제출</a:t>
                       </a:r>
                     </a:p>
                   </a:txBody>
@@ -29111,7 +30398,7 @@
                             <a:srgbClr val="FFFFFF"/>
                           </a:solidFill>
                         </a:rPr>
-                        <a:t>typed rejection</a:t>
+                        <a:t>키 노출·잘못된 chain</a:t>
                       </a:r>
                     </a:p>
                   </a:txBody>
@@ -29145,7 +30432,7 @@
                             <a:srgbClr val="FFFFFF"/>
                           </a:solidFill>
                         </a:rPr>
-                        <a:t>x/privacy</a:t>
+                        <a:t>PCL wrapper</a:t>
                       </a:r>
                     </a:p>
                   </a:txBody>
@@ -29169,7 +30456,7 @@
                             <a:srgbClr val="FFFFFF"/>
                           </a:solidFill>
                         </a:rPr>
-                        <a:t>VK·root·nullifier</a:t>
+                        <a:t>policy state·EAS</a:t>
                       </a:r>
                     </a:p>
                   </a:txBody>
@@ -29193,7 +30480,7 @@
                             <a:srgbClr val="FFFFFF"/>
                           </a:solidFill>
                         </a:rPr>
-                        <a:t>proof와 상태 전이 검증</a:t>
+                        <a:t>호출 전후 정책 평가·기록</a:t>
                       </a:r>
                     </a:p>
                   </a:txBody>
@@ -29217,7 +30504,7 @@
                             <a:srgbClr val="FFFFFF"/>
                           </a:solidFill>
                         </a:rPr>
-                        <a:t>invalid proof·stale root</a:t>
+                        <a:t>typed rejection</a:t>
                       </a:r>
                     </a:p>
                   </a:txBody>
@@ -29251,7 +30538,7 @@
                             <a:srgbClr val="FFFFFF"/>
                           </a:solidFill>
                         </a:rPr>
-                        <a:t>Employee scanner</a:t>
+                        <a:t>x/privacy verifier</a:t>
                       </a:r>
                     </a:p>
                   </a:txBody>
@@ -29275,7 +30562,7 @@
                             <a:srgbClr val="FFFFFF"/>
                           </a:solidFill>
                         </a:rPr>
-                        <a:t>viewing key</a:t>
+                        <a:t>VK·root·nullifier</a:t>
                       </a:r>
                     </a:p>
                   </a:txBody>
@@ -29299,7 +30586,7 @@
                             <a:srgbClr val="FFFFFF"/>
                           </a:solidFill>
                         </a:rPr>
-                        <a:t>본인 note 탐색</a:t>
+                        <a:t>proof 검증과 상태 전이</a:t>
                       </a:r>
                     </a:p>
                   </a:txBody>
@@ -29323,7 +30610,7 @@
                             <a:srgbClr val="FFFFFF"/>
                           </a:solidFill>
                         </a:rPr>
-                        <a:t>receipt 성공·scan 0</a:t>
+                        <a:t>invalid proof·stale root</a:t>
                       </a:r>
                     </a:p>
                   </a:txBody>
@@ -29357,6 +30644,112 @@
                             <a:srgbClr val="FFFFFF"/>
                           </a:solidFill>
                         </a:rPr>
+                        <a:t>Employee scanner</a:t>
+                      </a:r>
+                    </a:p>
+                  </a:txBody>
+                  <a:tcPr marL="50800" marR="50800" marT="50800" marB="50800" anchor="ctr" horzOverflow="overflow"/>
+                </a:tc>
+                <a:tc>
+                  <a:txBody>
+                    <a:bodyPr/>
+                    <a:lstStyle/>
+                    <a:p>
+                      <a:pPr defTabSz="914400">
+                        <a:defRPr>
+                          <a:solidFill>
+                            <a:srgbClr val="000000"/>
+                          </a:solidFill>
+                        </a:defRPr>
+                      </a:pPr>
+                      <a:r>
+                        <a:rPr sz="3200">
+                          <a:solidFill>
+                            <a:srgbClr val="FFFFFF"/>
+                          </a:solidFill>
+                        </a:rPr>
+                        <a:t>viewing key</a:t>
+                      </a:r>
+                    </a:p>
+                  </a:txBody>
+                  <a:tcPr marL="50800" marR="50800" marT="50800" marB="50800" anchor="ctr" horzOverflow="overflow"/>
+                </a:tc>
+                <a:tc>
+                  <a:txBody>
+                    <a:bodyPr/>
+                    <a:lstStyle/>
+                    <a:p>
+                      <a:pPr defTabSz="914400">
+                        <a:defRPr>
+                          <a:solidFill>
+                            <a:srgbClr val="000000"/>
+                          </a:solidFill>
+                        </a:defRPr>
+                      </a:pPr>
+                      <a:r>
+                        <a:rPr sz="3200">
+                          <a:solidFill>
+                            <a:srgbClr val="FFFFFF"/>
+                          </a:solidFill>
+                        </a:rPr>
+                        <a:t>본인 note 탐색</a:t>
+                      </a:r>
+                    </a:p>
+                  </a:txBody>
+                  <a:tcPr marL="50800" marR="50800" marT="50800" marB="50800" anchor="ctr" horzOverflow="overflow"/>
+                </a:tc>
+                <a:tc>
+                  <a:txBody>
+                    <a:bodyPr/>
+                    <a:lstStyle/>
+                    <a:p>
+                      <a:pPr defTabSz="914400">
+                        <a:defRPr>
+                          <a:solidFill>
+                            <a:srgbClr val="000000"/>
+                          </a:solidFill>
+                        </a:defRPr>
+                      </a:pPr>
+                      <a:r>
+                        <a:rPr sz="3200">
+                          <a:solidFill>
+                            <a:srgbClr val="FFFFFF"/>
+                          </a:solidFill>
+                        </a:rPr>
+                        <a:t>receipt 성공·scan 0</a:t>
+                      </a:r>
+                    </a:p>
+                  </a:txBody>
+                  <a:tcPr marL="50800" marR="50800" marT="50800" marB="50800" anchor="ctr" horzOverflow="overflow"/>
+                </a:tc>
+                <a:extLst>
+                  <a:ext uri="{0D108BD9-81ED-4DB2-BD59-A6C34878D82A}">
+                    <a16:rowId xmlns:a16="http://schemas.microsoft.com/office/drawing/2014/main" val="10006"/>
+                  </a:ext>
+                </a:extLst>
+              </a:tr>
+              <a:tr h="990600">
+                <a:tc>
+                  <a:txBody>
+                    <a:bodyPr/>
+                    <a:lstStyle/>
+                    <a:p>
+                      <a:pPr defTabSz="914400">
+                        <a:tabLst>
+                          <a:tab pos="1663700" algn="l"/>
+                        </a:tabLst>
+                        <a:defRPr b="0">
+                          <a:solidFill>
+                            <a:srgbClr val="000000"/>
+                          </a:solidFill>
+                        </a:defRPr>
+                      </a:pPr>
+                      <a:r>
+                        <a:rPr sz="3200" b="1">
+                          <a:solidFill>
+                            <a:srgbClr val="FFFFFF"/>
+                          </a:solidFill>
+                        </a:rPr>
                         <a:t>Auditor</a:t>
                       </a:r>
                     </a:p>
@@ -29405,7 +30798,7 @@
                             <a:srgbClr val="FFFFFF"/>
                           </a:solidFill>
                         </a:rPr>
-                        <a:t>총액과 업무 의도 대사</a:t>
+                        <a:t>허용 범위와 업무 의도 대사</a:t>
                       </a:r>
                     </a:p>
                   </a:txBody>
@@ -29437,7 +30830,7 @@
                 </a:tc>
                 <a:extLst>
                   <a:ext uri="{0D108BD9-81ED-4DB2-BD59-A6C34878D82A}">
-                    <a16:rowId xmlns:a16="http://schemas.microsoft.com/office/drawing/2014/main" val="10006"/>
+                    <a16:rowId xmlns:a16="http://schemas.microsoft.com/office/drawing/2014/main" val="10007"/>
                   </a:ext>
                 </a:extLst>
               </a:tr>
